--- a/Lecture_06/Основы_RAG_Retrieval-Augmented_Generation.pptx
+++ b/Lecture_06/Основы_RAG_Retrieval-Augmented_Generation.pptx
@@ -4,6 +4,9 @@
   <p:sldMasterIdLst>
     <p:sldMasterId id="2147483648" r:id="rId1"/>
   </p:sldMasterIdLst>
+  <p:notesMasterIdLst>
+    <p:notesMasterId r:id="rId20"/>
+  </p:notesMasterIdLst>
   <p:sldIdLst>
     <p:sldId id="256" r:id="rId2"/>
     <p:sldId id="257" r:id="rId3"/>
@@ -24,10 +27,7 @@
     <p:sldId id="272" r:id="rId18"/>
     <p:sldId id="273" r:id="rId19"/>
   </p:sldIdLst>
-  <p:notesMasterIdLst>
-    <p:notesMasterId r:id="rId20"/>
-  </p:notesMasterIdLst>
-  <p:sldSz cx="9144000" cy="5143500"/>
+  <p:sldSz cx="9144000" cy="5143500" type="screen16x9"/>
   <p:notesSz cx="5143500" cy="9144000"/>
   <p:defaultTextStyle>
     <a:lvl1pPr marL="0" algn="l" defTabSz="914400" rtl="0" eaLnBrk="1" latinLnBrk="0" hangingPunct="1">
@@ -121,6 +121,11 @@
       </a:defRPr>
     </a:lvl9pPr>
   </p:defaultTextStyle>
+  <p:extLst>
+    <p:ext uri="{EFAFB233-063F-42B5-8137-9DF3F51BA10A}">
+      <p15:sldGuideLst xmlns:p15="http://schemas.microsoft.com/office/powerpoint/2012/main"/>
+    </p:ext>
+  </p:extLst>
 </p:presentation>
 </file>
 
@@ -146,234 +151,10 @@
           <a:chExt cx="0" cy="0"/>
         </a:xfrm>
       </p:grpSpPr>
-      <p:sp>
-        <p:nvSpPr>
-          <p:cNvPr id="2" name="Header Placeholder 1"/>
-          <p:cNvSpPr>
-            <a:spLocks noGrp="1"/>
-          </p:cNvSpPr>
-          <p:nvPr>
-            <p:ph type="hdr" sz="quarter"/>
-          </p:nvPr>
-        </p:nvSpPr>
-        <p:spPr>
-          <a:xfrm>
-            <a:off x="0" y="0"/>
-            <a:ext cx="2971800" cy="458788"/>
-          </a:xfrm>
-          <a:prstGeom prst="rect">
-            <a:avLst/>
-          </a:prstGeom>
-        </p:spPr>
-        <p:txBody>
-          <a:bodyPr vert="horz" lIns="91440" tIns="45720" rIns="91440" bIns="45720" rtlCol="0"/>
-          <a:lstStyle>
-            <a:lvl1pPr algn="l">
-              <a:defRPr sz="1200"/>
-            </a:lvl1pPr>
-          </a:lstStyle>
-          <a:p>
-            <a:endParaRPr lang="en-US"/>
-          </a:p>
-        </p:txBody>
-      </p:sp>
-      <p:sp>
-        <p:nvSpPr>
-          <p:cNvPr id="3" name="Date Placeholder 2"/>
-          <p:cNvSpPr>
-            <a:spLocks noGrp="1"/>
-          </p:cNvSpPr>
-          <p:nvPr>
-            <p:ph type="dt" idx="1"/>
-          </p:nvPr>
-        </p:nvSpPr>
-        <p:spPr>
-          <a:xfrm>
-            <a:off x="3884613" y="0"/>
-            <a:ext cx="2971800" cy="458788"/>
-          </a:xfrm>
-          <a:prstGeom prst="rect">
-            <a:avLst/>
-          </a:prstGeom>
-        </p:spPr>
-        <p:txBody>
-          <a:bodyPr vert="horz" lIns="91440" tIns="45720" rIns="91440" bIns="45720" rtlCol="0"/>
-          <a:lstStyle>
-            <a:lvl1pPr algn="r">
-              <a:defRPr sz="1200"/>
-            </a:lvl1pPr>
-          </a:lstStyle>
-          <a:p>
-            <a:fld id="{5282F153-3F37-0F45-9E97-73ACFA13230C}" type="datetimeFigureOut">
-              <a:rPr lang="en-US"/>
-              <a:t>7/23/19</a:t>
-            </a:fld>
-            <a:endParaRPr lang="en-US"/>
-          </a:p>
-        </p:txBody>
-      </p:sp>
-      <p:sp>
-        <p:nvSpPr>
-          <p:cNvPr id="4" name="Slide Image Placeholder 3"/>
-          <p:cNvSpPr>
-            <a:spLocks noGrp="1" noRot="1" noChangeAspect="1"/>
-          </p:cNvSpPr>
-          <p:nvPr>
-            <p:ph type="sldImg" idx="2"/>
-          </p:nvPr>
-        </p:nvSpPr>
-        <p:spPr>
-          <a:xfrm>
-            <a:off x="685800" y="1143000"/>
-            <a:ext cx="5486400" cy="3086100"/>
-          </a:xfrm>
-          <a:prstGeom prst="rect">
-            <a:avLst/>
-          </a:prstGeom>
-          <a:noFill/>
-          <a:ln w="12700">
-            <a:solidFill>
-              <a:prstClr val="black"/>
-            </a:solidFill>
-          </a:ln>
-        </p:spPr>
-        <p:txBody>
-          <a:bodyPr vert="horz" lIns="91440" tIns="45720" rIns="91440" bIns="45720" rtlCol="0" anchor="ctr"/>
-          <a:lstStyle/>
-          <a:p>
-            <a:endParaRPr lang="en-US"/>
-          </a:p>
-        </p:txBody>
-      </p:sp>
-      <p:sp>
-        <p:nvSpPr>
-          <p:cNvPr id="5" name="Notes Placeholder 4"/>
-          <p:cNvSpPr>
-            <a:spLocks noGrp="1"/>
-          </p:cNvSpPr>
-          <p:nvPr>
-            <p:ph type="body" sz="quarter" idx="3"/>
-          </p:nvPr>
-        </p:nvSpPr>
-        <p:spPr>
-          <a:xfrm>
-            <a:off x="685800" y="4400550"/>
-            <a:ext cx="5486400" cy="3600450"/>
-          </a:xfrm>
-          <a:prstGeom prst="rect">
-            <a:avLst/>
-          </a:prstGeom>
-        </p:spPr>
-        <p:txBody>
-          <a:bodyPr vert="horz" lIns="91440" tIns="45720" rIns="91440" bIns="45720" rtlCol="0"/>
-          <a:lstStyle/>
-          <a:p>
-            <a:pPr lvl="0"/>
-            <a:r>
-              <a:rPr lang="en-US"/>
-              <a:t>Click to edit Master text styles</a:t>
-            </a:r>
-          </a:p>
-          <a:p>
-            <a:pPr lvl="1"/>
-            <a:r>
-              <a:rPr lang="en-US"/>
-              <a:t>Second level</a:t>
-            </a:r>
-          </a:p>
-          <a:p>
-            <a:pPr lvl="2"/>
-            <a:r>
-              <a:rPr lang="en-US"/>
-              <a:t>Third level</a:t>
-            </a:r>
-          </a:p>
-          <a:p>
-            <a:pPr lvl="3"/>
-            <a:r>
-              <a:rPr lang="en-US"/>
-              <a:t>Fourth level</a:t>
-            </a:r>
-          </a:p>
-          <a:p>
-            <a:pPr lvl="4"/>
-            <a:r>
-              <a:rPr lang="en-US"/>
-              <a:t>Fifth level</a:t>
-            </a:r>
-          </a:p>
-        </p:txBody>
-      </p:sp>
-      <p:sp>
-        <p:nvSpPr>
-          <p:cNvPr id="6" name="Footer Placeholder 5"/>
-          <p:cNvSpPr>
-            <a:spLocks noGrp="1"/>
-          </p:cNvSpPr>
-          <p:nvPr>
-            <p:ph type="ftr" sz="quarter" idx="4"/>
-          </p:nvPr>
-        </p:nvSpPr>
-        <p:spPr>
-          <a:xfrm>
-            <a:off x="0" y="8685213"/>
-            <a:ext cx="2971800" cy="458787"/>
-          </a:xfrm>
-          <a:prstGeom prst="rect">
-            <a:avLst/>
-          </a:prstGeom>
-        </p:spPr>
-        <p:txBody>
-          <a:bodyPr vert="horz" lIns="91440" tIns="45720" rIns="91440" bIns="45720" rtlCol="0" anchor="b"/>
-          <a:lstStyle>
-            <a:lvl1pPr algn="l">
-              <a:defRPr sz="1200"/>
-            </a:lvl1pPr>
-          </a:lstStyle>
-          <a:p>
-            <a:endParaRPr lang="en-US"/>
-          </a:p>
-        </p:txBody>
-      </p:sp>
-      <p:sp>
-        <p:nvSpPr>
-          <p:cNvPr id="7" name="Slide Number Placeholder 6"/>
-          <p:cNvSpPr>
-            <a:spLocks noGrp="1"/>
-          </p:cNvSpPr>
-          <p:nvPr>
-            <p:ph type="sldNum" sz="quarter" idx="5"/>
-          </p:nvPr>
-        </p:nvSpPr>
-        <p:spPr>
-          <a:xfrm>
-            <a:off x="3884613" y="8685213"/>
-            <a:ext cx="2971800" cy="458787"/>
-          </a:xfrm>
-          <a:prstGeom prst="rect">
-            <a:avLst/>
-          </a:prstGeom>
-        </p:spPr>
-        <p:txBody>
-          <a:bodyPr vert="horz" lIns="91440" tIns="45720" rIns="91440" bIns="45720" rtlCol="0" anchor="b"/>
-          <a:lstStyle>
-            <a:lvl1pPr algn="r">
-              <a:defRPr sz="1200"/>
-            </a:lvl1pPr>
-          </a:lstStyle>
-          <a:p>
-            <a:fld id="{CE5E9CC1-C706-0F49-92D6-E571CC5EEA8F}" type="slidenum">
-              <a:rPr lang="en-US"/>
-              <a:t>‹#›</a:t>
-            </a:fld>
-            <a:endParaRPr lang="en-US"/>
-          </a:p>
-        </p:txBody>
-      </p:sp>
     </p:spTree>
     <p:extLst>
       <p:ext uri="{BB962C8B-B14F-4D97-AF65-F5344CB8AC3E}">
-        <p14:creationId xmlns:p14="http://schemas.microsoft.com/office/powerpoint/2010/main" val="1024086991"/>
+        <p14:creationId xmlns:p14="http://schemas.microsoft.com/office/powerpoint/2010/main" val="692253889"/>
       </p:ext>
     </p:extLst>
   </p:cSld>
@@ -517,10 +298,6 @@
           <a:bodyPr/>
           <a:lstStyle/>
           <a:p>
-            <a:r>
-              <a:rPr lang="en-US" dirty="0"/>
-              <a:t/>
-            </a:r>
             <a:endParaRPr lang="en-US" dirty="0"/>
           </a:p>
         </p:txBody>
@@ -605,10 +382,6 @@
           <a:bodyPr/>
           <a:lstStyle/>
           <a:p>
-            <a:r>
-              <a:rPr lang="en-US" dirty="0"/>
-              <a:t/>
-            </a:r>
             <a:endParaRPr lang="en-US" dirty="0"/>
           </a:p>
         </p:txBody>
@@ -693,10 +466,6 @@
           <a:bodyPr/>
           <a:lstStyle/>
           <a:p>
-            <a:r>
-              <a:rPr lang="en-US" dirty="0"/>
-              <a:t/>
-            </a:r>
             <a:endParaRPr lang="en-US" dirty="0"/>
           </a:p>
         </p:txBody>
@@ -781,10 +550,6 @@
           <a:bodyPr/>
           <a:lstStyle/>
           <a:p>
-            <a:r>
-              <a:rPr lang="en-US" dirty="0"/>
-              <a:t/>
-            </a:r>
             <a:endParaRPr lang="en-US" dirty="0"/>
           </a:p>
         </p:txBody>
@@ -869,10 +634,6 @@
           <a:bodyPr/>
           <a:lstStyle/>
           <a:p>
-            <a:r>
-              <a:rPr lang="en-US" dirty="0"/>
-              <a:t/>
-            </a:r>
             <a:endParaRPr lang="en-US" dirty="0"/>
           </a:p>
         </p:txBody>
@@ -957,10 +718,6 @@
           <a:bodyPr/>
           <a:lstStyle/>
           <a:p>
-            <a:r>
-              <a:rPr lang="en-US" dirty="0"/>
-              <a:t/>
-            </a:r>
             <a:endParaRPr lang="en-US" dirty="0"/>
           </a:p>
         </p:txBody>
@@ -1045,10 +802,6 @@
           <a:bodyPr/>
           <a:lstStyle/>
           <a:p>
-            <a:r>
-              <a:rPr lang="en-US" dirty="0"/>
-              <a:t/>
-            </a:r>
             <a:endParaRPr lang="en-US" dirty="0"/>
           </a:p>
         </p:txBody>
@@ -1133,10 +886,6 @@
           <a:bodyPr/>
           <a:lstStyle/>
           <a:p>
-            <a:r>
-              <a:rPr lang="en-US" dirty="0"/>
-              <a:t/>
-            </a:r>
             <a:endParaRPr lang="en-US" dirty="0"/>
           </a:p>
         </p:txBody>
@@ -1221,10 +970,6 @@
           <a:bodyPr/>
           <a:lstStyle/>
           <a:p>
-            <a:r>
-              <a:rPr lang="en-US" dirty="0"/>
-              <a:t/>
-            </a:r>
             <a:endParaRPr lang="en-US" dirty="0"/>
           </a:p>
         </p:txBody>
@@ -1309,10 +1054,6 @@
           <a:bodyPr/>
           <a:lstStyle/>
           <a:p>
-            <a:r>
-              <a:rPr lang="en-US" dirty="0"/>
-              <a:t/>
-            </a:r>
             <a:endParaRPr lang="en-US" dirty="0"/>
           </a:p>
         </p:txBody>
@@ -1397,10 +1138,6 @@
           <a:bodyPr/>
           <a:lstStyle/>
           <a:p>
-            <a:r>
-              <a:rPr lang="en-US" dirty="0"/>
-              <a:t/>
-            </a:r>
             <a:endParaRPr lang="en-US" dirty="0"/>
           </a:p>
         </p:txBody>
@@ -1485,10 +1222,6 @@
           <a:bodyPr/>
           <a:lstStyle/>
           <a:p>
-            <a:r>
-              <a:rPr lang="en-US" dirty="0"/>
-              <a:t/>
-            </a:r>
             <a:endParaRPr lang="en-US" dirty="0"/>
           </a:p>
         </p:txBody>
@@ -1573,10 +1306,6 @@
           <a:bodyPr/>
           <a:lstStyle/>
           <a:p>
-            <a:r>
-              <a:rPr lang="en-US" dirty="0"/>
-              <a:t/>
-            </a:r>
             <a:endParaRPr lang="en-US" dirty="0"/>
           </a:p>
         </p:txBody>
@@ -1661,10 +1390,6 @@
           <a:bodyPr/>
           <a:lstStyle/>
           <a:p>
-            <a:r>
-              <a:rPr lang="en-US" dirty="0"/>
-              <a:t/>
-            </a:r>
             <a:endParaRPr lang="en-US" dirty="0"/>
           </a:p>
         </p:txBody>
@@ -1749,10 +1474,6 @@
           <a:bodyPr/>
           <a:lstStyle/>
           <a:p>
-            <a:r>
-              <a:rPr lang="en-US" dirty="0"/>
-              <a:t/>
-            </a:r>
             <a:endParaRPr lang="en-US" dirty="0"/>
           </a:p>
         </p:txBody>
@@ -1837,10 +1558,6 @@
           <a:bodyPr/>
           <a:lstStyle/>
           <a:p>
-            <a:r>
-              <a:rPr lang="en-US" dirty="0"/>
-              <a:t/>
-            </a:r>
             <a:endParaRPr lang="en-US" dirty="0"/>
           </a:p>
         </p:txBody>
@@ -1925,10 +1642,6 @@
           <a:bodyPr/>
           <a:lstStyle/>
           <a:p>
-            <a:r>
-              <a:rPr lang="en-US" dirty="0"/>
-              <a:t/>
-            </a:r>
             <a:endParaRPr lang="en-US" dirty="0"/>
           </a:p>
         </p:txBody>
@@ -2013,10 +1726,6 @@
           <a:bodyPr/>
           <a:lstStyle/>
           <a:p>
-            <a:r>
-              <a:rPr lang="en-US" dirty="0"/>
-              <a:t/>
-            </a:r>
             <a:endParaRPr lang="en-US" dirty="0"/>
           </a:p>
         </p:txBody>
@@ -2090,6 +1799,11 @@
 <file path=ppt/slideMasters/slideMaster1.xml><?xml version="1.0" encoding="utf-8"?>
 <p:sldMaster xmlns:a="http://schemas.openxmlformats.org/drawingml/2006/main" xmlns:r="http://schemas.openxmlformats.org/officeDocument/2006/relationships" xmlns:p="http://schemas.openxmlformats.org/presentationml/2006/main">
   <p:cSld>
+    <p:bg>
+      <p:bgRef idx="1001">
+        <a:schemeClr val="bg1"/>
+      </p:bgRef>
+    </p:bg>
     <p:spTree>
       <p:nvGrpSpPr>
         <p:cNvPr id="1" name=""/>
@@ -2383,14 +2097,14 @@
       </p:grpSpPr>
       <p:pic>
         <p:nvPicPr>
-          <p:cNvPr id="2" name="Image 0" descr="preencoded.png">    </p:cNvPr>
+          <p:cNvPr id="2" name="Image 0" descr="preencoded.png"/>
           <p:cNvPicPr>
             <a:picLocks noChangeAspect="1"/>
           </p:cNvPicPr>
           <p:nvPr/>
         </p:nvPicPr>
         <p:blipFill>
-          <a:blip r:embed="rId1"/>
+          <a:blip r:embed="rId3"/>
           <a:stretch>
             <a:fillRect/>
           </a:stretch>
@@ -2428,14 +2142,14 @@
           </a:bodyPr>
           <a:lstStyle/>
           <a:p>
-            <a:pPr algn="l" indent="0" marL="0">
+            <a:pPr marL="0" indent="0" algn="l">
               <a:lnSpc>
                 <a:spcPts val="4900"/>
               </a:lnSpc>
               <a:buNone/>
             </a:pPr>
             <a:r>
-              <a:rPr lang="en-US" sz="4974" b="1" spc="-2" kern="0" dirty="0">
+              <a:rPr lang="en-US" sz="4974" b="1" kern="0" spc="-2" dirty="0">
                 <a:solidFill>
                   <a:srgbClr val="1A1A1A"/>
                 </a:solidFill>
@@ -2469,14 +2183,14 @@
           </a:bodyPr>
           <a:lstStyle/>
           <a:p>
-            <a:pPr algn="l" indent="0" marL="0">
+            <a:pPr marL="0" indent="0" algn="l">
               <a:lnSpc>
                 <a:spcPts val="3200"/>
               </a:lnSpc>
               <a:buNone/>
             </a:pPr>
             <a:r>
-              <a:rPr lang="en-US" sz="2592" spc="-1" kern="0" dirty="0">
+              <a:rPr lang="en-US" sz="2592" kern="0" spc="-1" dirty="0">
                 <a:solidFill>
                   <a:srgbClr val="333333"/>
                 </a:solidFill>
@@ -2510,7 +2224,7 @@
           </a:bodyPr>
           <a:lstStyle/>
           <a:p>
-            <a:pPr algn="l" indent="0" marL="0">
+            <a:pPr marL="0" indent="0" algn="l">
               <a:lnSpc>
                 <a:spcPts val="1900"/>
               </a:lnSpc>
@@ -2551,7 +2265,7 @@
           </a:bodyPr>
           <a:lstStyle/>
           <a:p>
-            <a:pPr algn="l" indent="0" marL="0">
+            <a:pPr marL="0" indent="0" algn="l">
               <a:lnSpc>
                 <a:spcPts val="1100"/>
               </a:lnSpc>
@@ -2596,14 +2310,14 @@
       </p:grpSpPr>
       <p:pic>
         <p:nvPicPr>
-          <p:cNvPr id="2" name="Image 0" descr="preencoded.png">    </p:cNvPr>
+          <p:cNvPr id="2" name="Image 0" descr="preencoded.png"/>
           <p:cNvPicPr>
             <a:picLocks noChangeAspect="1"/>
           </p:cNvPicPr>
           <p:nvPr/>
         </p:nvPicPr>
         <p:blipFill>
-          <a:blip r:embed="rId1"/>
+          <a:blip r:embed="rId3"/>
           <a:stretch>
             <a:fillRect/>
           </a:stretch>
@@ -2639,6 +2353,13 @@
           </a:solidFill>
           <a:ln/>
         </p:spPr>
+        <p:txBody>
+          <a:bodyPr/>
+          <a:lstStyle/>
+          <a:p>
+            <a:endParaRPr lang="ru-KZ"/>
+          </a:p>
+        </p:txBody>
       </p:sp>
       <p:sp>
         <p:nvSpPr>
@@ -2659,6 +2380,13 @@
           </a:solidFill>
           <a:ln/>
         </p:spPr>
+        <p:txBody>
+          <a:bodyPr/>
+          <a:lstStyle/>
+          <a:p>
+            <a:endParaRPr lang="ru-KZ"/>
+          </a:p>
+        </p:txBody>
       </p:sp>
       <p:sp>
         <p:nvSpPr>
@@ -2683,14 +2411,14 @@
           </a:bodyPr>
           <a:lstStyle/>
           <a:p>
-            <a:pPr algn="l" indent="0" marL="0">
+            <a:pPr marL="0" indent="0" algn="l">
               <a:lnSpc>
                 <a:spcPts val="2800"/>
               </a:lnSpc>
               <a:buNone/>
             </a:pPr>
             <a:r>
-              <a:rPr lang="en-US" sz="2121" b="1" spc="-1" kern="0" dirty="0">
+              <a:rPr lang="en-US" sz="2121" b="1" kern="0" spc="-1" dirty="0">
                 <a:solidFill>
                   <a:srgbClr val="1A1A1A"/>
                 </a:solidFill>
@@ -2724,7 +2452,7 @@
           </a:bodyPr>
           <a:lstStyle/>
           <a:p>
-            <a:pPr algn="l" indent="0" marL="0">
+            <a:pPr marL="0" indent="0" algn="l">
               <a:lnSpc>
                 <a:spcPts val="1600"/>
               </a:lnSpc>
@@ -2765,7 +2493,7 @@
           </a:bodyPr>
           <a:lstStyle/>
           <a:p>
-            <a:pPr algn="l" indent="0" marL="0">
+            <a:pPr marL="0" indent="0" algn="l">
               <a:lnSpc>
                 <a:spcPts val="1600"/>
               </a:lnSpc>
@@ -2806,7 +2534,7 @@
           </a:bodyPr>
           <a:lstStyle/>
           <a:p>
-            <a:pPr algn="l" indent="0" marL="0">
+            <a:pPr marL="0" indent="0" algn="l">
               <a:lnSpc>
                 <a:spcPts val="1500"/>
               </a:lnSpc>
@@ -2847,7 +2575,7 @@
           </a:bodyPr>
           <a:lstStyle/>
           <a:p>
-            <a:pPr algn="l" indent="0" marL="0">
+            <a:pPr marL="0" indent="0" algn="l">
               <a:lnSpc>
                 <a:spcPts val="1600"/>
               </a:lnSpc>
@@ -2888,7 +2616,7 @@
           </a:bodyPr>
           <a:lstStyle/>
           <a:p>
-            <a:pPr algn="l" indent="0" marL="0">
+            <a:pPr marL="0" indent="0" algn="l">
               <a:lnSpc>
                 <a:spcPts val="1500"/>
               </a:lnSpc>
@@ -2929,7 +2657,7 @@
           </a:bodyPr>
           <a:lstStyle/>
           <a:p>
-            <a:pPr algn="l" indent="0" marL="0">
+            <a:pPr marL="0" indent="0" algn="l">
               <a:lnSpc>
                 <a:spcPts val="1600"/>
               </a:lnSpc>
@@ -2970,7 +2698,7 @@
           </a:bodyPr>
           <a:lstStyle/>
           <a:p>
-            <a:pPr algn="l" indent="0" marL="0">
+            <a:pPr marL="0" indent="0" algn="l">
               <a:lnSpc>
                 <a:spcPts val="1500"/>
               </a:lnSpc>
@@ -3011,7 +2739,7 @@
           </a:bodyPr>
           <a:lstStyle/>
           <a:p>
-            <a:pPr algn="l" indent="0" marL="0">
+            <a:pPr marL="0" indent="0" algn="l">
               <a:lnSpc>
                 <a:spcPts val="1100"/>
               </a:lnSpc>
@@ -3053,17 +2781,24 @@
             <a:prstDash val="solid"/>
           </a:ln>
         </p:spPr>
+        <p:txBody>
+          <a:bodyPr/>
+          <a:lstStyle/>
+          <a:p>
+            <a:endParaRPr lang="ru-KZ"/>
+          </a:p>
+        </p:txBody>
       </p:sp>
       <p:pic>
         <p:nvPicPr>
-          <p:cNvPr id="15" name="Image 1" descr="preencoded.png">    </p:cNvPr>
+          <p:cNvPr id="15" name="Image 1" descr="preencoded.png"/>
           <p:cNvPicPr>
             <a:picLocks noChangeAspect="1"/>
           </p:cNvPicPr>
           <p:nvPr/>
         </p:nvPicPr>
         <p:blipFill>
-          <a:blip r:embed="rId2">
+          <a:blip r:embed="rId4">
             <a:alphaModFix amt="90000"/>
           </a:blip>
           <a:stretch>
@@ -3107,14 +2842,14 @@
       </p:grpSpPr>
       <p:pic>
         <p:nvPicPr>
-          <p:cNvPr id="2" name="Image 0" descr="preencoded.png">    </p:cNvPr>
+          <p:cNvPr id="2" name="Image 0" descr="preencoded.png"/>
           <p:cNvPicPr>
             <a:picLocks noChangeAspect="1"/>
           </p:cNvPicPr>
           <p:nvPr/>
         </p:nvPicPr>
         <p:blipFill>
-          <a:blip r:embed="rId1"/>
+          <a:blip r:embed="rId3"/>
           <a:stretch>
             <a:fillRect/>
           </a:stretch>
@@ -3150,6 +2885,13 @@
           </a:solidFill>
           <a:ln/>
         </p:spPr>
+        <p:txBody>
+          <a:bodyPr/>
+          <a:lstStyle/>
+          <a:p>
+            <a:endParaRPr lang="ru-KZ"/>
+          </a:p>
+        </p:txBody>
       </p:sp>
       <p:sp>
         <p:nvSpPr>
@@ -3170,6 +2912,13 @@
           </a:solidFill>
           <a:ln/>
         </p:spPr>
+        <p:txBody>
+          <a:bodyPr/>
+          <a:lstStyle/>
+          <a:p>
+            <a:endParaRPr lang="ru-KZ"/>
+          </a:p>
+        </p:txBody>
       </p:sp>
       <p:sp>
         <p:nvSpPr>
@@ -3194,14 +2943,14 @@
           </a:bodyPr>
           <a:lstStyle/>
           <a:p>
-            <a:pPr algn="l" indent="0" marL="0">
+            <a:pPr marL="0" indent="0" algn="l">
               <a:lnSpc>
                 <a:spcPts val="2800"/>
               </a:lnSpc>
               <a:buNone/>
             </a:pPr>
             <a:r>
-              <a:rPr lang="en-US" sz="2121" b="1" spc="-1" kern="0" dirty="0">
+              <a:rPr lang="en-US" sz="2121" b="1" kern="0" spc="-1" dirty="0">
                 <a:solidFill>
                   <a:srgbClr val="1A1A1A"/>
                 </a:solidFill>
@@ -3235,7 +2984,7 @@
           </a:bodyPr>
           <a:lstStyle/>
           <a:p>
-            <a:pPr algn="l" indent="0" marL="0">
+            <a:pPr marL="0" indent="0" algn="l">
               <a:lnSpc>
                 <a:spcPts val="1600"/>
               </a:lnSpc>
@@ -3276,7 +3025,7 @@
           </a:bodyPr>
           <a:lstStyle/>
           <a:p>
-            <a:pPr algn="l" indent="0" marL="0">
+            <a:pPr marL="0" indent="0" algn="l">
               <a:lnSpc>
                 <a:spcPts val="1600"/>
               </a:lnSpc>
@@ -3317,7 +3066,7 @@
           </a:bodyPr>
           <a:lstStyle/>
           <a:p>
-            <a:pPr algn="l" indent="0" marL="0">
+            <a:pPr marL="0" indent="0" algn="l">
               <a:lnSpc>
                 <a:spcPts val="1400"/>
               </a:lnSpc>
@@ -3358,7 +3107,7 @@
           </a:bodyPr>
           <a:lstStyle/>
           <a:p>
-            <a:pPr algn="l" indent="0" marL="0">
+            <a:pPr marL="0" indent="0" algn="l">
               <a:lnSpc>
                 <a:spcPts val="1600"/>
               </a:lnSpc>
@@ -3399,7 +3148,7 @@
           </a:bodyPr>
           <a:lstStyle/>
           <a:p>
-            <a:pPr algn="l" indent="0" marL="0">
+            <a:pPr marL="0" indent="0" algn="l">
               <a:lnSpc>
                 <a:spcPts val="1400"/>
               </a:lnSpc>
@@ -3440,7 +3189,7 @@
           </a:bodyPr>
           <a:lstStyle/>
           <a:p>
-            <a:pPr algn="l" indent="0" marL="0">
+            <a:pPr marL="0" indent="0" algn="l">
               <a:lnSpc>
                 <a:spcPts val="1600"/>
               </a:lnSpc>
@@ -3481,7 +3230,7 @@
           </a:bodyPr>
           <a:lstStyle/>
           <a:p>
-            <a:pPr algn="l" indent="0" marL="0">
+            <a:pPr marL="0" indent="0" algn="l">
               <a:lnSpc>
                 <a:spcPts val="1400"/>
               </a:lnSpc>
@@ -3518,6 +3267,13 @@
           </a:solidFill>
           <a:ln/>
         </p:spPr>
+        <p:txBody>
+          <a:bodyPr/>
+          <a:lstStyle/>
+          <a:p>
+            <a:endParaRPr lang="ru-KZ"/>
+          </a:p>
+        </p:txBody>
       </p:sp>
       <p:sp>
         <p:nvSpPr>
@@ -3542,7 +3298,7 @@
           </a:bodyPr>
           <a:lstStyle/>
           <a:p>
-            <a:pPr algn="l" indent="0" marL="0">
+            <a:pPr marL="0" indent="0" algn="l">
               <a:lnSpc>
                 <a:spcPts val="1300"/>
               </a:lnSpc>
@@ -3583,7 +3339,7 @@
           </a:bodyPr>
           <a:lstStyle/>
           <a:p>
-            <a:pPr algn="l" indent="0" marL="0">
+            <a:pPr marL="0" indent="0" algn="l">
               <a:lnSpc>
                 <a:spcPts val="1300"/>
               </a:lnSpc>
@@ -3624,7 +3380,7 @@
           </a:bodyPr>
           <a:lstStyle/>
           <a:p>
-            <a:pPr algn="l" indent="0" marL="0">
+            <a:pPr marL="0" indent="0" algn="l">
               <a:lnSpc>
                 <a:spcPts val="1300"/>
               </a:lnSpc>
@@ -3665,7 +3421,7 @@
           </a:bodyPr>
           <a:lstStyle/>
           <a:p>
-            <a:pPr algn="l" indent="0" marL="0">
+            <a:pPr marL="0" indent="0" algn="l">
               <a:lnSpc>
                 <a:spcPts val="1300"/>
               </a:lnSpc>
@@ -3707,17 +3463,24 @@
             <a:prstDash val="solid"/>
           </a:ln>
         </p:spPr>
+        <p:txBody>
+          <a:bodyPr/>
+          <a:lstStyle/>
+          <a:p>
+            <a:endParaRPr lang="ru-KZ"/>
+          </a:p>
+        </p:txBody>
       </p:sp>
       <p:pic>
         <p:nvPicPr>
-          <p:cNvPr id="19" name="Image 1" descr="preencoded.png">    </p:cNvPr>
+          <p:cNvPr id="19" name="Image 1" descr="preencoded.png"/>
           <p:cNvPicPr>
             <a:picLocks noChangeAspect="1"/>
           </p:cNvPicPr>
           <p:nvPr/>
         </p:nvPicPr>
         <p:blipFill>
-          <a:blip r:embed="rId2"/>
+          <a:blip r:embed="rId4"/>
           <a:stretch>
             <a:fillRect/>
           </a:stretch>
@@ -3759,14 +3522,14 @@
       </p:grpSpPr>
       <p:pic>
         <p:nvPicPr>
-          <p:cNvPr id="2" name="Image 0" descr="preencoded.png">    </p:cNvPr>
+          <p:cNvPr id="2" name="Image 0" descr="preencoded.png"/>
           <p:cNvPicPr>
             <a:picLocks noChangeAspect="1"/>
           </p:cNvPicPr>
           <p:nvPr/>
         </p:nvPicPr>
         <p:blipFill>
-          <a:blip r:embed="rId1"/>
+          <a:blip r:embed="rId3"/>
           <a:stretch>
             <a:fillRect/>
           </a:stretch>
@@ -3802,6 +3565,13 @@
           </a:solidFill>
           <a:ln/>
         </p:spPr>
+        <p:txBody>
+          <a:bodyPr/>
+          <a:lstStyle/>
+          <a:p>
+            <a:endParaRPr lang="ru-KZ"/>
+          </a:p>
+        </p:txBody>
       </p:sp>
       <p:sp>
         <p:nvSpPr>
@@ -3822,6 +3592,13 @@
           </a:solidFill>
           <a:ln/>
         </p:spPr>
+        <p:txBody>
+          <a:bodyPr/>
+          <a:lstStyle/>
+          <a:p>
+            <a:endParaRPr lang="ru-KZ"/>
+          </a:p>
+        </p:txBody>
       </p:sp>
       <p:sp>
         <p:nvSpPr>
@@ -3846,14 +3623,14 @@
           </a:bodyPr>
           <a:lstStyle/>
           <a:p>
-            <a:pPr algn="l" indent="0" marL="0">
+            <a:pPr marL="0" indent="0" algn="l">
               <a:lnSpc>
                 <a:spcPts val="2800"/>
               </a:lnSpc>
               <a:buNone/>
             </a:pPr>
             <a:r>
-              <a:rPr lang="en-US" sz="2121" b="1" spc="-1" kern="0" dirty="0">
+              <a:rPr lang="en-US" sz="2121" b="1" kern="0" spc="-1" dirty="0">
                 <a:solidFill>
                   <a:srgbClr val="1A1A1A"/>
                 </a:solidFill>
@@ -3887,7 +3664,7 @@
           </a:bodyPr>
           <a:lstStyle/>
           <a:p>
-            <a:pPr algn="l" indent="0" marL="0">
+            <a:pPr marL="0" indent="0" algn="l">
               <a:lnSpc>
                 <a:spcPts val="1600"/>
               </a:lnSpc>
@@ -3928,14 +3705,14 @@
           </a:bodyPr>
           <a:lstStyle/>
           <a:p>
-            <a:pPr algn="l" indent="0" marL="0">
+            <a:pPr marL="0" indent="0" algn="l">
               <a:lnSpc>
                 <a:spcPts val="1100"/>
               </a:lnSpc>
               <a:buNone/>
             </a:pPr>
             <a:r>
-              <a:rPr lang="en-US" sz="784" b="1" spc="1" kern="0" dirty="0">
+              <a:rPr lang="en-US" sz="784" b="1" kern="0" spc="1" dirty="0">
                 <a:solidFill>
                   <a:srgbClr val="FF4500"/>
                 </a:solidFill>
@@ -3970,6 +3747,13 @@
             <a:prstDash val="solid"/>
           </a:ln>
         </p:spPr>
+        <p:txBody>
+          <a:bodyPr/>
+          <a:lstStyle/>
+          <a:p>
+            <a:endParaRPr lang="ru-KZ"/>
+          </a:p>
+        </p:txBody>
       </p:sp>
       <p:sp>
         <p:nvSpPr>
@@ -3994,7 +3778,7 @@
           </a:bodyPr>
           <a:lstStyle/>
           <a:p>
-            <a:pPr algn="l" indent="0" marL="0">
+            <a:pPr marL="0" indent="0" algn="l">
               <a:lnSpc>
                 <a:spcPts val="1200"/>
               </a:lnSpc>
@@ -4035,7 +3819,7 @@
           </a:bodyPr>
           <a:lstStyle/>
           <a:p>
-            <a:pPr algn="l" indent="0" marL="0">
+            <a:pPr marL="0" indent="0" algn="l">
               <a:lnSpc>
                 <a:spcPts val="1300"/>
               </a:lnSpc>
@@ -4077,6 +3861,13 @@
             <a:prstDash val="solid"/>
           </a:ln>
         </p:spPr>
+        <p:txBody>
+          <a:bodyPr/>
+          <a:lstStyle/>
+          <a:p>
+            <a:endParaRPr lang="ru-KZ"/>
+          </a:p>
+        </p:txBody>
       </p:sp>
       <p:sp>
         <p:nvSpPr>
@@ -4101,7 +3892,7 @@
           </a:bodyPr>
           <a:lstStyle/>
           <a:p>
-            <a:pPr algn="l" indent="0" marL="0">
+            <a:pPr marL="0" indent="0" algn="l">
               <a:lnSpc>
                 <a:spcPts val="1200"/>
               </a:lnSpc>
@@ -4142,7 +3933,7 @@
           </a:bodyPr>
           <a:lstStyle/>
           <a:p>
-            <a:pPr algn="l" indent="0" marL="0">
+            <a:pPr marL="0" indent="0" algn="l">
               <a:lnSpc>
                 <a:spcPts val="1300"/>
               </a:lnSpc>
@@ -4184,6 +3975,13 @@
             <a:prstDash val="solid"/>
           </a:ln>
         </p:spPr>
+        <p:txBody>
+          <a:bodyPr/>
+          <a:lstStyle/>
+          <a:p>
+            <a:endParaRPr lang="ru-KZ"/>
+          </a:p>
+        </p:txBody>
       </p:sp>
       <p:sp>
         <p:nvSpPr>
@@ -4208,7 +4006,7 @@
           </a:bodyPr>
           <a:lstStyle/>
           <a:p>
-            <a:pPr algn="l" indent="0" marL="0">
+            <a:pPr marL="0" indent="0" algn="l">
               <a:lnSpc>
                 <a:spcPts val="1200"/>
               </a:lnSpc>
@@ -4249,7 +4047,7 @@
           </a:bodyPr>
           <a:lstStyle/>
           <a:p>
-            <a:pPr algn="l" indent="0" marL="0">
+            <a:pPr marL="0" indent="0" algn="l">
               <a:lnSpc>
                 <a:spcPts val="1300"/>
               </a:lnSpc>
@@ -4269,14 +4067,14 @@
       </p:sp>
       <p:pic>
         <p:nvPicPr>
-          <p:cNvPr id="17" name="Image 1" descr="preencoded.png">    </p:cNvPr>
+          <p:cNvPr id="17" name="Image 1" descr="preencoded.png"/>
           <p:cNvPicPr>
             <a:picLocks noChangeAspect="1"/>
           </p:cNvPicPr>
           <p:nvPr/>
         </p:nvPicPr>
         <p:blipFill>
-          <a:blip r:embed="rId2"/>
+          <a:blip r:embed="rId4"/>
           <a:stretch>
             <a:fillRect/>
           </a:stretch>
@@ -4314,14 +4112,14 @@
           </a:bodyPr>
           <a:lstStyle/>
           <a:p>
-            <a:pPr algn="l" indent="0" marL="0">
+            <a:pPr marL="0" indent="0" algn="l">
               <a:lnSpc>
                 <a:spcPts val="1100"/>
               </a:lnSpc>
               <a:buNone/>
             </a:pPr>
             <a:r>
-              <a:rPr lang="en-US" sz="784" b="1" spc="1" kern="0" dirty="0">
+              <a:rPr lang="en-US" sz="784" b="1" kern="0" spc="1" dirty="0">
                 <a:solidFill>
                   <a:srgbClr val="FF4500"/>
                 </a:solidFill>
@@ -4351,6 +4149,13 @@
           </a:solidFill>
           <a:ln/>
         </p:spPr>
+        <p:txBody>
+          <a:bodyPr/>
+          <a:lstStyle/>
+          <a:p>
+            <a:endParaRPr lang="ru-KZ"/>
+          </a:p>
+        </p:txBody>
       </p:sp>
       <p:sp>
         <p:nvSpPr>
@@ -4375,7 +4180,7 @@
           </a:bodyPr>
           <a:lstStyle/>
           <a:p>
-            <a:pPr algn="l" indent="0" marL="0">
+            <a:pPr marL="0" indent="0" algn="l">
               <a:lnSpc>
                 <a:spcPts val="1600"/>
               </a:lnSpc>
@@ -4416,7 +4221,7 @@
           </a:bodyPr>
           <a:lstStyle/>
           <a:p>
-            <a:pPr algn="l" indent="0" marL="0">
+            <a:pPr marL="0" indent="0" algn="l">
               <a:lnSpc>
                 <a:spcPts val="1400"/>
               </a:lnSpc>
@@ -4436,14 +4241,14 @@
       </p:sp>
       <p:pic>
         <p:nvPicPr>
-          <p:cNvPr id="22" name="Image 2" descr="preencoded.png">    </p:cNvPr>
+          <p:cNvPr id="22" name="Image 2" descr="preencoded.png"/>
           <p:cNvPicPr>
             <a:picLocks noChangeAspect="1"/>
           </p:cNvPicPr>
           <p:nvPr/>
         </p:nvPicPr>
         <p:blipFill>
-          <a:blip r:embed="rId3"/>
+          <a:blip r:embed="rId4"/>
           <a:stretch>
             <a:fillRect/>
           </a:stretch>
@@ -4481,14 +4286,14 @@
           </a:bodyPr>
           <a:lstStyle/>
           <a:p>
-            <a:pPr algn="l" indent="0" marL="0">
+            <a:pPr marL="0" indent="0" algn="l">
               <a:lnSpc>
                 <a:spcPts val="1100"/>
               </a:lnSpc>
               <a:buNone/>
             </a:pPr>
             <a:r>
-              <a:rPr lang="en-US" sz="784" b="1" spc="1" kern="0" dirty="0">
+              <a:rPr lang="en-US" sz="784" b="1" kern="0" spc="1" dirty="0">
                 <a:solidFill>
                   <a:srgbClr val="FF4500"/>
                 </a:solidFill>
@@ -4518,6 +4323,13 @@
           </a:solidFill>
           <a:ln/>
         </p:spPr>
+        <p:txBody>
+          <a:bodyPr/>
+          <a:lstStyle/>
+          <a:p>
+            <a:endParaRPr lang="ru-KZ"/>
+          </a:p>
+        </p:txBody>
       </p:sp>
       <p:sp>
         <p:nvSpPr>
@@ -4538,6 +4350,13 @@
           </a:solidFill>
           <a:ln/>
         </p:spPr>
+        <p:txBody>
+          <a:bodyPr/>
+          <a:lstStyle/>
+          <a:p>
+            <a:endParaRPr lang="ru-KZ"/>
+          </a:p>
+        </p:txBody>
       </p:sp>
       <p:sp>
         <p:nvSpPr>
@@ -4558,6 +4377,13 @@
           </a:solidFill>
           <a:ln/>
         </p:spPr>
+        <p:txBody>
+          <a:bodyPr/>
+          <a:lstStyle/>
+          <a:p>
+            <a:endParaRPr lang="ru-KZ"/>
+          </a:p>
+        </p:txBody>
       </p:sp>
       <p:sp>
         <p:nvSpPr>
@@ -4578,6 +4404,13 @@
           </a:solidFill>
           <a:ln/>
         </p:spPr>
+        <p:txBody>
+          <a:bodyPr/>
+          <a:lstStyle/>
+          <a:p>
+            <a:endParaRPr lang="ru-KZ"/>
+          </a:p>
+        </p:txBody>
       </p:sp>
       <p:sp>
         <p:nvSpPr>
@@ -4598,6 +4431,13 @@
           </a:solidFill>
           <a:ln/>
         </p:spPr>
+        <p:txBody>
+          <a:bodyPr/>
+          <a:lstStyle/>
+          <a:p>
+            <a:endParaRPr lang="ru-KZ"/>
+          </a:p>
+        </p:txBody>
       </p:sp>
       <p:sp>
         <p:nvSpPr>
@@ -4622,7 +4462,7 @@
           </a:bodyPr>
           <a:lstStyle/>
           <a:p>
-            <a:pPr algn="l" indent="0" marL="0">
+            <a:pPr marL="0" indent="0" algn="l">
               <a:lnSpc>
                 <a:spcPts val="1200"/>
               </a:lnSpc>
@@ -4663,7 +4503,7 @@
           </a:bodyPr>
           <a:lstStyle/>
           <a:p>
-            <a:pPr algn="l" indent="0" marL="0">
+            <a:pPr marL="0" indent="0" algn="l">
               <a:lnSpc>
                 <a:spcPts val="1300"/>
               </a:lnSpc>
@@ -4704,7 +4544,7 @@
           </a:bodyPr>
           <a:lstStyle/>
           <a:p>
-            <a:pPr algn="l" indent="0" marL="0">
+            <a:pPr marL="0" indent="0" algn="l">
               <a:lnSpc>
                 <a:spcPts val="1300"/>
               </a:lnSpc>
@@ -4741,6 +4581,13 @@
           </a:solidFill>
           <a:ln/>
         </p:spPr>
+        <p:txBody>
+          <a:bodyPr/>
+          <a:lstStyle/>
+          <a:p>
+            <a:endParaRPr lang="ru-KZ"/>
+          </a:p>
+        </p:txBody>
       </p:sp>
       <p:sp>
         <p:nvSpPr>
@@ -4765,7 +4612,7 @@
           </a:bodyPr>
           <a:lstStyle/>
           <a:p>
-            <a:pPr algn="l" indent="0" marL="0">
+            <a:pPr marL="0" indent="0" algn="l">
               <a:lnSpc>
                 <a:spcPts val="900"/>
               </a:lnSpc>
@@ -4806,7 +4653,7 @@
           </a:bodyPr>
           <a:lstStyle/>
           <a:p>
-            <a:pPr algn="l" indent="0" marL="0">
+            <a:pPr marL="0" indent="0" algn="l">
               <a:lnSpc>
                 <a:spcPts val="1300"/>
               </a:lnSpc>
@@ -4847,7 +4694,7 @@
           </a:bodyPr>
           <a:lstStyle/>
           <a:p>
-            <a:pPr algn="l" indent="0" marL="0">
+            <a:pPr marL="0" indent="0" algn="l">
               <a:lnSpc>
                 <a:spcPts val="1300"/>
               </a:lnSpc>
@@ -4892,14 +4739,14 @@
       </p:grpSpPr>
       <p:pic>
         <p:nvPicPr>
-          <p:cNvPr id="2" name="Image 0" descr="preencoded.png">    </p:cNvPr>
+          <p:cNvPr id="2" name="Image 0" descr="preencoded.png"/>
           <p:cNvPicPr>
             <a:picLocks noChangeAspect="1"/>
           </p:cNvPicPr>
           <p:nvPr/>
         </p:nvPicPr>
         <p:blipFill>
-          <a:blip r:embed="rId1"/>
+          <a:blip r:embed="rId3"/>
           <a:stretch>
             <a:fillRect/>
           </a:stretch>
@@ -4935,6 +4782,13 @@
           </a:solidFill>
           <a:ln/>
         </p:spPr>
+        <p:txBody>
+          <a:bodyPr/>
+          <a:lstStyle/>
+          <a:p>
+            <a:endParaRPr lang="ru-KZ"/>
+          </a:p>
+        </p:txBody>
       </p:sp>
       <p:sp>
         <p:nvSpPr>
@@ -4955,6 +4809,13 @@
           </a:solidFill>
           <a:ln/>
         </p:spPr>
+        <p:txBody>
+          <a:bodyPr/>
+          <a:lstStyle/>
+          <a:p>
+            <a:endParaRPr lang="ru-KZ"/>
+          </a:p>
+        </p:txBody>
       </p:sp>
       <p:sp>
         <p:nvSpPr>
@@ -4979,14 +4840,14 @@
           </a:bodyPr>
           <a:lstStyle/>
           <a:p>
-            <a:pPr algn="l" indent="0" marL="0">
+            <a:pPr marL="0" indent="0" algn="l">
               <a:lnSpc>
                 <a:spcPts val="2800"/>
               </a:lnSpc>
               <a:buNone/>
             </a:pPr>
             <a:r>
-              <a:rPr lang="en-US" sz="2121" b="1" spc="-1" kern="0" dirty="0">
+              <a:rPr lang="en-US" sz="2121" b="1" kern="0" spc="-1" dirty="0">
                 <a:solidFill>
                   <a:srgbClr val="1A1A1A"/>
                 </a:solidFill>
@@ -5020,7 +4881,7 @@
           </a:bodyPr>
           <a:lstStyle/>
           <a:p>
-            <a:pPr algn="l" indent="0" marL="0">
+            <a:pPr marL="0" indent="0" algn="l">
               <a:lnSpc>
                 <a:spcPts val="1600"/>
               </a:lnSpc>
@@ -5061,7 +4922,7 @@
           </a:bodyPr>
           <a:lstStyle/>
           <a:p>
-            <a:pPr algn="l" indent="0" marL="0">
+            <a:pPr marL="0" indent="0" algn="l">
               <a:lnSpc>
                 <a:spcPts val="2200"/>
               </a:lnSpc>
@@ -5102,7 +4963,7 @@
           </a:bodyPr>
           <a:lstStyle/>
           <a:p>
-            <a:pPr algn="l" indent="0" marL="0">
+            <a:pPr marL="0" indent="0" algn="l">
               <a:lnSpc>
                 <a:spcPts val="1600"/>
               </a:lnSpc>
@@ -5143,7 +5004,7 @@
           </a:bodyPr>
           <a:lstStyle/>
           <a:p>
-            <a:pPr algn="l" indent="0" marL="0">
+            <a:pPr marL="0" indent="0" algn="l">
               <a:lnSpc>
                 <a:spcPts val="1600"/>
               </a:lnSpc>
@@ -5184,7 +5045,7 @@
           </a:bodyPr>
           <a:lstStyle/>
           <a:p>
-            <a:pPr algn="l" indent="0" marL="0">
+            <a:pPr marL="0" indent="0" algn="l">
               <a:lnSpc>
                 <a:spcPts val="1600"/>
               </a:lnSpc>
@@ -5225,7 +5086,7 @@
           </a:bodyPr>
           <a:lstStyle/>
           <a:p>
-            <a:pPr algn="l" indent="0" marL="0">
+            <a:pPr marL="0" indent="0" algn="l">
               <a:lnSpc>
                 <a:spcPts val="1600"/>
               </a:lnSpc>
@@ -5262,6 +5123,13 @@
           </a:solidFill>
           <a:ln/>
         </p:spPr>
+        <p:txBody>
+          <a:bodyPr/>
+          <a:lstStyle/>
+          <a:p>
+            <a:endParaRPr lang="ru-KZ"/>
+          </a:p>
+        </p:txBody>
       </p:sp>
       <p:sp>
         <p:nvSpPr>
@@ -5286,7 +5154,7 @@
           </a:bodyPr>
           <a:lstStyle/>
           <a:p>
-            <a:pPr algn="l" indent="0" marL="0">
+            <a:pPr marL="0" indent="0" algn="l">
               <a:lnSpc>
                 <a:spcPts val="900"/>
               </a:lnSpc>
@@ -5327,7 +5195,7 @@
           </a:bodyPr>
           <a:lstStyle/>
           <a:p>
-            <a:pPr algn="l" indent="0" marL="0">
+            <a:pPr marL="0" indent="0" algn="l">
               <a:lnSpc>
                 <a:spcPts val="1200"/>
               </a:lnSpc>
@@ -5368,7 +5236,7 @@
           </a:bodyPr>
           <a:lstStyle/>
           <a:p>
-            <a:pPr algn="l" indent="0" marL="0">
+            <a:pPr marL="0" indent="0" algn="l">
               <a:lnSpc>
                 <a:spcPts val="2200"/>
               </a:lnSpc>
@@ -5409,7 +5277,7 @@
           </a:bodyPr>
           <a:lstStyle/>
           <a:p>
-            <a:pPr algn="l" indent="0" marL="0">
+            <a:pPr marL="0" indent="0" algn="l">
               <a:lnSpc>
                 <a:spcPts val="1600"/>
               </a:lnSpc>
@@ -5450,7 +5318,7 @@
           </a:bodyPr>
           <a:lstStyle/>
           <a:p>
-            <a:pPr algn="l" indent="0" marL="0">
+            <a:pPr marL="0" indent="0" algn="l">
               <a:lnSpc>
                 <a:spcPts val="1600"/>
               </a:lnSpc>
@@ -5491,7 +5359,7 @@
           </a:bodyPr>
           <a:lstStyle/>
           <a:p>
-            <a:pPr algn="l" indent="0" marL="0">
+            <a:pPr marL="0" indent="0" algn="l">
               <a:lnSpc>
                 <a:spcPts val="1600"/>
               </a:lnSpc>
@@ -5532,7 +5400,7 @@
           </a:bodyPr>
           <a:lstStyle/>
           <a:p>
-            <a:pPr algn="l" indent="0" marL="0">
+            <a:pPr marL="0" indent="0" algn="l">
               <a:lnSpc>
                 <a:spcPts val="1600"/>
               </a:lnSpc>
@@ -5569,6 +5437,13 @@
           </a:solidFill>
           <a:ln/>
         </p:spPr>
+        <p:txBody>
+          <a:bodyPr/>
+          <a:lstStyle/>
+          <a:p>
+            <a:endParaRPr lang="ru-KZ"/>
+          </a:p>
+        </p:txBody>
       </p:sp>
       <p:sp>
         <p:nvSpPr>
@@ -5593,7 +5468,7 @@
           </a:bodyPr>
           <a:lstStyle/>
           <a:p>
-            <a:pPr algn="l" indent="0" marL="0">
+            <a:pPr marL="0" indent="0" algn="l">
               <a:lnSpc>
                 <a:spcPts val="900"/>
               </a:lnSpc>
@@ -5634,7 +5509,7 @@
           </a:bodyPr>
           <a:lstStyle/>
           <a:p>
-            <a:pPr algn="l" indent="0" marL="0">
+            <a:pPr marL="0" indent="0" algn="l">
               <a:lnSpc>
                 <a:spcPts val="1200"/>
               </a:lnSpc>
@@ -5679,14 +5554,14 @@
       </p:grpSpPr>
       <p:pic>
         <p:nvPicPr>
-          <p:cNvPr id="2" name="Image 0" descr="preencoded.png">    </p:cNvPr>
+          <p:cNvPr id="2" name="Image 0" descr="preencoded.png"/>
           <p:cNvPicPr>
             <a:picLocks noChangeAspect="1"/>
           </p:cNvPicPr>
           <p:nvPr/>
         </p:nvPicPr>
         <p:blipFill>
-          <a:blip r:embed="rId1"/>
+          <a:blip r:embed="rId3"/>
           <a:stretch>
             <a:fillRect/>
           </a:stretch>
@@ -5722,6 +5597,13 @@
           </a:solidFill>
           <a:ln/>
         </p:spPr>
+        <p:txBody>
+          <a:bodyPr/>
+          <a:lstStyle/>
+          <a:p>
+            <a:endParaRPr lang="ru-KZ"/>
+          </a:p>
+        </p:txBody>
       </p:sp>
       <p:sp>
         <p:nvSpPr>
@@ -5742,6 +5624,13 @@
           </a:solidFill>
           <a:ln/>
         </p:spPr>
+        <p:txBody>
+          <a:bodyPr/>
+          <a:lstStyle/>
+          <a:p>
+            <a:endParaRPr lang="ru-KZ"/>
+          </a:p>
+        </p:txBody>
       </p:sp>
       <p:sp>
         <p:nvSpPr>
@@ -5766,14 +5655,14 @@
           </a:bodyPr>
           <a:lstStyle/>
           <a:p>
-            <a:pPr algn="l" indent="0" marL="0">
+            <a:pPr marL="0" indent="0" algn="l">
               <a:lnSpc>
                 <a:spcPts val="2800"/>
               </a:lnSpc>
               <a:buNone/>
             </a:pPr>
             <a:r>
-              <a:rPr lang="en-US" sz="2121" b="1" spc="-1" kern="0" dirty="0">
+              <a:rPr lang="en-US" sz="2121" b="1" kern="0" spc="-1" dirty="0">
                 <a:solidFill>
                   <a:srgbClr val="1A1A1A"/>
                 </a:solidFill>
@@ -5807,7 +5696,7 @@
           </a:bodyPr>
           <a:lstStyle/>
           <a:p>
-            <a:pPr algn="l" indent="0" marL="0">
+            <a:pPr marL="0" indent="0" algn="l">
               <a:lnSpc>
                 <a:spcPts val="1600"/>
               </a:lnSpc>
@@ -5848,7 +5737,7 @@
           </a:bodyPr>
           <a:lstStyle/>
           <a:p>
-            <a:pPr algn="l" indent="0" marL="0">
+            <a:pPr marL="0" indent="0" algn="l">
               <a:lnSpc>
                 <a:spcPts val="2000"/>
               </a:lnSpc>
@@ -5889,7 +5778,7 @@
           </a:bodyPr>
           <a:lstStyle/>
           <a:p>
-            <a:pPr algn="l" indent="0" marL="0">
+            <a:pPr marL="0" indent="0" algn="l">
               <a:lnSpc>
                 <a:spcPts val="1600"/>
               </a:lnSpc>
@@ -5930,7 +5819,7 @@
           </a:bodyPr>
           <a:lstStyle/>
           <a:p>
-            <a:pPr algn="l" indent="0" marL="0">
+            <a:pPr marL="0" indent="0" algn="l">
               <a:lnSpc>
                 <a:spcPts val="1400"/>
               </a:lnSpc>
@@ -5971,7 +5860,7 @@
           </a:bodyPr>
           <a:lstStyle/>
           <a:p>
-            <a:pPr algn="l" indent="0" marL="0">
+            <a:pPr marL="0" indent="0" algn="l">
               <a:lnSpc>
                 <a:spcPts val="2000"/>
               </a:lnSpc>
@@ -6012,7 +5901,7 @@
           </a:bodyPr>
           <a:lstStyle/>
           <a:p>
-            <a:pPr algn="l" indent="0" marL="0">
+            <a:pPr marL="0" indent="0" algn="l">
               <a:lnSpc>
                 <a:spcPts val="1600"/>
               </a:lnSpc>
@@ -6053,7 +5942,7 @@
           </a:bodyPr>
           <a:lstStyle/>
           <a:p>
-            <a:pPr algn="l" indent="0" marL="0">
+            <a:pPr marL="0" indent="0" algn="l">
               <a:lnSpc>
                 <a:spcPts val="1400"/>
               </a:lnSpc>
@@ -6094,7 +5983,7 @@
           </a:bodyPr>
           <a:lstStyle/>
           <a:p>
-            <a:pPr algn="l" indent="0" marL="0">
+            <a:pPr marL="0" indent="0" algn="l">
               <a:lnSpc>
                 <a:spcPts val="2000"/>
               </a:lnSpc>
@@ -6135,7 +6024,7 @@
           </a:bodyPr>
           <a:lstStyle/>
           <a:p>
-            <a:pPr algn="l" indent="0" marL="0">
+            <a:pPr marL="0" indent="0" algn="l">
               <a:lnSpc>
                 <a:spcPts val="1600"/>
               </a:lnSpc>
@@ -6176,7 +6065,7 @@
           </a:bodyPr>
           <a:lstStyle/>
           <a:p>
-            <a:pPr algn="l" indent="0" marL="0">
+            <a:pPr marL="0" indent="0" algn="l">
               <a:lnSpc>
                 <a:spcPts val="1400"/>
               </a:lnSpc>
@@ -6217,7 +6106,7 @@
           </a:bodyPr>
           <a:lstStyle/>
           <a:p>
-            <a:pPr algn="l" indent="0" marL="0">
+            <a:pPr marL="0" indent="0" algn="l">
               <a:lnSpc>
                 <a:spcPts val="2000"/>
               </a:lnSpc>
@@ -6258,7 +6147,7 @@
           </a:bodyPr>
           <a:lstStyle/>
           <a:p>
-            <a:pPr algn="l" indent="0" marL="0">
+            <a:pPr marL="0" indent="0" algn="l">
               <a:lnSpc>
                 <a:spcPts val="1600"/>
               </a:lnSpc>
@@ -6299,7 +6188,7 @@
           </a:bodyPr>
           <a:lstStyle/>
           <a:p>
-            <a:pPr algn="l" indent="0" marL="0">
+            <a:pPr marL="0" indent="0" algn="l">
               <a:lnSpc>
                 <a:spcPts val="1400"/>
               </a:lnSpc>
@@ -6340,7 +6229,7 @@
           </a:bodyPr>
           <a:lstStyle/>
           <a:p>
-            <a:pPr algn="l" indent="0" marL="0">
+            <a:pPr marL="0" indent="0" algn="l">
               <a:lnSpc>
                 <a:spcPts val="2000"/>
               </a:lnSpc>
@@ -6381,7 +6270,7 @@
           </a:bodyPr>
           <a:lstStyle/>
           <a:p>
-            <a:pPr algn="l" indent="0" marL="0">
+            <a:pPr marL="0" indent="0" algn="l">
               <a:lnSpc>
                 <a:spcPts val="1600"/>
               </a:lnSpc>
@@ -6422,7 +6311,7 @@
           </a:bodyPr>
           <a:lstStyle/>
           <a:p>
-            <a:pPr algn="l" indent="0" marL="0">
+            <a:pPr marL="0" indent="0" algn="l">
               <a:lnSpc>
                 <a:spcPts val="1400"/>
               </a:lnSpc>
@@ -6459,6 +6348,13 @@
           </a:solidFill>
           <a:ln/>
         </p:spPr>
+        <p:txBody>
+          <a:bodyPr/>
+          <a:lstStyle/>
+          <a:p>
+            <a:endParaRPr lang="ru-KZ"/>
+          </a:p>
+        </p:txBody>
       </p:sp>
       <p:sp>
         <p:nvSpPr>
@@ -6483,7 +6379,7 @@
           </a:bodyPr>
           <a:lstStyle/>
           <a:p>
-            <a:pPr algn="ctr" indent="0" marL="0">
+            <a:pPr marL="0" indent="0" algn="ctr">
               <a:lnSpc>
                 <a:spcPts val="1400"/>
               </a:lnSpc>
@@ -6495,35 +6391,7 @@
                   <a:srgbClr val="FF4500"/>
                 </a:solidFill>
               </a:rPr>
-              <a:t>Результат: Снижение уровня галлюцинаций на </a:t>
-            </a:r>
-            <a:pPr algn="ctr" indent="0" marL="0">
-              <a:lnSpc>
-                <a:spcPts val="1400"/>
-              </a:lnSpc>
-              <a:buNone/>
-            </a:pPr>
-            <a:r>
-              <a:rPr lang="en-US" sz="987" b="1" dirty="0">
-                <a:solidFill>
-                  <a:srgbClr val="FF4500"/>
-                </a:solidFill>
-              </a:rPr>
-              <a:t>70-90%</a:t>
-            </a:r>
-            <a:pPr algn="ctr" indent="0" marL="0">
-              <a:lnSpc>
-                <a:spcPts val="1400"/>
-              </a:lnSpc>
-              <a:buNone/>
-            </a:pPr>
-            <a:r>
-              <a:rPr lang="en-US" sz="987" b="1" dirty="0">
-                <a:solidFill>
-                  <a:srgbClr val="FF4500"/>
-                </a:solidFill>
-              </a:rPr>
-              <a:t> по сравнению с базовыми LLM.</a:t>
+              <a:t>Результат: Снижение уровня галлюцинаций на 70-90% по сравнению с базовыми LLM.</a:t>
             </a:r>
             <a:endParaRPr lang="en-US" sz="987" dirty="0"/>
           </a:p>
@@ -6556,382 +6424,7 @@
       </p:grpSpPr>
       <p:pic>
         <p:nvPicPr>
-          <p:cNvPr id="2" name="Image 0" descr="preencoded.png">    </p:cNvPr>
-          <p:cNvPicPr>
-            <a:picLocks noChangeAspect="1"/>
-          </p:cNvPicPr>
-          <p:nvPr/>
-        </p:nvPicPr>
-        <p:blipFill>
-          <a:blip r:embed="rId1"/>
-          <a:stretch>
-            <a:fillRect/>
-          </a:stretch>
-        </p:blipFill>
-        <p:spPr>
-          <a:xfrm>
-            <a:off x="0" y="0"/>
-            <a:ext cx="9144000" cy="5713214"/>
-          </a:xfrm>
-          <a:prstGeom prst="rect">
-            <a:avLst/>
-          </a:prstGeom>
-        </p:spPr>
-      </p:pic>
-      <p:sp>
-        <p:nvSpPr>
-          <p:cNvPr id="3" name="Shape 0"/>
-          <p:cNvSpPr/>
-          <p:nvPr/>
-        </p:nvSpPr>
-        <p:spPr>
-          <a:xfrm>
-            <a:off x="571500" y="428625"/>
-            <a:ext cx="8001000" cy="566142"/>
-          </a:xfrm>
-          <a:prstGeom prst="rect">
-            <a:avLst/>
-          </a:prstGeom>
-          <a:solidFill>
-            <a:srgbClr val="000000">
-              <a:alpha val="0"/>
-            </a:srgbClr>
-          </a:solidFill>
-          <a:ln/>
-        </p:spPr>
-      </p:sp>
-      <p:sp>
-        <p:nvSpPr>
-          <p:cNvPr id="4" name="Shape 1"/>
-          <p:cNvSpPr/>
-          <p:nvPr/>
-        </p:nvSpPr>
-        <p:spPr>
-          <a:xfrm>
-            <a:off x="571500" y="980480"/>
-            <a:ext cx="8001000" cy="14288"/>
-          </a:xfrm>
-          <a:prstGeom prst="rect">
-            <a:avLst/>
-          </a:prstGeom>
-          <a:solidFill>
-            <a:srgbClr val="1A1A1A"/>
-          </a:solidFill>
-          <a:ln/>
-        </p:spPr>
-      </p:sp>
-      <p:sp>
-        <p:nvSpPr>
-          <p:cNvPr id="5" name="Text 2"/>
-          <p:cNvSpPr/>
-          <p:nvPr/>
-        </p:nvSpPr>
-        <p:spPr>
-          <a:xfrm>
-            <a:off x="571500" y="428625"/>
-            <a:ext cx="3925658" cy="408980"/>
-          </a:xfrm>
-          <a:prstGeom prst="rect">
-            <a:avLst/>
-          </a:prstGeom>
-          <a:noFill/>
-          <a:ln/>
-        </p:spPr>
-        <p:txBody>
-          <a:bodyPr wrap="none" lIns="0" tIns="0" rIns="0" bIns="0" rtlCol="0" anchor="t">
-            <a:spAutoFit/>
-          </a:bodyPr>
-          <a:lstStyle/>
-          <a:p>
-            <a:pPr algn="l" indent="0" marL="0">
-              <a:lnSpc>
-                <a:spcPts val="2800"/>
-              </a:lnSpc>
-              <a:buNone/>
-            </a:pPr>
-            <a:r>
-              <a:rPr lang="en-US" sz="2121" b="1" spc="-1" kern="0" dirty="0">
-                <a:solidFill>
-                  <a:srgbClr val="1A1A1A"/>
-                </a:solidFill>
-              </a:rPr>
-              <a:t>Практические примеры</a:t>
-            </a:r>
-            <a:endParaRPr lang="en-US" sz="2121" dirty="0"/>
-          </a:p>
-        </p:txBody>
-      </p:sp>
-      <p:sp>
-        <p:nvSpPr>
-          <p:cNvPr id="6" name="Text 3"/>
-          <p:cNvSpPr/>
-          <p:nvPr/>
-        </p:nvSpPr>
-        <p:spPr>
-          <a:xfrm>
-            <a:off x="8376354" y="603647"/>
-            <a:ext cx="196146" cy="233958"/>
-          </a:xfrm>
-          <a:prstGeom prst="rect">
-            <a:avLst/>
-          </a:prstGeom>
-          <a:noFill/>
-          <a:ln/>
-        </p:spPr>
-        <p:txBody>
-          <a:bodyPr wrap="none" lIns="0" tIns="0" rIns="0" bIns="0" rtlCol="0" anchor="t">
-            <a:spAutoFit/>
-          </a:bodyPr>
-          <a:lstStyle/>
-          <a:p>
-            <a:pPr algn="l" indent="0" marL="0">
-              <a:lnSpc>
-                <a:spcPts val="1600"/>
-              </a:lnSpc>
-              <a:buNone/>
-            </a:pPr>
-            <a:r>
-              <a:rPr lang="en-US" sz="1193" b="1" dirty="0">
-                <a:solidFill>
-                  <a:srgbClr val="FF4500"/>
-                </a:solidFill>
-              </a:rPr>
-              <a:t>15</a:t>
-            </a:r>
-            <a:endParaRPr lang="en-US" sz="1193" dirty="0"/>
-          </a:p>
-        </p:txBody>
-      </p:sp>
-      <p:sp>
-        <p:nvSpPr>
-          <p:cNvPr id="7" name="Shape 4"/>
-          <p:cNvSpPr/>
-          <p:nvPr/>
-        </p:nvSpPr>
-        <p:spPr>
-          <a:xfrm>
-            <a:off x="571500" y="1266230"/>
-            <a:ext cx="3857625" cy="1859161"/>
-          </a:xfrm>
-          <a:prstGeom prst="rect">
-            <a:avLst/>
-          </a:prstGeom>
-          <a:solidFill>
-            <a:srgbClr val="FFFFFF"/>
-          </a:solidFill>
-          <a:ln/>
-        </p:spPr>
-      </p:sp>
-      <p:sp>
-        <p:nvSpPr>
-          <p:cNvPr id="8" name="Shape 5"/>
-          <p:cNvSpPr/>
-          <p:nvPr/>
-        </p:nvSpPr>
-        <p:spPr>
-          <a:xfrm>
-            <a:off x="571500" y="1266230"/>
-            <a:ext cx="42863" cy="1859161"/>
-          </a:xfrm>
-          <a:prstGeom prst="rect">
-            <a:avLst/>
-          </a:prstGeom>
-          <a:solidFill>
-            <a:srgbClr val="FF4500"/>
-          </a:solidFill>
-          <a:ln/>
-        </p:spPr>
-      </p:sp>
-      <p:pic>
-        <p:nvPicPr>
-          <p:cNvPr id="9" name="Image 1" descr="preencoded.png">    </p:cNvPr>
-          <p:cNvPicPr>
-            <a:picLocks noChangeAspect="1"/>
-          </p:cNvPicPr>
-          <p:nvPr/>
-        </p:nvPicPr>
-        <p:blipFill>
-          <a:blip r:embed="rId2"/>
-          <a:stretch>
-            <a:fillRect/>
-          </a:stretch>
-        </p:blipFill>
-        <p:spPr>
-          <a:xfrm>
-            <a:off x="853678" y="1519833"/>
-            <a:ext cx="150019" cy="200025"/>
-          </a:xfrm>
-          <a:prstGeom prst="rect">
-            <a:avLst/>
-          </a:prstGeom>
-        </p:spPr>
-      </p:pic>
-      <p:sp>
-        <p:nvSpPr>
-          <p:cNvPr id="10" name="Text 6"/>
-          <p:cNvSpPr/>
-          <p:nvPr/>
-        </p:nvSpPr>
-        <p:spPr>
-          <a:xfrm>
-            <a:off x="1178719" y="1500188"/>
-            <a:ext cx="2283042" cy="233958"/>
-          </a:xfrm>
-          <a:prstGeom prst="rect">
-            <a:avLst/>
-          </a:prstGeom>
-          <a:noFill/>
-          <a:ln/>
-        </p:spPr>
-        <p:txBody>
-          <a:bodyPr wrap="none" lIns="0" tIns="0" rIns="0" bIns="0" rtlCol="0" anchor="t">
-            <a:spAutoFit/>
-          </a:bodyPr>
-          <a:lstStyle/>
-          <a:p>
-            <a:pPr algn="l" indent="0" marL="0">
-              <a:lnSpc>
-                <a:spcPts val="1600"/>
-              </a:lnSpc>
-              <a:buNone/>
-            </a:pPr>
-            <a:r>
-              <a:rPr lang="en-US" sz="1193" b="1" dirty="0">
-                <a:solidFill>
-                  <a:srgbClr val="1A1A1A"/>
-                </a:solidFill>
-              </a:rPr>
-              <a:t>Корпоративный поиск</a:t>
-            </a:r>
-            <a:endParaRPr lang="en-US" sz="1193" dirty="0"/>
-          </a:p>
-        </p:txBody>
-      </p:sp>
-      <p:sp>
-        <p:nvSpPr>
-          <p:cNvPr id="11" name="Text 7"/>
-          <p:cNvSpPr/>
-          <p:nvPr/>
-        </p:nvSpPr>
-        <p:spPr>
-          <a:xfrm>
-            <a:off x="785813" y="1896666"/>
-            <a:ext cx="3429000" cy="771525"/>
-          </a:xfrm>
-          <a:prstGeom prst="rect">
-            <a:avLst/>
-          </a:prstGeom>
-          <a:noFill/>
-          <a:ln/>
-        </p:spPr>
-        <p:txBody>
-          <a:bodyPr wrap="square" lIns="0" tIns="0" rIns="0" bIns="0" rtlCol="0" anchor="t">
-            <a:spAutoFit/>
-          </a:bodyPr>
-          <a:lstStyle/>
-          <a:p>
-            <a:pPr algn="l" indent="0" marL="0">
-              <a:lnSpc>
-                <a:spcPts val="1500"/>
-              </a:lnSpc>
-              <a:buNone/>
-            </a:pPr>
-            <a:r>
-              <a:rPr lang="en-US" sz="942" dirty="0">
-                <a:solidFill>
-                  <a:srgbClr val="555555"/>
-                </a:solidFill>
-              </a:rPr>
-              <a:t>Чат-боты с доступом к внутренним базам знаний (Confluence, Jira, Google Drive). Сотрудники мгновенно находят ответы на вопросы о политиках, коде или процессах без ручного поиска.</a:t>
-            </a:r>
-            <a:endParaRPr lang="en-US" sz="942" dirty="0"/>
-          </a:p>
-        </p:txBody>
-      </p:sp>
-      <p:sp>
-        <p:nvSpPr>
-          <p:cNvPr id="12" name="Text 8"/>
-          <p:cNvSpPr/>
-          <p:nvPr/>
-        </p:nvSpPr>
-        <p:spPr>
-          <a:xfrm>
-            <a:off x="785813" y="2775347"/>
-            <a:ext cx="3429000" cy="135731"/>
-          </a:xfrm>
-          <a:prstGeom prst="rect">
-            <a:avLst/>
-          </a:prstGeom>
-          <a:noFill/>
-          <a:ln/>
-        </p:spPr>
-        <p:txBody>
-          <a:bodyPr wrap="none" lIns="0" tIns="0" rIns="0" bIns="0" rtlCol="0" anchor="t">
-            <a:spAutoFit/>
-          </a:bodyPr>
-          <a:lstStyle/>
-          <a:p>
-            <a:pPr algn="l" indent="0" marL="0">
-              <a:lnSpc>
-                <a:spcPts val="900"/>
-              </a:lnSpc>
-              <a:buNone/>
-            </a:pPr>
-            <a:r>
-              <a:rPr lang="en-US" sz="683" b="1" spc="1" kern="0" dirty="0">
-                <a:solidFill>
-                  <a:srgbClr val="999999"/>
-                </a:solidFill>
-              </a:rPr>
-              <a:t>Internal Productivity</a:t>
-            </a:r>
-            <a:endParaRPr lang="en-US" sz="683" dirty="0"/>
-          </a:p>
-        </p:txBody>
-      </p:sp>
-      <p:sp>
-        <p:nvSpPr>
-          <p:cNvPr id="13" name="Shape 9"/>
-          <p:cNvSpPr/>
-          <p:nvPr/>
-        </p:nvSpPr>
-        <p:spPr>
-          <a:xfrm>
-            <a:off x="4714875" y="1266230"/>
-            <a:ext cx="3857625" cy="1859161"/>
-          </a:xfrm>
-          <a:prstGeom prst="rect">
-            <a:avLst/>
-          </a:prstGeom>
-          <a:solidFill>
-            <a:srgbClr val="FFFFFF"/>
-          </a:solidFill>
-          <a:ln/>
-        </p:spPr>
-      </p:sp>
-      <p:sp>
-        <p:nvSpPr>
-          <p:cNvPr id="14" name="Shape 10"/>
-          <p:cNvSpPr/>
-          <p:nvPr/>
-        </p:nvSpPr>
-        <p:spPr>
-          <a:xfrm>
-            <a:off x="4714875" y="1266230"/>
-            <a:ext cx="42863" cy="1859161"/>
-          </a:xfrm>
-          <a:prstGeom prst="rect">
-            <a:avLst/>
-          </a:prstGeom>
-          <a:solidFill>
-            <a:srgbClr val="FF4500"/>
-          </a:solidFill>
-          <a:ln/>
-        </p:spPr>
-      </p:sp>
-      <p:pic>
-        <p:nvPicPr>
-          <p:cNvPr id="15" name="Image 2" descr="preencoded.png">    </p:cNvPr>
+          <p:cNvPr id="2" name="Image 0" descr="preencoded.png"/>
           <p:cNvPicPr>
             <a:picLocks noChangeAspect="1"/>
           </p:cNvPicPr>
@@ -6945,8 +6438,8 @@
         </p:blipFill>
         <p:spPr>
           <a:xfrm>
-            <a:off x="4972050" y="1519833"/>
-            <a:ext cx="200025" cy="200025"/>
+            <a:off x="0" y="0"/>
+            <a:ext cx="9144000" cy="5713214"/>
           </a:xfrm>
           <a:prstGeom prst="rect">
             <a:avLst/>
@@ -6955,14 +6448,70 @@
       </p:pic>
       <p:sp>
         <p:nvSpPr>
-          <p:cNvPr id="16" name="Text 11"/>
-          <p:cNvSpPr/>
-          <p:nvPr/>
-        </p:nvSpPr>
-        <p:spPr>
-          <a:xfrm>
-            <a:off x="5322094" y="1500188"/>
-            <a:ext cx="2326602" cy="233958"/>
+          <p:cNvPr id="3" name="Shape 0"/>
+          <p:cNvSpPr/>
+          <p:nvPr/>
+        </p:nvSpPr>
+        <p:spPr>
+          <a:xfrm>
+            <a:off x="571500" y="428625"/>
+            <a:ext cx="8001000" cy="566142"/>
+          </a:xfrm>
+          <a:prstGeom prst="rect">
+            <a:avLst/>
+          </a:prstGeom>
+          <a:solidFill>
+            <a:srgbClr val="000000">
+              <a:alpha val="0"/>
+            </a:srgbClr>
+          </a:solidFill>
+          <a:ln/>
+        </p:spPr>
+        <p:txBody>
+          <a:bodyPr/>
+          <a:lstStyle/>
+          <a:p>
+            <a:endParaRPr lang="ru-KZ"/>
+          </a:p>
+        </p:txBody>
+      </p:sp>
+      <p:sp>
+        <p:nvSpPr>
+          <p:cNvPr id="4" name="Shape 1"/>
+          <p:cNvSpPr/>
+          <p:nvPr/>
+        </p:nvSpPr>
+        <p:spPr>
+          <a:xfrm>
+            <a:off x="571500" y="980480"/>
+            <a:ext cx="8001000" cy="14288"/>
+          </a:xfrm>
+          <a:prstGeom prst="rect">
+            <a:avLst/>
+          </a:prstGeom>
+          <a:solidFill>
+            <a:srgbClr val="1A1A1A"/>
+          </a:solidFill>
+          <a:ln/>
+        </p:spPr>
+        <p:txBody>
+          <a:bodyPr/>
+          <a:lstStyle/>
+          <a:p>
+            <a:endParaRPr lang="ru-KZ"/>
+          </a:p>
+        </p:txBody>
+      </p:sp>
+      <p:sp>
+        <p:nvSpPr>
+          <p:cNvPr id="5" name="Text 2"/>
+          <p:cNvSpPr/>
+          <p:nvPr/>
+        </p:nvSpPr>
+        <p:spPr>
+          <a:xfrm>
+            <a:off x="571500" y="428625"/>
+            <a:ext cx="3925658" cy="408980"/>
           </a:xfrm>
           <a:prstGeom prst="rect">
             <a:avLst/>
@@ -6976,7 +6525,48 @@
           </a:bodyPr>
           <a:lstStyle/>
           <a:p>
-            <a:pPr algn="l" indent="0" marL="0">
+            <a:pPr marL="0" indent="0" algn="l">
+              <a:lnSpc>
+                <a:spcPts val="2800"/>
+              </a:lnSpc>
+              <a:buNone/>
+            </a:pPr>
+            <a:r>
+              <a:rPr lang="en-US" sz="2121" b="1" kern="0" spc="-1" dirty="0">
+                <a:solidFill>
+                  <a:srgbClr val="1A1A1A"/>
+                </a:solidFill>
+              </a:rPr>
+              <a:t>Практические примеры</a:t>
+            </a:r>
+            <a:endParaRPr lang="en-US" sz="2121" dirty="0"/>
+          </a:p>
+        </p:txBody>
+      </p:sp>
+      <p:sp>
+        <p:nvSpPr>
+          <p:cNvPr id="6" name="Text 3"/>
+          <p:cNvSpPr/>
+          <p:nvPr/>
+        </p:nvSpPr>
+        <p:spPr>
+          <a:xfrm>
+            <a:off x="8376354" y="603647"/>
+            <a:ext cx="196146" cy="233958"/>
+          </a:xfrm>
+          <a:prstGeom prst="rect">
+            <a:avLst/>
+          </a:prstGeom>
+          <a:noFill/>
+          <a:ln/>
+        </p:spPr>
+        <p:txBody>
+          <a:bodyPr wrap="none" lIns="0" tIns="0" rIns="0" bIns="0" rtlCol="0" anchor="t">
+            <a:spAutoFit/>
+          </a:bodyPr>
+          <a:lstStyle/>
+          <a:p>
+            <a:pPr marL="0" indent="0" algn="l">
               <a:lnSpc>
                 <a:spcPts val="1600"/>
               </a:lnSpc>
@@ -6985,10 +6575,10 @@
             <a:r>
               <a:rPr lang="en-US" sz="1193" b="1" dirty="0">
                 <a:solidFill>
-                  <a:srgbClr val="1A1A1A"/>
-                </a:solidFill>
-              </a:rPr>
-              <a:t>Клиентская поддержка</a:t>
+                  <a:srgbClr val="FF4500"/>
+                </a:solidFill>
+              </a:rPr>
+              <a:t>15</a:t>
             </a:r>
             <a:endParaRPr lang="en-US" sz="1193" dirty="0"/>
           </a:p>
@@ -6996,95 +6586,13 @@
       </p:sp>
       <p:sp>
         <p:nvSpPr>
-          <p:cNvPr id="17" name="Text 12"/>
-          <p:cNvSpPr/>
-          <p:nvPr/>
-        </p:nvSpPr>
-        <p:spPr>
-          <a:xfrm>
-            <a:off x="4929188" y="1896666"/>
-            <a:ext cx="3429000" cy="771525"/>
-          </a:xfrm>
-          <a:prstGeom prst="rect">
-            <a:avLst/>
-          </a:prstGeom>
-          <a:noFill/>
-          <a:ln/>
-        </p:spPr>
-        <p:txBody>
-          <a:bodyPr wrap="square" lIns="0" tIns="0" rIns="0" bIns="0" rtlCol="0" anchor="t">
-            <a:spAutoFit/>
-          </a:bodyPr>
-          <a:lstStyle/>
-          <a:p>
-            <a:pPr algn="l" indent="0" marL="0">
-              <a:lnSpc>
-                <a:spcPts val="1500"/>
-              </a:lnSpc>
-              <a:buNone/>
-            </a:pPr>
-            <a:r>
-              <a:rPr lang="en-US" sz="942" dirty="0">
-                <a:solidFill>
-                  <a:srgbClr val="555555"/>
-                </a:solidFill>
-              </a:rPr>
-              <a:t>Автоматизация первой линии поддержки. Бот отвечает на вопросы по технической документации продукта, снижая нагрузку на операторов и время ожидания ответа.</a:t>
-            </a:r>
-            <a:endParaRPr lang="en-US" sz="942" dirty="0"/>
-          </a:p>
-        </p:txBody>
-      </p:sp>
-      <p:sp>
-        <p:nvSpPr>
-          <p:cNvPr id="18" name="Text 13"/>
-          <p:cNvSpPr/>
-          <p:nvPr/>
-        </p:nvSpPr>
-        <p:spPr>
-          <a:xfrm>
-            <a:off x="4929188" y="2775347"/>
-            <a:ext cx="3429000" cy="135731"/>
-          </a:xfrm>
-          <a:prstGeom prst="rect">
-            <a:avLst/>
-          </a:prstGeom>
-          <a:noFill/>
-          <a:ln/>
-        </p:spPr>
-        <p:txBody>
-          <a:bodyPr wrap="none" lIns="0" tIns="0" rIns="0" bIns="0" rtlCol="0" anchor="t">
-            <a:spAutoFit/>
-          </a:bodyPr>
-          <a:lstStyle/>
-          <a:p>
-            <a:pPr algn="l" indent="0" marL="0">
-              <a:lnSpc>
-                <a:spcPts val="900"/>
-              </a:lnSpc>
-              <a:buNone/>
-            </a:pPr>
-            <a:r>
-              <a:rPr lang="en-US" sz="683" b="1" spc="1" kern="0" dirty="0">
-                <a:solidFill>
-                  <a:srgbClr val="999999"/>
-                </a:solidFill>
-              </a:rPr>
-              <a:t>Customer Experience</a:t>
-            </a:r>
-            <a:endParaRPr lang="en-US" sz="683" dirty="0"/>
-          </a:p>
-        </p:txBody>
-      </p:sp>
-      <p:sp>
-        <p:nvSpPr>
-          <p:cNvPr id="19" name="Shape 14"/>
-          <p:cNvSpPr/>
-          <p:nvPr/>
-        </p:nvSpPr>
-        <p:spPr>
-          <a:xfrm>
-            <a:off x="571500" y="3411141"/>
+          <p:cNvPr id="7" name="Shape 4"/>
+          <p:cNvSpPr/>
+          <p:nvPr/>
+        </p:nvSpPr>
+        <p:spPr>
+          <a:xfrm>
+            <a:off x="571500" y="1266230"/>
             <a:ext cx="3857625" cy="1859161"/>
           </a:xfrm>
           <a:prstGeom prst="rect">
@@ -7095,16 +6603,23 @@
           </a:solidFill>
           <a:ln/>
         </p:spPr>
-      </p:sp>
-      <p:sp>
-        <p:nvSpPr>
-          <p:cNvPr id="20" name="Shape 15"/>
-          <p:cNvSpPr/>
-          <p:nvPr/>
-        </p:nvSpPr>
-        <p:spPr>
-          <a:xfrm>
-            <a:off x="571500" y="3411141"/>
+        <p:txBody>
+          <a:bodyPr/>
+          <a:lstStyle/>
+          <a:p>
+            <a:endParaRPr lang="ru-KZ"/>
+          </a:p>
+        </p:txBody>
+      </p:sp>
+      <p:sp>
+        <p:nvSpPr>
+          <p:cNvPr id="8" name="Shape 5"/>
+          <p:cNvSpPr/>
+          <p:nvPr/>
+        </p:nvSpPr>
+        <p:spPr>
+          <a:xfrm>
+            <a:off x="571500" y="1266230"/>
             <a:ext cx="42863" cy="1859161"/>
           </a:xfrm>
           <a:prstGeom prst="rect">
@@ -7115,10 +6630,17 @@
           </a:solidFill>
           <a:ln/>
         </p:spPr>
+        <p:txBody>
+          <a:bodyPr/>
+          <a:lstStyle/>
+          <a:p>
+            <a:endParaRPr lang="ru-KZ"/>
+          </a:p>
+        </p:txBody>
       </p:sp>
       <p:pic>
         <p:nvPicPr>
-          <p:cNvPr id="21" name="Image 3" descr="preencoded.png">    </p:cNvPr>
+          <p:cNvPr id="9" name="Image 1" descr="preencoded.png"/>
           <p:cNvPicPr>
             <a:picLocks noChangeAspect="1"/>
           </p:cNvPicPr>
@@ -7132,8 +6654,8 @@
         </p:blipFill>
         <p:spPr>
           <a:xfrm>
-            <a:off x="803672" y="3664744"/>
-            <a:ext cx="250031" cy="200025"/>
+            <a:off x="853678" y="1519833"/>
+            <a:ext cx="150019" cy="200025"/>
           </a:xfrm>
           <a:prstGeom prst="rect">
             <a:avLst/>
@@ -7142,14 +6664,14 @@
       </p:pic>
       <p:sp>
         <p:nvSpPr>
-          <p:cNvPr id="22" name="Text 16"/>
-          <p:cNvSpPr/>
-          <p:nvPr/>
-        </p:nvSpPr>
-        <p:spPr>
-          <a:xfrm>
-            <a:off x="1178719" y="3645098"/>
-            <a:ext cx="2224050" cy="233958"/>
+          <p:cNvPr id="10" name="Text 6"/>
+          <p:cNvSpPr/>
+          <p:nvPr/>
+        </p:nvSpPr>
+        <p:spPr>
+          <a:xfrm>
+            <a:off x="1178719" y="1500188"/>
+            <a:ext cx="2283042" cy="233958"/>
           </a:xfrm>
           <a:prstGeom prst="rect">
             <a:avLst/>
@@ -7163,7 +6685,7 @@
           </a:bodyPr>
           <a:lstStyle/>
           <a:p>
-            <a:pPr algn="l" indent="0" marL="0">
+            <a:pPr marL="0" indent="0" algn="l">
               <a:lnSpc>
                 <a:spcPts val="1600"/>
               </a:lnSpc>
@@ -7175,7 +6697,7 @@
                   <a:srgbClr val="1A1A1A"/>
                 </a:solidFill>
               </a:rPr>
-              <a:t>Юридический анализ</a:t>
+              <a:t>Корпоративный поиск</a:t>
             </a:r>
             <a:endParaRPr lang="en-US" sz="1193" dirty="0"/>
           </a:p>
@@ -7183,13 +6705,13 @@
       </p:sp>
       <p:sp>
         <p:nvSpPr>
-          <p:cNvPr id="23" name="Text 17"/>
-          <p:cNvSpPr/>
-          <p:nvPr/>
-        </p:nvSpPr>
-        <p:spPr>
-          <a:xfrm>
-            <a:off x="785813" y="4041577"/>
+          <p:cNvPr id="11" name="Text 7"/>
+          <p:cNvSpPr/>
+          <p:nvPr/>
+        </p:nvSpPr>
+        <p:spPr>
+          <a:xfrm>
+            <a:off x="785813" y="1896666"/>
             <a:ext cx="3429000" cy="771525"/>
           </a:xfrm>
           <a:prstGeom prst="rect">
@@ -7204,7 +6726,7 @@
           </a:bodyPr>
           <a:lstStyle/>
           <a:p>
-            <a:pPr algn="l" indent="0" marL="0">
+            <a:pPr marL="0" indent="0" algn="l">
               <a:lnSpc>
                 <a:spcPts val="1500"/>
               </a:lnSpc>
@@ -7216,7 +6738,7 @@
                   <a:srgbClr val="555555"/>
                 </a:solidFill>
               </a:rPr>
-              <a:t>Поиск прецедентов в огромных базах судебных решений или анализ контрактов на соответствие рискам. Система выделяет конкретные пункты и ссылки на законы.</a:t>
+              <a:t>Чат-боты с доступом к внутренним базам знаний (Confluence, Jira, Google Drive). Сотрудники мгновенно находят ответы на вопросы о политиках, коде или процессах без ручного поиска.</a:t>
             </a:r>
             <a:endParaRPr lang="en-US" sz="942" dirty="0"/>
           </a:p>
@@ -7224,13 +6746,13 @@
       </p:sp>
       <p:sp>
         <p:nvSpPr>
-          <p:cNvPr id="24" name="Text 18"/>
-          <p:cNvSpPr/>
-          <p:nvPr/>
-        </p:nvSpPr>
-        <p:spPr>
-          <a:xfrm>
-            <a:off x="785813" y="4920258"/>
+          <p:cNvPr id="12" name="Text 8"/>
+          <p:cNvSpPr/>
+          <p:nvPr/>
+        </p:nvSpPr>
+        <p:spPr>
+          <a:xfrm>
+            <a:off x="785813" y="2775347"/>
             <a:ext cx="3429000" cy="135731"/>
           </a:xfrm>
           <a:prstGeom prst="rect">
@@ -7245,19 +6767,19 @@
           </a:bodyPr>
           <a:lstStyle/>
           <a:p>
-            <a:pPr algn="l" indent="0" marL="0">
+            <a:pPr marL="0" indent="0" algn="l">
               <a:lnSpc>
                 <a:spcPts val="900"/>
               </a:lnSpc>
               <a:buNone/>
             </a:pPr>
             <a:r>
-              <a:rPr lang="en-US" sz="683" b="1" spc="1" kern="0" dirty="0">
+              <a:rPr lang="en-US" sz="683" b="1" kern="0" spc="1" dirty="0">
                 <a:solidFill>
                   <a:srgbClr val="999999"/>
                 </a:solidFill>
               </a:rPr>
-              <a:t>Legal Tech</a:t>
+              <a:t>Internal Productivity</a:t>
             </a:r>
             <a:endParaRPr lang="en-US" sz="683" dirty="0"/>
           </a:p>
@@ -7265,13 +6787,13 @@
       </p:sp>
       <p:sp>
         <p:nvSpPr>
-          <p:cNvPr id="25" name="Shape 19"/>
-          <p:cNvSpPr/>
-          <p:nvPr/>
-        </p:nvSpPr>
-        <p:spPr>
-          <a:xfrm>
-            <a:off x="4714875" y="3411141"/>
+          <p:cNvPr id="13" name="Shape 9"/>
+          <p:cNvSpPr/>
+          <p:nvPr/>
+        </p:nvSpPr>
+        <p:spPr>
+          <a:xfrm>
+            <a:off x="4714875" y="1266230"/>
             <a:ext cx="3857625" cy="1859161"/>
           </a:xfrm>
           <a:prstGeom prst="rect">
@@ -7282,16 +6804,23 @@
           </a:solidFill>
           <a:ln/>
         </p:spPr>
-      </p:sp>
-      <p:sp>
-        <p:nvSpPr>
-          <p:cNvPr id="26" name="Shape 20"/>
-          <p:cNvSpPr/>
-          <p:nvPr/>
-        </p:nvSpPr>
-        <p:spPr>
-          <a:xfrm>
-            <a:off x="4714875" y="3411141"/>
+        <p:txBody>
+          <a:bodyPr/>
+          <a:lstStyle/>
+          <a:p>
+            <a:endParaRPr lang="ru-KZ"/>
+          </a:p>
+        </p:txBody>
+      </p:sp>
+      <p:sp>
+        <p:nvSpPr>
+          <p:cNvPr id="14" name="Shape 10"/>
+          <p:cNvSpPr/>
+          <p:nvPr/>
+        </p:nvSpPr>
+        <p:spPr>
+          <a:xfrm>
+            <a:off x="4714875" y="1266230"/>
             <a:ext cx="42863" cy="1859161"/>
           </a:xfrm>
           <a:prstGeom prst="rect">
@@ -7302,10 +6831,17 @@
           </a:solidFill>
           <a:ln/>
         </p:spPr>
+        <p:txBody>
+          <a:bodyPr/>
+          <a:lstStyle/>
+          <a:p>
+            <a:endParaRPr lang="ru-KZ"/>
+          </a:p>
+        </p:txBody>
       </p:sp>
       <p:pic>
         <p:nvPicPr>
-          <p:cNvPr id="27" name="Image 4" descr="preencoded.png">    </p:cNvPr>
+          <p:cNvPr id="15" name="Image 2" descr="preencoded.png"/>
           <p:cNvPicPr>
             <a:picLocks noChangeAspect="1"/>
           </p:cNvPicPr>
@@ -7319,6 +6855,408 @@
         </p:blipFill>
         <p:spPr>
           <a:xfrm>
+            <a:off x="4972050" y="1519833"/>
+            <a:ext cx="200025" cy="200025"/>
+          </a:xfrm>
+          <a:prstGeom prst="rect">
+            <a:avLst/>
+          </a:prstGeom>
+        </p:spPr>
+      </p:pic>
+      <p:sp>
+        <p:nvSpPr>
+          <p:cNvPr id="16" name="Text 11"/>
+          <p:cNvSpPr/>
+          <p:nvPr/>
+        </p:nvSpPr>
+        <p:spPr>
+          <a:xfrm>
+            <a:off x="5322094" y="1500188"/>
+            <a:ext cx="2326602" cy="233958"/>
+          </a:xfrm>
+          <a:prstGeom prst="rect">
+            <a:avLst/>
+          </a:prstGeom>
+          <a:noFill/>
+          <a:ln/>
+        </p:spPr>
+        <p:txBody>
+          <a:bodyPr wrap="none" lIns="0" tIns="0" rIns="0" bIns="0" rtlCol="0" anchor="t">
+            <a:spAutoFit/>
+          </a:bodyPr>
+          <a:lstStyle/>
+          <a:p>
+            <a:pPr marL="0" indent="0" algn="l">
+              <a:lnSpc>
+                <a:spcPts val="1600"/>
+              </a:lnSpc>
+              <a:buNone/>
+            </a:pPr>
+            <a:r>
+              <a:rPr lang="en-US" sz="1193" b="1" dirty="0">
+                <a:solidFill>
+                  <a:srgbClr val="1A1A1A"/>
+                </a:solidFill>
+              </a:rPr>
+              <a:t>Клиентская поддержка</a:t>
+            </a:r>
+            <a:endParaRPr lang="en-US" sz="1193" dirty="0"/>
+          </a:p>
+        </p:txBody>
+      </p:sp>
+      <p:sp>
+        <p:nvSpPr>
+          <p:cNvPr id="17" name="Text 12"/>
+          <p:cNvSpPr/>
+          <p:nvPr/>
+        </p:nvSpPr>
+        <p:spPr>
+          <a:xfrm>
+            <a:off x="4929188" y="1896666"/>
+            <a:ext cx="3429000" cy="771525"/>
+          </a:xfrm>
+          <a:prstGeom prst="rect">
+            <a:avLst/>
+          </a:prstGeom>
+          <a:noFill/>
+          <a:ln/>
+        </p:spPr>
+        <p:txBody>
+          <a:bodyPr wrap="square" lIns="0" tIns="0" rIns="0" bIns="0" rtlCol="0" anchor="t">
+            <a:spAutoFit/>
+          </a:bodyPr>
+          <a:lstStyle/>
+          <a:p>
+            <a:pPr marL="0" indent="0" algn="l">
+              <a:lnSpc>
+                <a:spcPts val="1500"/>
+              </a:lnSpc>
+              <a:buNone/>
+            </a:pPr>
+            <a:r>
+              <a:rPr lang="en-US" sz="942" dirty="0">
+                <a:solidFill>
+                  <a:srgbClr val="555555"/>
+                </a:solidFill>
+              </a:rPr>
+              <a:t>Автоматизация первой линии поддержки. Бот отвечает на вопросы по технической документации продукта, снижая нагрузку на операторов и время ожидания ответа.</a:t>
+            </a:r>
+            <a:endParaRPr lang="en-US" sz="942" dirty="0"/>
+          </a:p>
+        </p:txBody>
+      </p:sp>
+      <p:sp>
+        <p:nvSpPr>
+          <p:cNvPr id="18" name="Text 13"/>
+          <p:cNvSpPr/>
+          <p:nvPr/>
+        </p:nvSpPr>
+        <p:spPr>
+          <a:xfrm>
+            <a:off x="4929188" y="2775347"/>
+            <a:ext cx="3429000" cy="135731"/>
+          </a:xfrm>
+          <a:prstGeom prst="rect">
+            <a:avLst/>
+          </a:prstGeom>
+          <a:noFill/>
+          <a:ln/>
+        </p:spPr>
+        <p:txBody>
+          <a:bodyPr wrap="none" lIns="0" tIns="0" rIns="0" bIns="0" rtlCol="0" anchor="t">
+            <a:spAutoFit/>
+          </a:bodyPr>
+          <a:lstStyle/>
+          <a:p>
+            <a:pPr marL="0" indent="0" algn="l">
+              <a:lnSpc>
+                <a:spcPts val="900"/>
+              </a:lnSpc>
+              <a:buNone/>
+            </a:pPr>
+            <a:r>
+              <a:rPr lang="en-US" sz="683" b="1" kern="0" spc="1" dirty="0">
+                <a:solidFill>
+                  <a:srgbClr val="999999"/>
+                </a:solidFill>
+              </a:rPr>
+              <a:t>Customer Experience</a:t>
+            </a:r>
+            <a:endParaRPr lang="en-US" sz="683" dirty="0"/>
+          </a:p>
+        </p:txBody>
+      </p:sp>
+      <p:sp>
+        <p:nvSpPr>
+          <p:cNvPr id="19" name="Shape 14"/>
+          <p:cNvSpPr/>
+          <p:nvPr/>
+        </p:nvSpPr>
+        <p:spPr>
+          <a:xfrm>
+            <a:off x="571500" y="3411141"/>
+            <a:ext cx="3857625" cy="1859161"/>
+          </a:xfrm>
+          <a:prstGeom prst="rect">
+            <a:avLst/>
+          </a:prstGeom>
+          <a:solidFill>
+            <a:srgbClr val="FFFFFF"/>
+          </a:solidFill>
+          <a:ln/>
+        </p:spPr>
+        <p:txBody>
+          <a:bodyPr/>
+          <a:lstStyle/>
+          <a:p>
+            <a:endParaRPr lang="ru-KZ"/>
+          </a:p>
+        </p:txBody>
+      </p:sp>
+      <p:sp>
+        <p:nvSpPr>
+          <p:cNvPr id="20" name="Shape 15"/>
+          <p:cNvSpPr/>
+          <p:nvPr/>
+        </p:nvSpPr>
+        <p:spPr>
+          <a:xfrm>
+            <a:off x="571500" y="3411141"/>
+            <a:ext cx="42863" cy="1859161"/>
+          </a:xfrm>
+          <a:prstGeom prst="rect">
+            <a:avLst/>
+          </a:prstGeom>
+          <a:solidFill>
+            <a:srgbClr val="FF4500"/>
+          </a:solidFill>
+          <a:ln/>
+        </p:spPr>
+        <p:txBody>
+          <a:bodyPr/>
+          <a:lstStyle/>
+          <a:p>
+            <a:endParaRPr lang="ru-KZ"/>
+          </a:p>
+        </p:txBody>
+      </p:sp>
+      <p:pic>
+        <p:nvPicPr>
+          <p:cNvPr id="21" name="Image 3" descr="preencoded.png"/>
+          <p:cNvPicPr>
+            <a:picLocks noChangeAspect="1"/>
+          </p:cNvPicPr>
+          <p:nvPr/>
+        </p:nvPicPr>
+        <p:blipFill>
+          <a:blip r:embed="rId6"/>
+          <a:stretch>
+            <a:fillRect/>
+          </a:stretch>
+        </p:blipFill>
+        <p:spPr>
+          <a:xfrm>
+            <a:off x="803672" y="3664744"/>
+            <a:ext cx="250031" cy="200025"/>
+          </a:xfrm>
+          <a:prstGeom prst="rect">
+            <a:avLst/>
+          </a:prstGeom>
+        </p:spPr>
+      </p:pic>
+      <p:sp>
+        <p:nvSpPr>
+          <p:cNvPr id="22" name="Text 16"/>
+          <p:cNvSpPr/>
+          <p:nvPr/>
+        </p:nvSpPr>
+        <p:spPr>
+          <a:xfrm>
+            <a:off x="1178719" y="3645098"/>
+            <a:ext cx="2224050" cy="233958"/>
+          </a:xfrm>
+          <a:prstGeom prst="rect">
+            <a:avLst/>
+          </a:prstGeom>
+          <a:noFill/>
+          <a:ln/>
+        </p:spPr>
+        <p:txBody>
+          <a:bodyPr wrap="none" lIns="0" tIns="0" rIns="0" bIns="0" rtlCol="0" anchor="t">
+            <a:spAutoFit/>
+          </a:bodyPr>
+          <a:lstStyle/>
+          <a:p>
+            <a:pPr marL="0" indent="0" algn="l">
+              <a:lnSpc>
+                <a:spcPts val="1600"/>
+              </a:lnSpc>
+              <a:buNone/>
+            </a:pPr>
+            <a:r>
+              <a:rPr lang="en-US" sz="1193" b="1" dirty="0">
+                <a:solidFill>
+                  <a:srgbClr val="1A1A1A"/>
+                </a:solidFill>
+              </a:rPr>
+              <a:t>Юридический анализ</a:t>
+            </a:r>
+            <a:endParaRPr lang="en-US" sz="1193" dirty="0"/>
+          </a:p>
+        </p:txBody>
+      </p:sp>
+      <p:sp>
+        <p:nvSpPr>
+          <p:cNvPr id="23" name="Text 17"/>
+          <p:cNvSpPr/>
+          <p:nvPr/>
+        </p:nvSpPr>
+        <p:spPr>
+          <a:xfrm>
+            <a:off x="785813" y="4041577"/>
+            <a:ext cx="3429000" cy="771525"/>
+          </a:xfrm>
+          <a:prstGeom prst="rect">
+            <a:avLst/>
+          </a:prstGeom>
+          <a:noFill/>
+          <a:ln/>
+        </p:spPr>
+        <p:txBody>
+          <a:bodyPr wrap="square" lIns="0" tIns="0" rIns="0" bIns="0" rtlCol="0" anchor="t">
+            <a:spAutoFit/>
+          </a:bodyPr>
+          <a:lstStyle/>
+          <a:p>
+            <a:pPr marL="0" indent="0" algn="l">
+              <a:lnSpc>
+                <a:spcPts val="1500"/>
+              </a:lnSpc>
+              <a:buNone/>
+            </a:pPr>
+            <a:r>
+              <a:rPr lang="en-US" sz="942" dirty="0">
+                <a:solidFill>
+                  <a:srgbClr val="555555"/>
+                </a:solidFill>
+              </a:rPr>
+              <a:t>Поиск прецедентов в огромных базах судебных решений или анализ контрактов на соответствие рискам. Система выделяет конкретные пункты и ссылки на законы.</a:t>
+            </a:r>
+            <a:endParaRPr lang="en-US" sz="942" dirty="0"/>
+          </a:p>
+        </p:txBody>
+      </p:sp>
+      <p:sp>
+        <p:nvSpPr>
+          <p:cNvPr id="24" name="Text 18"/>
+          <p:cNvSpPr/>
+          <p:nvPr/>
+        </p:nvSpPr>
+        <p:spPr>
+          <a:xfrm>
+            <a:off x="785813" y="4920258"/>
+            <a:ext cx="3429000" cy="135731"/>
+          </a:xfrm>
+          <a:prstGeom prst="rect">
+            <a:avLst/>
+          </a:prstGeom>
+          <a:noFill/>
+          <a:ln/>
+        </p:spPr>
+        <p:txBody>
+          <a:bodyPr wrap="none" lIns="0" tIns="0" rIns="0" bIns="0" rtlCol="0" anchor="t">
+            <a:spAutoFit/>
+          </a:bodyPr>
+          <a:lstStyle/>
+          <a:p>
+            <a:pPr marL="0" indent="0" algn="l">
+              <a:lnSpc>
+                <a:spcPts val="900"/>
+              </a:lnSpc>
+              <a:buNone/>
+            </a:pPr>
+            <a:r>
+              <a:rPr lang="en-US" sz="683" b="1" kern="0" spc="1" dirty="0">
+                <a:solidFill>
+                  <a:srgbClr val="999999"/>
+                </a:solidFill>
+              </a:rPr>
+              <a:t>Legal Tech</a:t>
+            </a:r>
+            <a:endParaRPr lang="en-US" sz="683" dirty="0"/>
+          </a:p>
+        </p:txBody>
+      </p:sp>
+      <p:sp>
+        <p:nvSpPr>
+          <p:cNvPr id="25" name="Shape 19"/>
+          <p:cNvSpPr/>
+          <p:nvPr/>
+        </p:nvSpPr>
+        <p:spPr>
+          <a:xfrm>
+            <a:off x="4714875" y="3411141"/>
+            <a:ext cx="3857625" cy="1859161"/>
+          </a:xfrm>
+          <a:prstGeom prst="rect">
+            <a:avLst/>
+          </a:prstGeom>
+          <a:solidFill>
+            <a:srgbClr val="FFFFFF"/>
+          </a:solidFill>
+          <a:ln/>
+        </p:spPr>
+        <p:txBody>
+          <a:bodyPr/>
+          <a:lstStyle/>
+          <a:p>
+            <a:endParaRPr lang="ru-KZ"/>
+          </a:p>
+        </p:txBody>
+      </p:sp>
+      <p:sp>
+        <p:nvSpPr>
+          <p:cNvPr id="26" name="Shape 20"/>
+          <p:cNvSpPr/>
+          <p:nvPr/>
+        </p:nvSpPr>
+        <p:spPr>
+          <a:xfrm>
+            <a:off x="4714875" y="3411141"/>
+            <a:ext cx="42863" cy="1859161"/>
+          </a:xfrm>
+          <a:prstGeom prst="rect">
+            <a:avLst/>
+          </a:prstGeom>
+          <a:solidFill>
+            <a:srgbClr val="FF4500"/>
+          </a:solidFill>
+          <a:ln/>
+        </p:spPr>
+        <p:txBody>
+          <a:bodyPr/>
+          <a:lstStyle/>
+          <a:p>
+            <a:endParaRPr lang="ru-KZ"/>
+          </a:p>
+        </p:txBody>
+      </p:sp>
+      <p:pic>
+        <p:nvPicPr>
+          <p:cNvPr id="27" name="Image 4" descr="preencoded.png"/>
+          <p:cNvPicPr>
+            <a:picLocks noChangeAspect="1"/>
+          </p:cNvPicPr>
+          <p:nvPr/>
+        </p:nvPicPr>
+        <p:blipFill>
+          <a:blip r:embed="rId7"/>
+          <a:stretch>
+            <a:fillRect/>
+          </a:stretch>
+        </p:blipFill>
+        <p:spPr>
+          <a:xfrm>
             <a:off x="4947047" y="3664744"/>
             <a:ext cx="250031" cy="200025"/>
           </a:xfrm>
@@ -7350,7 +7288,7 @@
           </a:bodyPr>
           <a:lstStyle/>
           <a:p>
-            <a:pPr algn="l" indent="0" marL="0">
+            <a:pPr marL="0" indent="0" algn="l">
               <a:lnSpc>
                 <a:spcPts val="1600"/>
               </a:lnSpc>
@@ -7391,7 +7329,7 @@
           </a:bodyPr>
           <a:lstStyle/>
           <a:p>
-            <a:pPr algn="l" indent="0" marL="0">
+            <a:pPr marL="0" indent="0" algn="l">
               <a:lnSpc>
                 <a:spcPts val="1500"/>
               </a:lnSpc>
@@ -7432,14 +7370,14 @@
           </a:bodyPr>
           <a:lstStyle/>
           <a:p>
-            <a:pPr algn="l" indent="0" marL="0">
+            <a:pPr marL="0" indent="0" algn="l">
               <a:lnSpc>
                 <a:spcPts val="900"/>
               </a:lnSpc>
               <a:buNone/>
             </a:pPr>
             <a:r>
-              <a:rPr lang="en-US" sz="683" b="1" spc="1" kern="0" dirty="0">
+              <a:rPr lang="en-US" sz="683" b="1" kern="0" spc="1" dirty="0">
                 <a:solidFill>
                   <a:srgbClr val="999999"/>
                 </a:solidFill>
@@ -7477,14 +7415,14 @@
       </p:grpSpPr>
       <p:pic>
         <p:nvPicPr>
-          <p:cNvPr id="2" name="Image 0" descr="preencoded.png">    </p:cNvPr>
+          <p:cNvPr id="2" name="Image 0" descr="preencoded.png"/>
           <p:cNvPicPr>
             <a:picLocks noChangeAspect="1"/>
           </p:cNvPicPr>
           <p:nvPr/>
         </p:nvPicPr>
         <p:blipFill>
-          <a:blip r:embed="rId1"/>
+          <a:blip r:embed="rId3"/>
           <a:stretch>
             <a:fillRect/>
           </a:stretch>
@@ -7520,6 +7458,13 @@
           </a:solidFill>
           <a:ln/>
         </p:spPr>
+        <p:txBody>
+          <a:bodyPr/>
+          <a:lstStyle/>
+          <a:p>
+            <a:endParaRPr lang="ru-KZ"/>
+          </a:p>
+        </p:txBody>
       </p:sp>
       <p:sp>
         <p:nvSpPr>
@@ -7540,6 +7485,13 @@
           </a:solidFill>
           <a:ln/>
         </p:spPr>
+        <p:txBody>
+          <a:bodyPr/>
+          <a:lstStyle/>
+          <a:p>
+            <a:endParaRPr lang="ru-KZ"/>
+          </a:p>
+        </p:txBody>
       </p:sp>
       <p:sp>
         <p:nvSpPr>
@@ -7564,14 +7516,14 @@
           </a:bodyPr>
           <a:lstStyle/>
           <a:p>
-            <a:pPr algn="l" indent="0" marL="0">
+            <a:pPr marL="0" indent="0" algn="l">
               <a:lnSpc>
                 <a:spcPts val="2800"/>
               </a:lnSpc>
               <a:buNone/>
             </a:pPr>
             <a:r>
-              <a:rPr lang="en-US" sz="2121" b="1" spc="-1" kern="0" dirty="0">
+              <a:rPr lang="en-US" sz="2121" b="1" kern="0" spc="-1" dirty="0">
                 <a:solidFill>
                   <a:srgbClr val="1A1A1A"/>
                 </a:solidFill>
@@ -7605,7 +7557,7 @@
           </a:bodyPr>
           <a:lstStyle/>
           <a:p>
-            <a:pPr algn="l" indent="0" marL="0">
+            <a:pPr marL="0" indent="0" algn="l">
               <a:lnSpc>
                 <a:spcPts val="1600"/>
               </a:lnSpc>
@@ -7647,6 +7599,13 @@
             <a:prstDash val="solid"/>
           </a:ln>
         </p:spPr>
+        <p:txBody>
+          <a:bodyPr/>
+          <a:lstStyle/>
+          <a:p>
+            <a:endParaRPr lang="ru-KZ"/>
+          </a:p>
+        </p:txBody>
       </p:sp>
       <p:sp>
         <p:nvSpPr>
@@ -7671,7 +7630,7 @@
           </a:bodyPr>
           <a:lstStyle/>
           <a:p>
-            <a:pPr algn="l" indent="0" marL="0">
+            <a:pPr marL="0" indent="0" algn="l">
               <a:lnSpc>
                 <a:spcPts val="1600"/>
               </a:lnSpc>
@@ -7712,7 +7671,7 @@
           </a:bodyPr>
           <a:lstStyle/>
           <a:p>
-            <a:pPr algn="l" indent="0" marL="0">
+            <a:pPr marL="0" indent="0" algn="l">
               <a:lnSpc>
                 <a:spcPts val="1500"/>
               </a:lnSpc>
@@ -7753,7 +7712,7 @@
           </a:bodyPr>
           <a:lstStyle/>
           <a:p>
-            <a:pPr algn="l" indent="0" marL="0">
+            <a:pPr marL="0" indent="0" algn="l">
               <a:lnSpc>
                 <a:spcPts val="900"/>
               </a:lnSpc>
@@ -7795,6 +7754,13 @@
             <a:prstDash val="solid"/>
           </a:ln>
         </p:spPr>
+        <p:txBody>
+          <a:bodyPr/>
+          <a:lstStyle/>
+          <a:p>
+            <a:endParaRPr lang="ru-KZ"/>
+          </a:p>
+        </p:txBody>
       </p:sp>
       <p:sp>
         <p:nvSpPr>
@@ -7819,7 +7785,7 @@
           </a:bodyPr>
           <a:lstStyle/>
           <a:p>
-            <a:pPr algn="l" indent="0" marL="0">
+            <a:pPr marL="0" indent="0" algn="l">
               <a:lnSpc>
                 <a:spcPts val="1600"/>
               </a:lnSpc>
@@ -7860,7 +7826,7 @@
           </a:bodyPr>
           <a:lstStyle/>
           <a:p>
-            <a:pPr algn="l" indent="0" marL="0">
+            <a:pPr marL="0" indent="0" algn="l">
               <a:lnSpc>
                 <a:spcPts val="1500"/>
               </a:lnSpc>
@@ -7901,7 +7867,7 @@
           </a:bodyPr>
           <a:lstStyle/>
           <a:p>
-            <a:pPr algn="l" indent="0" marL="0">
+            <a:pPr marL="0" indent="0" algn="l">
               <a:lnSpc>
                 <a:spcPts val="900"/>
               </a:lnSpc>
@@ -7943,6 +7909,13 @@
             <a:prstDash val="solid"/>
           </a:ln>
         </p:spPr>
+        <p:txBody>
+          <a:bodyPr/>
+          <a:lstStyle/>
+          <a:p>
+            <a:endParaRPr lang="ru-KZ"/>
+          </a:p>
+        </p:txBody>
       </p:sp>
       <p:sp>
         <p:nvSpPr>
@@ -7967,7 +7940,7 @@
           </a:bodyPr>
           <a:lstStyle/>
           <a:p>
-            <a:pPr algn="l" indent="0" marL="0">
+            <a:pPr marL="0" indent="0" algn="l">
               <a:lnSpc>
                 <a:spcPts val="1600"/>
               </a:lnSpc>
@@ -8008,7 +7981,7 @@
           </a:bodyPr>
           <a:lstStyle/>
           <a:p>
-            <a:pPr algn="l" indent="0" marL="0">
+            <a:pPr marL="0" indent="0" algn="l">
               <a:lnSpc>
                 <a:spcPts val="1500"/>
               </a:lnSpc>
@@ -8049,7 +8022,7 @@
           </a:bodyPr>
           <a:lstStyle/>
           <a:p>
-            <a:pPr algn="l" indent="0" marL="0">
+            <a:pPr marL="0" indent="0" algn="l">
               <a:lnSpc>
                 <a:spcPts val="900"/>
               </a:lnSpc>
@@ -8091,6 +8064,13 @@
             <a:prstDash val="solid"/>
           </a:ln>
         </p:spPr>
+        <p:txBody>
+          <a:bodyPr/>
+          <a:lstStyle/>
+          <a:p>
+            <a:endParaRPr lang="ru-KZ"/>
+          </a:p>
+        </p:txBody>
       </p:sp>
       <p:sp>
         <p:nvSpPr>
@@ -8115,7 +8095,7 @@
           </a:bodyPr>
           <a:lstStyle/>
           <a:p>
-            <a:pPr algn="l" indent="0" marL="0">
+            <a:pPr marL="0" indent="0" algn="l">
               <a:lnSpc>
                 <a:spcPts val="1600"/>
               </a:lnSpc>
@@ -8156,7 +8136,7 @@
           </a:bodyPr>
           <a:lstStyle/>
           <a:p>
-            <a:pPr algn="l" indent="0" marL="0">
+            <a:pPr marL="0" indent="0" algn="l">
               <a:lnSpc>
                 <a:spcPts val="1500"/>
               </a:lnSpc>
@@ -8197,7 +8177,7 @@
           </a:bodyPr>
           <a:lstStyle/>
           <a:p>
-            <a:pPr algn="l" indent="0" marL="0">
+            <a:pPr marL="0" indent="0" algn="l">
               <a:lnSpc>
                 <a:spcPts val="900"/>
               </a:lnSpc>
@@ -8242,14 +8222,14 @@
       </p:grpSpPr>
       <p:pic>
         <p:nvPicPr>
-          <p:cNvPr id="2" name="Image 0" descr="preencoded.png">    </p:cNvPr>
+          <p:cNvPr id="2" name="Image 0" descr="preencoded.png"/>
           <p:cNvPicPr>
             <a:picLocks noChangeAspect="1"/>
           </p:cNvPicPr>
           <p:nvPr/>
         </p:nvPicPr>
         <p:blipFill>
-          <a:blip r:embed="rId1"/>
+          <a:blip r:embed="rId3"/>
           <a:stretch>
             <a:fillRect/>
           </a:stretch>
@@ -8285,6 +8265,13 @@
           </a:solidFill>
           <a:ln/>
         </p:spPr>
+        <p:txBody>
+          <a:bodyPr/>
+          <a:lstStyle/>
+          <a:p>
+            <a:endParaRPr lang="ru-KZ"/>
+          </a:p>
+        </p:txBody>
       </p:sp>
       <p:sp>
         <p:nvSpPr>
@@ -8305,6 +8292,13 @@
           </a:solidFill>
           <a:ln/>
         </p:spPr>
+        <p:txBody>
+          <a:bodyPr/>
+          <a:lstStyle/>
+          <a:p>
+            <a:endParaRPr lang="ru-KZ"/>
+          </a:p>
+        </p:txBody>
       </p:sp>
       <p:sp>
         <p:nvSpPr>
@@ -8329,14 +8323,14 @@
           </a:bodyPr>
           <a:lstStyle/>
           <a:p>
-            <a:pPr algn="l" indent="0" marL="0">
+            <a:pPr marL="0" indent="0" algn="l">
               <a:lnSpc>
                 <a:spcPts val="2800"/>
               </a:lnSpc>
               <a:buNone/>
             </a:pPr>
             <a:r>
-              <a:rPr lang="en-US" sz="2121" b="1" spc="-1" kern="0" dirty="0">
+              <a:rPr lang="en-US" sz="2121" b="1" kern="0" spc="-1" dirty="0">
                 <a:solidFill>
                   <a:srgbClr val="1A1A1A"/>
                 </a:solidFill>
@@ -8370,7 +8364,7 @@
           </a:bodyPr>
           <a:lstStyle/>
           <a:p>
-            <a:pPr algn="l" indent="0" marL="0">
+            <a:pPr marL="0" indent="0" algn="l">
               <a:lnSpc>
                 <a:spcPts val="1600"/>
               </a:lnSpc>
@@ -8411,7 +8405,7 @@
           </a:bodyPr>
           <a:lstStyle/>
           <a:p>
-            <a:pPr algn="l" indent="0" marL="0">
+            <a:pPr marL="0" indent="0" algn="l">
               <a:lnSpc>
                 <a:spcPts val="1600"/>
               </a:lnSpc>
@@ -8452,7 +8446,7 @@
           </a:bodyPr>
           <a:lstStyle/>
           <a:p>
-            <a:pPr algn="l" indent="0" marL="0">
+            <a:pPr marL="0" indent="0" algn="l">
               <a:lnSpc>
                 <a:spcPts val="1500"/>
               </a:lnSpc>
@@ -8489,6 +8483,13 @@
           </a:solidFill>
           <a:ln/>
         </p:spPr>
+        <p:txBody>
+          <a:bodyPr/>
+          <a:lstStyle/>
+          <a:p>
+            <a:endParaRPr lang="ru-KZ"/>
+          </a:p>
+        </p:txBody>
       </p:sp>
       <p:sp>
         <p:nvSpPr>
@@ -8513,7 +8514,7 @@
           </a:bodyPr>
           <a:lstStyle/>
           <a:p>
-            <a:pPr algn="l" indent="0" marL="0">
+            <a:pPr marL="0" indent="0" algn="l">
               <a:lnSpc>
                 <a:spcPts val="800"/>
               </a:lnSpc>
@@ -8550,6 +8551,13 @@
           </a:solidFill>
           <a:ln/>
         </p:spPr>
+        <p:txBody>
+          <a:bodyPr/>
+          <a:lstStyle/>
+          <a:p>
+            <a:endParaRPr lang="ru-KZ"/>
+          </a:p>
+        </p:txBody>
       </p:sp>
       <p:sp>
         <p:nvSpPr>
@@ -8574,7 +8582,7 @@
           </a:bodyPr>
           <a:lstStyle/>
           <a:p>
-            <a:pPr algn="l" indent="0" marL="0">
+            <a:pPr marL="0" indent="0" algn="l">
               <a:lnSpc>
                 <a:spcPts val="800"/>
               </a:lnSpc>
@@ -8615,7 +8623,7 @@
           </a:bodyPr>
           <a:lstStyle/>
           <a:p>
-            <a:pPr algn="l" indent="0" marL="0">
+            <a:pPr marL="0" indent="0" algn="l">
               <a:lnSpc>
                 <a:spcPts val="1600"/>
               </a:lnSpc>
@@ -8656,7 +8664,7 @@
           </a:bodyPr>
           <a:lstStyle/>
           <a:p>
-            <a:pPr algn="l" indent="0" marL="0">
+            <a:pPr marL="0" indent="0" algn="l">
               <a:lnSpc>
                 <a:spcPts val="1500"/>
               </a:lnSpc>
@@ -8693,6 +8701,13 @@
           </a:solidFill>
           <a:ln/>
         </p:spPr>
+        <p:txBody>
+          <a:bodyPr/>
+          <a:lstStyle/>
+          <a:p>
+            <a:endParaRPr lang="ru-KZ"/>
+          </a:p>
+        </p:txBody>
       </p:sp>
       <p:sp>
         <p:nvSpPr>
@@ -8717,7 +8732,7 @@
           </a:bodyPr>
           <a:lstStyle/>
           <a:p>
-            <a:pPr algn="l" indent="0" marL="0">
+            <a:pPr marL="0" indent="0" algn="l">
               <a:lnSpc>
                 <a:spcPts val="800"/>
               </a:lnSpc>
@@ -8754,6 +8769,13 @@
           </a:solidFill>
           <a:ln/>
         </p:spPr>
+        <p:txBody>
+          <a:bodyPr/>
+          <a:lstStyle/>
+          <a:p>
+            <a:endParaRPr lang="ru-KZ"/>
+          </a:p>
+        </p:txBody>
       </p:sp>
       <p:sp>
         <p:nvSpPr>
@@ -8778,7 +8800,7 @@
           </a:bodyPr>
           <a:lstStyle/>
           <a:p>
-            <a:pPr algn="l" indent="0" marL="0">
+            <a:pPr marL="0" indent="0" algn="l">
               <a:lnSpc>
                 <a:spcPts val="800"/>
               </a:lnSpc>
@@ -8819,7 +8841,7 @@
           </a:bodyPr>
           <a:lstStyle/>
           <a:p>
-            <a:pPr algn="l" indent="0" marL="0">
+            <a:pPr marL="0" indent="0" algn="l">
               <a:lnSpc>
                 <a:spcPts val="1600"/>
               </a:lnSpc>
@@ -8860,7 +8882,7 @@
           </a:bodyPr>
           <a:lstStyle/>
           <a:p>
-            <a:pPr algn="l" indent="0" marL="0">
+            <a:pPr marL="0" indent="0" algn="l">
               <a:lnSpc>
                 <a:spcPts val="1500"/>
               </a:lnSpc>
@@ -8897,6 +8919,13 @@
           </a:solidFill>
           <a:ln/>
         </p:spPr>
+        <p:txBody>
+          <a:bodyPr/>
+          <a:lstStyle/>
+          <a:p>
+            <a:endParaRPr lang="ru-KZ"/>
+          </a:p>
+        </p:txBody>
       </p:sp>
       <p:sp>
         <p:nvSpPr>
@@ -8921,7 +8950,7 @@
           </a:bodyPr>
           <a:lstStyle/>
           <a:p>
-            <a:pPr algn="l" indent="0" marL="0">
+            <a:pPr marL="0" indent="0" algn="l">
               <a:lnSpc>
                 <a:spcPts val="800"/>
               </a:lnSpc>
@@ -8958,6 +8987,13 @@
           </a:solidFill>
           <a:ln/>
         </p:spPr>
+        <p:txBody>
+          <a:bodyPr/>
+          <a:lstStyle/>
+          <a:p>
+            <a:endParaRPr lang="ru-KZ"/>
+          </a:p>
+        </p:txBody>
       </p:sp>
       <p:sp>
         <p:nvSpPr>
@@ -8982,7 +9018,7 @@
           </a:bodyPr>
           <a:lstStyle/>
           <a:p>
-            <a:pPr algn="l" indent="0" marL="0">
+            <a:pPr marL="0" indent="0" algn="l">
               <a:lnSpc>
                 <a:spcPts val="800"/>
               </a:lnSpc>
@@ -9024,17 +9060,24 @@
             <a:prstDash val="solid"/>
           </a:ln>
         </p:spPr>
+        <p:txBody>
+          <a:bodyPr/>
+          <a:lstStyle/>
+          <a:p>
+            <a:endParaRPr lang="ru-KZ"/>
+          </a:p>
+        </p:txBody>
       </p:sp>
       <p:pic>
         <p:nvPicPr>
-          <p:cNvPr id="26" name="Image 1" descr="preencoded.png">    </p:cNvPr>
+          <p:cNvPr id="26" name="Image 1" descr="preencoded.png"/>
           <p:cNvPicPr>
             <a:picLocks noChangeAspect="1"/>
           </p:cNvPicPr>
           <p:nvPr/>
         </p:nvPicPr>
         <p:blipFill>
-          <a:blip r:embed="rId2"/>
+          <a:blip r:embed="rId4"/>
           <a:stretch>
             <a:fillRect/>
           </a:stretch>
@@ -9076,14 +9119,14 @@
       </p:grpSpPr>
       <p:pic>
         <p:nvPicPr>
-          <p:cNvPr id="2" name="Image 0" descr="preencoded.png">    </p:cNvPr>
+          <p:cNvPr id="2" name="Image 0" descr="preencoded.png"/>
           <p:cNvPicPr>
             <a:picLocks noChangeAspect="1"/>
           </p:cNvPicPr>
           <p:nvPr/>
         </p:nvPicPr>
         <p:blipFill>
-          <a:blip r:embed="rId1"/>
+          <a:blip r:embed="rId3"/>
           <a:stretch>
             <a:fillRect/>
           </a:stretch>
@@ -9119,6 +9162,13 @@
           </a:solidFill>
           <a:ln/>
         </p:spPr>
+        <p:txBody>
+          <a:bodyPr/>
+          <a:lstStyle/>
+          <a:p>
+            <a:endParaRPr lang="ru-KZ"/>
+          </a:p>
+        </p:txBody>
       </p:sp>
       <p:sp>
         <p:nvSpPr>
@@ -9139,6 +9189,13 @@
           </a:solidFill>
           <a:ln/>
         </p:spPr>
+        <p:txBody>
+          <a:bodyPr/>
+          <a:lstStyle/>
+          <a:p>
+            <a:endParaRPr lang="ru-KZ"/>
+          </a:p>
+        </p:txBody>
       </p:sp>
       <p:sp>
         <p:nvSpPr>
@@ -9163,14 +9220,14 @@
           </a:bodyPr>
           <a:lstStyle/>
           <a:p>
-            <a:pPr algn="l" indent="0" marL="0">
+            <a:pPr marL="0" indent="0" algn="l">
               <a:lnSpc>
                 <a:spcPts val="2800"/>
               </a:lnSpc>
               <a:buNone/>
             </a:pPr>
             <a:r>
-              <a:rPr lang="en-US" sz="2121" b="1" spc="-1" kern="0" dirty="0">
+              <a:rPr lang="en-US" sz="2121" b="1" kern="0" spc="-1" dirty="0">
                 <a:solidFill>
                   <a:srgbClr val="1A1A1A"/>
                 </a:solidFill>
@@ -9204,7 +9261,7 @@
           </a:bodyPr>
           <a:lstStyle/>
           <a:p>
-            <a:pPr algn="l" indent="0" marL="0">
+            <a:pPr marL="0" indent="0" algn="l">
               <a:lnSpc>
                 <a:spcPts val="1600"/>
               </a:lnSpc>
@@ -9245,7 +9302,7 @@
           </a:bodyPr>
           <a:lstStyle/>
           <a:p>
-            <a:pPr algn="l" indent="0" marL="0">
+            <a:pPr marL="0" indent="0" algn="l">
               <a:lnSpc>
                 <a:spcPts val="3200"/>
               </a:lnSpc>
@@ -9257,49 +9314,7 @@
                   <a:srgbClr val="FF4500"/>
                 </a:solidFill>
               </a:rPr>
-              <a:t>RAG — это не просто опция, это </a:t>
-            </a:r>
-            <a:pPr algn="l" indent="0" marL="0">
-              <a:lnSpc>
-                <a:spcPts val="3200"/>
-              </a:lnSpc>
-              <a:buNone/>
-            </a:pPr>
-            <a:r>
-              <a:rPr lang="en-US" sz="2436" b="1" dirty="0">
-                <a:solidFill>
-                  <a:srgbClr val="FF4500"/>
-                </a:solidFill>
-              </a:rPr>
-              <a:t>стандарт</a:t>
-            </a:r>
-            <a:pPr algn="l" indent="0" marL="0">
-              <a:lnSpc>
-                <a:spcPts val="3200"/>
-              </a:lnSpc>
-              <a:buNone/>
-            </a:pPr>
-            <a:r>
-              <a:rPr lang="en-US" sz="2436" b="1" dirty="0">
-                <a:solidFill>
-                  <a:srgbClr val="FF4500"/>
-                </a:solidFill>
-              </a:rPr>
-              <a:t> для создания надежных </a:t>
-            </a:r>
-            <a:pPr algn="l" indent="0" marL="0">
-              <a:lnSpc>
-                <a:spcPts val="3200"/>
-              </a:lnSpc>
-              <a:buNone/>
-            </a:pPr>
-            <a:r>
-              <a:rPr lang="en-US" sz="2436" b="1" dirty="0">
-                <a:solidFill>
-                  <a:srgbClr val="FF4500"/>
-                </a:solidFill>
-              </a:rPr>
-              <a:t>корпоративных AI-систем.</a:t>
+              <a:t>RAG — это не просто опция, это стандарт для создания надежных корпоративных AI-систем.</a:t>
             </a:r>
             <a:endParaRPr lang="en-US" sz="2436" dirty="0"/>
           </a:p>
@@ -9328,14 +9343,14 @@
           </a:bodyPr>
           <a:lstStyle/>
           <a:p>
-            <a:pPr algn="l" indent="0" marL="0">
+            <a:pPr marL="0" indent="0" algn="l">
               <a:lnSpc>
                 <a:spcPts val="1600"/>
               </a:lnSpc>
               <a:buNone/>
             </a:pPr>
             <a:r>
-              <a:rPr lang="en-US" sz="1193" b="1" spc="1" kern="0" dirty="0">
+              <a:rPr lang="en-US" sz="1193" b="1" kern="0" spc="1" dirty="0">
                 <a:solidFill>
                   <a:srgbClr val="1A1A1A"/>
                 </a:solidFill>
@@ -9369,7 +9384,7 @@
           </a:bodyPr>
           <a:lstStyle/>
           <a:p>
-            <a:pPr algn="l" indent="0" marL="0">
+            <a:pPr marL="0" indent="0" algn="l">
               <a:lnSpc>
                 <a:spcPts val="1500"/>
               </a:lnSpc>
@@ -9410,14 +9425,14 @@
           </a:bodyPr>
           <a:lstStyle/>
           <a:p>
-            <a:pPr algn="l" indent="0" marL="0">
+            <a:pPr marL="0" indent="0" algn="l">
               <a:lnSpc>
                 <a:spcPts val="1600"/>
               </a:lnSpc>
               <a:buNone/>
             </a:pPr>
             <a:r>
-              <a:rPr lang="en-US" sz="1193" b="1" spc="1" kern="0" dirty="0">
+              <a:rPr lang="en-US" sz="1193" b="1" kern="0" spc="1" dirty="0">
                 <a:solidFill>
                   <a:srgbClr val="1A1A1A"/>
                 </a:solidFill>
@@ -9451,7 +9466,7 @@
           </a:bodyPr>
           <a:lstStyle/>
           <a:p>
-            <a:pPr algn="l" indent="0" marL="0">
+            <a:pPr marL="0" indent="0" algn="l">
               <a:lnSpc>
                 <a:spcPts val="1500"/>
               </a:lnSpc>
@@ -9492,14 +9507,14 @@
           </a:bodyPr>
           <a:lstStyle/>
           <a:p>
-            <a:pPr algn="l" indent="0" marL="0">
+            <a:pPr marL="0" indent="0" algn="l">
               <a:lnSpc>
                 <a:spcPts val="1600"/>
               </a:lnSpc>
               <a:buNone/>
             </a:pPr>
             <a:r>
-              <a:rPr lang="en-US" sz="1193" b="1" spc="1" kern="0" dirty="0">
+              <a:rPr lang="en-US" sz="1193" b="1" kern="0" spc="1" dirty="0">
                 <a:solidFill>
                   <a:srgbClr val="1A1A1A"/>
                 </a:solidFill>
@@ -9533,7 +9548,7 @@
           </a:bodyPr>
           <a:lstStyle/>
           <a:p>
-            <a:pPr algn="l" indent="0" marL="0">
+            <a:pPr marL="0" indent="0" algn="l">
               <a:lnSpc>
                 <a:spcPts val="1500"/>
               </a:lnSpc>
@@ -9574,7 +9589,7 @@
           </a:bodyPr>
           <a:lstStyle/>
           <a:p>
-            <a:pPr algn="r" indent="0" marL="0">
+            <a:pPr marL="0" indent="0" algn="r">
               <a:lnSpc>
                 <a:spcPts val="1100"/>
               </a:lnSpc>
@@ -9619,14 +9634,14 @@
       </p:grpSpPr>
       <p:pic>
         <p:nvPicPr>
-          <p:cNvPr id="2" name="Image 0" descr="preencoded.png">    </p:cNvPr>
+          <p:cNvPr id="2" name="Image 0" descr="preencoded.png"/>
           <p:cNvPicPr>
             <a:picLocks noChangeAspect="1"/>
           </p:cNvPicPr>
           <p:nvPr/>
         </p:nvPicPr>
         <p:blipFill>
-          <a:blip r:embed="rId1"/>
+          <a:blip r:embed="rId3"/>
           <a:stretch>
             <a:fillRect/>
           </a:stretch>
@@ -9662,6 +9677,13 @@
           </a:solidFill>
           <a:ln/>
         </p:spPr>
+        <p:txBody>
+          <a:bodyPr/>
+          <a:lstStyle/>
+          <a:p>
+            <a:endParaRPr lang="ru-KZ"/>
+          </a:p>
+        </p:txBody>
       </p:sp>
       <p:sp>
         <p:nvSpPr>
@@ -9682,6 +9704,13 @@
           </a:solidFill>
           <a:ln/>
         </p:spPr>
+        <p:txBody>
+          <a:bodyPr/>
+          <a:lstStyle/>
+          <a:p>
+            <a:endParaRPr lang="ru-KZ"/>
+          </a:p>
+        </p:txBody>
       </p:sp>
       <p:sp>
         <p:nvSpPr>
@@ -9706,14 +9735,14 @@
           </a:bodyPr>
           <a:lstStyle/>
           <a:p>
-            <a:pPr algn="l" indent="0" marL="0">
+            <a:pPr marL="0" indent="0" algn="l">
               <a:lnSpc>
                 <a:spcPts val="2800"/>
               </a:lnSpc>
               <a:buNone/>
             </a:pPr>
             <a:r>
-              <a:rPr lang="en-US" sz="2121" b="1" spc="-1" kern="0" dirty="0">
+              <a:rPr lang="en-US" sz="2121" b="1" kern="0" spc="-1" dirty="0">
                 <a:solidFill>
                   <a:srgbClr val="1A1A1A"/>
                 </a:solidFill>
@@ -9747,7 +9776,7 @@
           </a:bodyPr>
           <a:lstStyle/>
           <a:p>
-            <a:pPr algn="l" indent="0" marL="0">
+            <a:pPr marL="0" indent="0" algn="l">
               <a:lnSpc>
                 <a:spcPts val="1600"/>
               </a:lnSpc>
@@ -9788,7 +9817,7 @@
           </a:bodyPr>
           <a:lstStyle/>
           <a:p>
-            <a:pPr algn="l" indent="0" marL="0">
+            <a:pPr marL="0" indent="0" algn="l">
               <a:lnSpc>
                 <a:spcPts val="1600"/>
               </a:lnSpc>
@@ -9829,7 +9858,7 @@
           </a:bodyPr>
           <a:lstStyle/>
           <a:p>
-            <a:pPr algn="l" indent="0" marL="0">
+            <a:pPr marL="0" indent="0" algn="l">
               <a:lnSpc>
                 <a:spcPts val="1500"/>
               </a:lnSpc>
@@ -9870,7 +9899,7 @@
           </a:bodyPr>
           <a:lstStyle/>
           <a:p>
-            <a:pPr algn="l" indent="0" marL="0">
+            <a:pPr marL="0" indent="0" algn="l">
               <a:lnSpc>
                 <a:spcPts val="1600"/>
               </a:lnSpc>
@@ -9911,7 +9940,7 @@
           </a:bodyPr>
           <a:lstStyle/>
           <a:p>
-            <a:pPr algn="l" indent="0" marL="0">
+            <a:pPr marL="0" indent="0" algn="l">
               <a:lnSpc>
                 <a:spcPts val="1500"/>
               </a:lnSpc>
@@ -9952,7 +9981,7 @@
           </a:bodyPr>
           <a:lstStyle/>
           <a:p>
-            <a:pPr algn="l" indent="0" marL="0">
+            <a:pPr marL="0" indent="0" algn="l">
               <a:lnSpc>
                 <a:spcPts val="1600"/>
               </a:lnSpc>
@@ -9993,7 +10022,7 @@
           </a:bodyPr>
           <a:lstStyle/>
           <a:p>
-            <a:pPr algn="l" indent="0" marL="0">
+            <a:pPr marL="0" indent="0" algn="l">
               <a:lnSpc>
                 <a:spcPts val="1500"/>
               </a:lnSpc>
@@ -10035,17 +10064,24 @@
             <a:prstDash val="solid"/>
           </a:ln>
         </p:spPr>
+        <p:txBody>
+          <a:bodyPr/>
+          <a:lstStyle/>
+          <a:p>
+            <a:endParaRPr lang="ru-KZ"/>
+          </a:p>
+        </p:txBody>
       </p:sp>
       <p:pic>
         <p:nvPicPr>
-          <p:cNvPr id="14" name="Image 1" descr="preencoded.png">    </p:cNvPr>
+          <p:cNvPr id="14" name="Image 1" descr="preencoded.png"/>
           <p:cNvPicPr>
             <a:picLocks noChangeAspect="1"/>
           </p:cNvPicPr>
           <p:nvPr/>
         </p:nvPicPr>
         <p:blipFill>
-          <a:blip r:embed="rId2"/>
+          <a:blip r:embed="rId4"/>
           <a:stretch>
             <a:fillRect/>
           </a:stretch>
@@ -10087,14 +10123,14 @@
       </p:grpSpPr>
       <p:pic>
         <p:nvPicPr>
-          <p:cNvPr id="2" name="Image 0" descr="preencoded.png">    </p:cNvPr>
+          <p:cNvPr id="2" name="Image 0" descr="preencoded.png"/>
           <p:cNvPicPr>
             <a:picLocks noChangeAspect="1"/>
           </p:cNvPicPr>
           <p:nvPr/>
         </p:nvPicPr>
         <p:blipFill>
-          <a:blip r:embed="rId1"/>
+          <a:blip r:embed="rId3"/>
           <a:stretch>
             <a:fillRect/>
           </a:stretch>
@@ -10130,6 +10166,13 @@
           </a:solidFill>
           <a:ln/>
         </p:spPr>
+        <p:txBody>
+          <a:bodyPr/>
+          <a:lstStyle/>
+          <a:p>
+            <a:endParaRPr lang="ru-KZ"/>
+          </a:p>
+        </p:txBody>
       </p:sp>
       <p:sp>
         <p:nvSpPr>
@@ -10150,6 +10193,13 @@
           </a:solidFill>
           <a:ln/>
         </p:spPr>
+        <p:txBody>
+          <a:bodyPr/>
+          <a:lstStyle/>
+          <a:p>
+            <a:endParaRPr lang="ru-KZ"/>
+          </a:p>
+        </p:txBody>
       </p:sp>
       <p:sp>
         <p:nvSpPr>
@@ -10174,14 +10224,14 @@
           </a:bodyPr>
           <a:lstStyle/>
           <a:p>
-            <a:pPr algn="l" indent="0" marL="0">
+            <a:pPr marL="0" indent="0" algn="l">
               <a:lnSpc>
                 <a:spcPts val="2800"/>
               </a:lnSpc>
               <a:buNone/>
             </a:pPr>
             <a:r>
-              <a:rPr lang="en-US" sz="2121" b="1" spc="-1" kern="0" dirty="0">
+              <a:rPr lang="en-US" sz="2121" b="1" kern="0" spc="-1" dirty="0">
                 <a:solidFill>
                   <a:srgbClr val="1A1A1A"/>
                 </a:solidFill>
@@ -10215,7 +10265,7 @@
           </a:bodyPr>
           <a:lstStyle/>
           <a:p>
-            <a:pPr algn="l" indent="0" marL="0">
+            <a:pPr marL="0" indent="0" algn="l">
               <a:lnSpc>
                 <a:spcPts val="1600"/>
               </a:lnSpc>
@@ -10256,7 +10306,7 @@
           </a:bodyPr>
           <a:lstStyle/>
           <a:p>
-            <a:pPr algn="l" indent="0" marL="0">
+            <a:pPr marL="0" indent="0" algn="l">
               <a:lnSpc>
                 <a:spcPts val="2200"/>
               </a:lnSpc>
@@ -10270,75 +10320,13 @@
               </a:rPr>
               <a:t>Retrieval-Augmented Generation (RAG)</a:t>
             </a:r>
-            <a:pPr algn="l" indent="0" marL="0">
-              <a:lnSpc>
-                <a:spcPts val="2200"/>
-              </a:lnSpc>
-              <a:buNone/>
-            </a:pPr>
             <a:r>
               <a:rPr lang="en-US" sz="1486" dirty="0">
                 <a:solidFill>
                   <a:srgbClr val="333333"/>
                 </a:solidFill>
               </a:rPr>
-              <a:t> — это </a:t>
-            </a:r>
-            <a:pPr algn="l" indent="0" marL="0">
-              <a:lnSpc>
-                <a:spcPts val="2200"/>
-              </a:lnSpc>
-              <a:buNone/>
-            </a:pPr>
-            <a:r>
-              <a:rPr lang="en-US" sz="1486" dirty="0">
-                <a:solidFill>
-                  <a:srgbClr val="333333"/>
-                </a:solidFill>
-              </a:rPr>
-              <a:t>архитектурный паттерн, который оптимизирует </a:t>
-            </a:r>
-            <a:pPr algn="l" indent="0" marL="0">
-              <a:lnSpc>
-                <a:spcPts val="2200"/>
-              </a:lnSpc>
-              <a:buNone/>
-            </a:pPr>
-            <a:r>
-              <a:rPr lang="en-US" sz="1486" dirty="0">
-                <a:solidFill>
-                  <a:srgbClr val="333333"/>
-                </a:solidFill>
-              </a:rPr>
-              <a:t>вывод LLM, позволяя ей ссылаться на </a:t>
-            </a:r>
-            <a:pPr algn="l" indent="0" marL="0">
-              <a:lnSpc>
-                <a:spcPts val="2200"/>
-              </a:lnSpc>
-              <a:buNone/>
-            </a:pPr>
-            <a:r>
-              <a:rPr lang="en-US" sz="1486" dirty="0">
-                <a:solidFill>
-                  <a:srgbClr val="333333"/>
-                </a:solidFill>
-              </a:rPr>
-              <a:t>авторитетную базу знаний за пределами её </a:t>
-            </a:r>
-            <a:pPr algn="l" indent="0" marL="0">
-              <a:lnSpc>
-                <a:spcPts val="2200"/>
-              </a:lnSpc>
-              <a:buNone/>
-            </a:pPr>
-            <a:r>
-              <a:rPr lang="en-US" sz="1486" dirty="0">
-                <a:solidFill>
-                  <a:srgbClr val="333333"/>
-                </a:solidFill>
-              </a:rPr>
-              <a:t>обучающих данных.</a:t>
+              <a:t> — это архитектурный паттерн, который оптимизирует вывод LLM, позволяя ей ссылаться на авторитетную базу знаний за пределами её обучающих данных.</a:t>
             </a:r>
             <a:endParaRPr lang="en-US" sz="1397" dirty="0"/>
           </a:p>
@@ -10363,6 +10351,13 @@
           </a:solidFill>
           <a:ln/>
         </p:spPr>
+        <p:txBody>
+          <a:bodyPr/>
+          <a:lstStyle/>
+          <a:p>
+            <a:endParaRPr lang="ru-KZ"/>
+          </a:p>
+        </p:txBody>
       </p:sp>
       <p:sp>
         <p:nvSpPr>
@@ -10387,7 +10382,7 @@
           </a:bodyPr>
           <a:lstStyle/>
           <a:p>
-            <a:pPr algn="l" indent="0" marL="0">
+            <a:pPr marL="0" indent="0" algn="l">
               <a:lnSpc>
                 <a:spcPts val="1200"/>
               </a:lnSpc>
@@ -10428,7 +10423,7 @@
           </a:bodyPr>
           <a:lstStyle/>
           <a:p>
-            <a:pPr algn="l" indent="0" marL="0">
+            <a:pPr marL="0" indent="0" algn="l">
               <a:lnSpc>
                 <a:spcPts val="1300"/>
               </a:lnSpc>
@@ -10470,17 +10465,24 @@
             <a:prstDash val="solid"/>
           </a:ln>
         </p:spPr>
+        <p:txBody>
+          <a:bodyPr/>
+          <a:lstStyle/>
+          <a:p>
+            <a:endParaRPr lang="ru-KZ"/>
+          </a:p>
+        </p:txBody>
       </p:sp>
       <p:pic>
         <p:nvPicPr>
-          <p:cNvPr id="12" name="Image 1" descr="preencoded.png">    </p:cNvPr>
+          <p:cNvPr id="12" name="Image 1" descr="preencoded.png"/>
           <p:cNvPicPr>
             <a:picLocks noChangeAspect="1"/>
           </p:cNvPicPr>
           <p:nvPr/>
         </p:nvPicPr>
         <p:blipFill>
-          <a:blip r:embed="rId2"/>
+          <a:blip r:embed="rId4"/>
           <a:stretch>
             <a:fillRect/>
           </a:stretch>
@@ -10522,14 +10524,14 @@
       </p:grpSpPr>
       <p:pic>
         <p:nvPicPr>
-          <p:cNvPr id="2" name="Image 0" descr="preencoded.png">    </p:cNvPr>
+          <p:cNvPr id="2" name="Image 0" descr="preencoded.png"/>
           <p:cNvPicPr>
             <a:picLocks noChangeAspect="1"/>
           </p:cNvPicPr>
           <p:nvPr/>
         </p:nvPicPr>
         <p:blipFill>
-          <a:blip r:embed="rId1"/>
+          <a:blip r:embed="rId3"/>
           <a:stretch>
             <a:fillRect/>
           </a:stretch>
@@ -10565,6 +10567,13 @@
           </a:solidFill>
           <a:ln/>
         </p:spPr>
+        <p:txBody>
+          <a:bodyPr/>
+          <a:lstStyle/>
+          <a:p>
+            <a:endParaRPr lang="ru-KZ"/>
+          </a:p>
+        </p:txBody>
       </p:sp>
       <p:sp>
         <p:nvSpPr>
@@ -10585,6 +10594,13 @@
           </a:solidFill>
           <a:ln/>
         </p:spPr>
+        <p:txBody>
+          <a:bodyPr/>
+          <a:lstStyle/>
+          <a:p>
+            <a:endParaRPr lang="ru-KZ"/>
+          </a:p>
+        </p:txBody>
       </p:sp>
       <p:sp>
         <p:nvSpPr>
@@ -10609,14 +10625,14 @@
           </a:bodyPr>
           <a:lstStyle/>
           <a:p>
-            <a:pPr algn="l" indent="0" marL="0">
+            <a:pPr marL="0" indent="0" algn="l">
               <a:lnSpc>
                 <a:spcPts val="2800"/>
               </a:lnSpc>
               <a:buNone/>
             </a:pPr>
             <a:r>
-              <a:rPr lang="en-US" sz="2121" b="1" spc="-1" kern="0" dirty="0">
+              <a:rPr lang="en-US" sz="2121" b="1" kern="0" spc="-1" dirty="0">
                 <a:solidFill>
                   <a:srgbClr val="1A1A1A"/>
                 </a:solidFill>
@@ -10650,7 +10666,7 @@
           </a:bodyPr>
           <a:lstStyle/>
           <a:p>
-            <a:pPr algn="l" indent="0" marL="0">
+            <a:pPr marL="0" indent="0" algn="l">
               <a:lnSpc>
                 <a:spcPts val="1600"/>
               </a:lnSpc>
@@ -10687,6 +10703,13 @@
           </a:solidFill>
           <a:ln/>
         </p:spPr>
+        <p:txBody>
+          <a:bodyPr/>
+          <a:lstStyle/>
+          <a:p>
+            <a:endParaRPr lang="ru-KZ"/>
+          </a:p>
+        </p:txBody>
       </p:sp>
       <p:sp>
         <p:nvSpPr>
@@ -10711,7 +10734,7 @@
           </a:bodyPr>
           <a:lstStyle/>
           <a:p>
-            <a:pPr algn="l" indent="0" marL="0">
+            <a:pPr marL="0" indent="0" algn="l">
               <a:lnSpc>
                 <a:spcPts val="1600"/>
               </a:lnSpc>
@@ -10752,7 +10775,7 @@
           </a:bodyPr>
           <a:lstStyle/>
           <a:p>
-            <a:pPr algn="l" indent="0" marL="0">
+            <a:pPr marL="0" indent="0" algn="l">
               <a:lnSpc>
                 <a:spcPts val="1500"/>
               </a:lnSpc>
@@ -10789,6 +10812,13 @@
           </a:solidFill>
           <a:ln/>
         </p:spPr>
+        <p:txBody>
+          <a:bodyPr/>
+          <a:lstStyle/>
+          <a:p>
+            <a:endParaRPr lang="ru-KZ"/>
+          </a:p>
+        </p:txBody>
       </p:sp>
       <p:sp>
         <p:nvSpPr>
@@ -10813,7 +10843,7 @@
           </a:bodyPr>
           <a:lstStyle/>
           <a:p>
-            <a:pPr algn="l" indent="0" marL="0">
+            <a:pPr marL="0" indent="0" algn="l">
               <a:lnSpc>
                 <a:spcPts val="1600"/>
               </a:lnSpc>
@@ -10854,7 +10884,7 @@
           </a:bodyPr>
           <a:lstStyle/>
           <a:p>
-            <a:pPr algn="l" indent="0" marL="0">
+            <a:pPr marL="0" indent="0" algn="l">
               <a:lnSpc>
                 <a:spcPts val="1500"/>
               </a:lnSpc>
@@ -10891,6 +10921,13 @@
           </a:solidFill>
           <a:ln/>
         </p:spPr>
+        <p:txBody>
+          <a:bodyPr/>
+          <a:lstStyle/>
+          <a:p>
+            <a:endParaRPr lang="ru-KZ"/>
+          </a:p>
+        </p:txBody>
       </p:sp>
       <p:sp>
         <p:nvSpPr>
@@ -10915,7 +10952,7 @@
           </a:bodyPr>
           <a:lstStyle/>
           <a:p>
-            <a:pPr algn="l" indent="0" marL="0">
+            <a:pPr marL="0" indent="0" algn="l">
               <a:lnSpc>
                 <a:spcPts val="1600"/>
               </a:lnSpc>
@@ -10956,7 +10993,7 @@
           </a:bodyPr>
           <a:lstStyle/>
           <a:p>
-            <a:pPr algn="l" indent="0" marL="0">
+            <a:pPr marL="0" indent="0" algn="l">
               <a:lnSpc>
                 <a:spcPts val="1500"/>
               </a:lnSpc>
@@ -10993,6 +11030,13 @@
           </a:solidFill>
           <a:ln/>
         </p:spPr>
+        <p:txBody>
+          <a:bodyPr/>
+          <a:lstStyle/>
+          <a:p>
+            <a:endParaRPr lang="ru-KZ"/>
+          </a:p>
+        </p:txBody>
       </p:sp>
       <p:sp>
         <p:nvSpPr>
@@ -11013,6 +11057,13 @@
           </a:solidFill>
           <a:ln/>
         </p:spPr>
+        <p:txBody>
+          <a:bodyPr/>
+          <a:lstStyle/>
+          <a:p>
+            <a:endParaRPr lang="ru-KZ"/>
+          </a:p>
+        </p:txBody>
       </p:sp>
       <p:sp>
         <p:nvSpPr>
@@ -11037,7 +11088,7 @@
           </a:bodyPr>
           <a:lstStyle/>
           <a:p>
-            <a:pPr algn="l" indent="0" marL="0">
+            <a:pPr marL="0" indent="0" algn="l">
               <a:lnSpc>
                 <a:spcPts val="1400"/>
               </a:lnSpc>
@@ -11079,17 +11130,24 @@
             <a:prstDash val="solid"/>
           </a:ln>
         </p:spPr>
+        <p:txBody>
+          <a:bodyPr/>
+          <a:lstStyle/>
+          <a:p>
+            <a:endParaRPr lang="ru-KZ"/>
+          </a:p>
+        </p:txBody>
       </p:sp>
       <p:pic>
         <p:nvPicPr>
-          <p:cNvPr id="20" name="Image 1" descr="preencoded.png">    </p:cNvPr>
+          <p:cNvPr id="20" name="Image 1" descr="preencoded.png"/>
           <p:cNvPicPr>
             <a:picLocks noChangeAspect="1"/>
           </p:cNvPicPr>
           <p:nvPr/>
         </p:nvPicPr>
         <p:blipFill>
-          <a:blip r:embed="rId2"/>
+          <a:blip r:embed="rId4"/>
           <a:stretch>
             <a:fillRect/>
           </a:stretch>
@@ -11131,14 +11189,14 @@
       </p:grpSpPr>
       <p:pic>
         <p:nvPicPr>
-          <p:cNvPr id="2" name="Image 0" descr="preencoded.png">    </p:cNvPr>
+          <p:cNvPr id="2" name="Image 0" descr="preencoded.png"/>
           <p:cNvPicPr>
             <a:picLocks noChangeAspect="1"/>
           </p:cNvPicPr>
           <p:nvPr/>
         </p:nvPicPr>
         <p:blipFill>
-          <a:blip r:embed="rId1"/>
+          <a:blip r:embed="rId3"/>
           <a:stretch>
             <a:fillRect/>
           </a:stretch>
@@ -11174,6 +11232,13 @@
           </a:solidFill>
           <a:ln/>
         </p:spPr>
+        <p:txBody>
+          <a:bodyPr/>
+          <a:lstStyle/>
+          <a:p>
+            <a:endParaRPr lang="ru-KZ"/>
+          </a:p>
+        </p:txBody>
       </p:sp>
       <p:sp>
         <p:nvSpPr>
@@ -11194,6 +11259,13 @@
           </a:solidFill>
           <a:ln/>
         </p:spPr>
+        <p:txBody>
+          <a:bodyPr/>
+          <a:lstStyle/>
+          <a:p>
+            <a:endParaRPr lang="ru-KZ"/>
+          </a:p>
+        </p:txBody>
       </p:sp>
       <p:sp>
         <p:nvSpPr>
@@ -11218,14 +11290,14 @@
           </a:bodyPr>
           <a:lstStyle/>
           <a:p>
-            <a:pPr algn="l" indent="0" marL="0">
+            <a:pPr marL="0" indent="0" algn="l">
               <a:lnSpc>
                 <a:spcPts val="2800"/>
               </a:lnSpc>
               <a:buNone/>
             </a:pPr>
             <a:r>
-              <a:rPr lang="en-US" sz="2121" b="1" spc="-1" kern="0" dirty="0">
+              <a:rPr lang="en-US" sz="2121" b="1" kern="0" spc="-1" dirty="0">
                 <a:solidFill>
                   <a:srgbClr val="1A1A1A"/>
                 </a:solidFill>
@@ -11259,7 +11331,7 @@
           </a:bodyPr>
           <a:lstStyle/>
           <a:p>
-            <a:pPr algn="l" indent="0" marL="0">
+            <a:pPr marL="0" indent="0" algn="l">
               <a:lnSpc>
                 <a:spcPts val="1600"/>
               </a:lnSpc>
@@ -11301,17 +11373,24 @@
             <a:prstDash val="solid"/>
           </a:ln>
         </p:spPr>
+        <p:txBody>
+          <a:bodyPr/>
+          <a:lstStyle/>
+          <a:p>
+            <a:endParaRPr lang="ru-KZ"/>
+          </a:p>
+        </p:txBody>
       </p:sp>
       <p:pic>
         <p:nvPicPr>
-          <p:cNvPr id="8" name="Image 1" descr="preencoded.png">    </p:cNvPr>
+          <p:cNvPr id="8" name="Image 1" descr="preencoded.png"/>
           <p:cNvPicPr>
             <a:picLocks noChangeAspect="1"/>
           </p:cNvPicPr>
           <p:nvPr/>
         </p:nvPicPr>
         <p:blipFill>
-          <a:blip r:embed="rId2"/>
+          <a:blip r:embed="rId4"/>
           <a:stretch>
             <a:fillRect/>
           </a:stretch>
@@ -11345,6 +11424,13 @@
           </a:solidFill>
           <a:ln/>
         </p:spPr>
+        <p:txBody>
+          <a:bodyPr/>
+          <a:lstStyle/>
+          <a:p>
+            <a:endParaRPr lang="ru-KZ"/>
+          </a:p>
+        </p:txBody>
       </p:sp>
       <p:sp>
         <p:nvSpPr>
@@ -11369,7 +11455,7 @@
           </a:bodyPr>
           <a:lstStyle/>
           <a:p>
-            <a:pPr algn="l" indent="0" marL="0">
+            <a:pPr marL="0" indent="0" algn="l">
               <a:lnSpc>
                 <a:spcPts val="900"/>
               </a:lnSpc>
@@ -11410,7 +11496,7 @@
           </a:bodyPr>
           <a:lstStyle/>
           <a:p>
-            <a:pPr algn="l" indent="0" marL="0">
+            <a:pPr marL="0" indent="0" algn="l">
               <a:lnSpc>
                 <a:spcPts val="1400"/>
               </a:lnSpc>
@@ -11451,7 +11537,7 @@
           </a:bodyPr>
           <a:lstStyle/>
           <a:p>
-            <a:pPr algn="l" indent="0" marL="0">
+            <a:pPr marL="0" indent="0" algn="l">
               <a:lnSpc>
                 <a:spcPts val="1100"/>
               </a:lnSpc>
@@ -11492,7 +11578,7 @@
           </a:bodyPr>
           <a:lstStyle/>
           <a:p>
-            <a:pPr algn="l" indent="0" marL="0">
+            <a:pPr marL="0" indent="0" algn="l">
               <a:lnSpc>
                 <a:spcPts val="900"/>
               </a:lnSpc>
@@ -11533,7 +11619,7 @@
           </a:bodyPr>
           <a:lstStyle/>
           <a:p>
-            <a:pPr algn="l" indent="0" marL="0">
+            <a:pPr marL="0" indent="0" algn="l">
               <a:lnSpc>
                 <a:spcPts val="1400"/>
               </a:lnSpc>
@@ -11574,7 +11660,7 @@
           </a:bodyPr>
           <a:lstStyle/>
           <a:p>
-            <a:pPr algn="l" indent="0" marL="0">
+            <a:pPr marL="0" indent="0" algn="l">
               <a:lnSpc>
                 <a:spcPts val="1100"/>
               </a:lnSpc>
@@ -11615,7 +11701,7 @@
           </a:bodyPr>
           <a:lstStyle/>
           <a:p>
-            <a:pPr algn="l" indent="0" marL="0">
+            <a:pPr marL="0" indent="0" algn="l">
               <a:lnSpc>
                 <a:spcPts val="900"/>
               </a:lnSpc>
@@ -11656,7 +11742,7 @@
           </a:bodyPr>
           <a:lstStyle/>
           <a:p>
-            <a:pPr algn="l" indent="0" marL="0">
+            <a:pPr marL="0" indent="0" algn="l">
               <a:lnSpc>
                 <a:spcPts val="1400"/>
               </a:lnSpc>
@@ -11697,7 +11783,7 @@
           </a:bodyPr>
           <a:lstStyle/>
           <a:p>
-            <a:pPr algn="l" indent="0" marL="0">
+            <a:pPr marL="0" indent="0" algn="l">
               <a:lnSpc>
                 <a:spcPts val="1100"/>
               </a:lnSpc>
@@ -11738,7 +11824,7 @@
           </a:bodyPr>
           <a:lstStyle/>
           <a:p>
-            <a:pPr algn="l" indent="0" marL="0">
+            <a:pPr marL="0" indent="0" algn="l">
               <a:lnSpc>
                 <a:spcPts val="900"/>
               </a:lnSpc>
@@ -11779,7 +11865,7 @@
           </a:bodyPr>
           <a:lstStyle/>
           <a:p>
-            <a:pPr algn="l" indent="0" marL="0">
+            <a:pPr marL="0" indent="0" algn="l">
               <a:lnSpc>
                 <a:spcPts val="1400"/>
               </a:lnSpc>
@@ -11820,7 +11906,7 @@
           </a:bodyPr>
           <a:lstStyle/>
           <a:p>
-            <a:pPr algn="l" indent="0" marL="0">
+            <a:pPr marL="0" indent="0" algn="l">
               <a:lnSpc>
                 <a:spcPts val="1100"/>
               </a:lnSpc>
@@ -11861,7 +11947,7 @@
           </a:bodyPr>
           <a:lstStyle/>
           <a:p>
-            <a:pPr algn="l" indent="0" marL="0">
+            <a:pPr marL="0" indent="0" algn="l">
               <a:lnSpc>
                 <a:spcPts val="900"/>
               </a:lnSpc>
@@ -11902,7 +11988,7 @@
           </a:bodyPr>
           <a:lstStyle/>
           <a:p>
-            <a:pPr algn="l" indent="0" marL="0">
+            <a:pPr marL="0" indent="0" algn="l">
               <a:lnSpc>
                 <a:spcPts val="1400"/>
               </a:lnSpc>
@@ -11943,7 +12029,7 @@
           </a:bodyPr>
           <a:lstStyle/>
           <a:p>
-            <a:pPr algn="l" indent="0" marL="0">
+            <a:pPr marL="0" indent="0" algn="l">
               <a:lnSpc>
                 <a:spcPts val="1100"/>
               </a:lnSpc>
@@ -11961,6 +12047,88 @@
           </a:p>
         </p:txBody>
       </p:sp>
+      <p:cxnSp>
+        <p:nvCxnSpPr>
+          <p:cNvPr id="26" name="Прямая со стрелкой 25">
+            <a:extLst>
+              <a:ext uri="{FF2B5EF4-FFF2-40B4-BE49-F238E27FC236}">
+                <a16:creationId xmlns:a16="http://schemas.microsoft.com/office/drawing/2014/main" id="{B0AE71B8-905B-4C2B-CFAD-3A10D5F3310E}"/>
+              </a:ext>
+            </a:extLst>
+          </p:cNvPr>
+          <p:cNvCxnSpPr>
+            <a:cxnSpLocks/>
+          </p:cNvCxnSpPr>
+          <p:nvPr/>
+        </p:nvCxnSpPr>
+        <p:spPr>
+          <a:xfrm flipV="1">
+            <a:off x="3996503" y="837605"/>
+            <a:ext cx="805696" cy="1080717"/>
+          </a:xfrm>
+          <a:prstGeom prst="straightConnector1">
+            <a:avLst/>
+          </a:prstGeom>
+          <a:ln>
+            <a:tailEnd type="triangle"/>
+          </a:ln>
+        </p:spPr>
+        <p:style>
+          <a:lnRef idx="1">
+            <a:schemeClr val="accent1"/>
+          </a:lnRef>
+          <a:fillRef idx="0">
+            <a:schemeClr val="accent1"/>
+          </a:fillRef>
+          <a:effectRef idx="0">
+            <a:schemeClr val="accent1"/>
+          </a:effectRef>
+          <a:fontRef idx="minor">
+            <a:schemeClr val="tx1"/>
+          </a:fontRef>
+        </p:style>
+      </p:cxnSp>
+      <p:cxnSp>
+        <p:nvCxnSpPr>
+          <p:cNvPr id="28" name="Прямая со стрелкой 27">
+            <a:extLst>
+              <a:ext uri="{FF2B5EF4-FFF2-40B4-BE49-F238E27FC236}">
+                <a16:creationId xmlns:a16="http://schemas.microsoft.com/office/drawing/2014/main" id="{1380D4F7-65AB-5936-0FB0-7A847FED10D0}"/>
+              </a:ext>
+            </a:extLst>
+          </p:cNvPr>
+          <p:cNvCxnSpPr>
+            <a:cxnSpLocks/>
+          </p:cNvCxnSpPr>
+          <p:nvPr/>
+        </p:nvCxnSpPr>
+        <p:spPr>
+          <a:xfrm>
+            <a:off x="5537555" y="748145"/>
+            <a:ext cx="2576946" cy="589522"/>
+          </a:xfrm>
+          <a:prstGeom prst="straightConnector1">
+            <a:avLst/>
+          </a:prstGeom>
+          <a:ln>
+            <a:tailEnd type="triangle"/>
+          </a:ln>
+        </p:spPr>
+        <p:style>
+          <a:lnRef idx="1">
+            <a:schemeClr val="accent1"/>
+          </a:lnRef>
+          <a:fillRef idx="0">
+            <a:schemeClr val="accent1"/>
+          </a:fillRef>
+          <a:effectRef idx="0">
+            <a:schemeClr val="accent1"/>
+          </a:effectRef>
+          <a:fontRef idx="minor">
+            <a:schemeClr val="tx1"/>
+          </a:fontRef>
+        </p:style>
+      </p:cxnSp>
     </p:spTree>
   </p:cSld>
   <p:clrMapOvr>
@@ -11988,14 +12156,14 @@
       </p:grpSpPr>
       <p:pic>
         <p:nvPicPr>
-          <p:cNvPr id="2" name="Image 0" descr="preencoded.png">    </p:cNvPr>
+          <p:cNvPr id="2" name="Image 0" descr="preencoded.png"/>
           <p:cNvPicPr>
             <a:picLocks noChangeAspect="1"/>
           </p:cNvPicPr>
           <p:nvPr/>
         </p:nvPicPr>
         <p:blipFill>
-          <a:blip r:embed="rId1"/>
+          <a:blip r:embed="rId3"/>
           <a:stretch>
             <a:fillRect/>
           </a:stretch>
@@ -12031,6 +12199,13 @@
           </a:solidFill>
           <a:ln/>
         </p:spPr>
+        <p:txBody>
+          <a:bodyPr/>
+          <a:lstStyle/>
+          <a:p>
+            <a:endParaRPr lang="ru-KZ"/>
+          </a:p>
+        </p:txBody>
       </p:sp>
       <p:sp>
         <p:nvSpPr>
@@ -12051,6 +12226,13 @@
           </a:solidFill>
           <a:ln/>
         </p:spPr>
+        <p:txBody>
+          <a:bodyPr/>
+          <a:lstStyle/>
+          <a:p>
+            <a:endParaRPr lang="ru-KZ"/>
+          </a:p>
+        </p:txBody>
       </p:sp>
       <p:sp>
         <p:nvSpPr>
@@ -12075,14 +12257,14 @@
           </a:bodyPr>
           <a:lstStyle/>
           <a:p>
-            <a:pPr algn="l" indent="0" marL="0">
+            <a:pPr marL="0" indent="0" algn="l">
               <a:lnSpc>
                 <a:spcPts val="2800"/>
               </a:lnSpc>
               <a:buNone/>
             </a:pPr>
             <a:r>
-              <a:rPr lang="en-US" sz="2121" b="1" spc="-1" kern="0" dirty="0">
+              <a:rPr lang="en-US" sz="2121" b="1" kern="0" spc="-1" dirty="0">
                 <a:solidFill>
                   <a:srgbClr val="1A1A1A"/>
                 </a:solidFill>
@@ -12116,7 +12298,7 @@
           </a:bodyPr>
           <a:lstStyle/>
           <a:p>
-            <a:pPr algn="l" indent="0" marL="0">
+            <a:pPr marL="0" indent="0" algn="l">
               <a:lnSpc>
                 <a:spcPts val="1600"/>
               </a:lnSpc>
@@ -12157,14 +12339,14 @@
           </a:bodyPr>
           <a:lstStyle/>
           <a:p>
-            <a:pPr algn="l" indent="0" marL="0">
+            <a:pPr marL="0" indent="0" algn="l">
               <a:lnSpc>
                 <a:spcPts val="1600"/>
               </a:lnSpc>
               <a:buNone/>
             </a:pPr>
             <a:r>
-              <a:rPr lang="en-US" sz="1193" b="1" spc="1" kern="0" dirty="0">
+              <a:rPr lang="en-US" sz="1193" b="1" kern="0" spc="1" dirty="0">
                 <a:solidFill>
                   <a:srgbClr val="FF4500"/>
                 </a:solidFill>
@@ -12198,7 +12380,7 @@
           </a:bodyPr>
           <a:lstStyle/>
           <a:p>
-            <a:pPr algn="l" indent="0" marL="0">
+            <a:pPr marL="0" indent="0" algn="l">
               <a:lnSpc>
                 <a:spcPts val="1900"/>
               </a:lnSpc>
@@ -12239,7 +12421,7 @@
           </a:bodyPr>
           <a:lstStyle/>
           <a:p>
-            <a:pPr algn="l" indent="0" marL="0">
+            <a:pPr marL="0" indent="0" algn="l">
               <a:lnSpc>
                 <a:spcPts val="1900"/>
               </a:lnSpc>
@@ -12280,7 +12462,7 @@
           </a:bodyPr>
           <a:lstStyle/>
           <a:p>
-            <a:pPr algn="l" indent="0" marL="0">
+            <a:pPr marL="0" indent="0" algn="l">
               <a:lnSpc>
                 <a:spcPts val="1900"/>
               </a:lnSpc>
@@ -12321,7 +12503,7 @@
           </a:bodyPr>
           <a:lstStyle/>
           <a:p>
-            <a:pPr algn="l" indent="0" marL="0">
+            <a:pPr marL="0" indent="0" algn="l">
               <a:lnSpc>
                 <a:spcPts val="1900"/>
               </a:lnSpc>
@@ -12362,7 +12544,7 @@
           </a:bodyPr>
           <a:lstStyle/>
           <a:p>
-            <a:pPr algn="l" indent="0" marL="0">
+            <a:pPr marL="0" indent="0" algn="l">
               <a:lnSpc>
                 <a:spcPts val="1900"/>
               </a:lnSpc>
@@ -12403,14 +12585,14 @@
           </a:bodyPr>
           <a:lstStyle/>
           <a:p>
-            <a:pPr algn="l" indent="0" marL="0">
+            <a:pPr marL="0" indent="0" algn="l">
               <a:lnSpc>
                 <a:spcPts val="1600"/>
               </a:lnSpc>
               <a:buNone/>
             </a:pPr>
             <a:r>
-              <a:rPr lang="en-US" sz="1193" b="1" spc="1" kern="0" dirty="0">
+              <a:rPr lang="en-US" sz="1193" b="1" kern="0" spc="1" dirty="0">
                 <a:solidFill>
                   <a:srgbClr val="FF4500"/>
                 </a:solidFill>
@@ -12444,7 +12626,7 @@
           </a:bodyPr>
           <a:lstStyle/>
           <a:p>
-            <a:pPr algn="l" indent="0" marL="0">
+            <a:pPr marL="0" indent="0" algn="l">
               <a:lnSpc>
                 <a:spcPts val="1700"/>
               </a:lnSpc>
@@ -12481,6 +12663,13 @@
           </a:solidFill>
           <a:ln/>
         </p:spPr>
+        <p:txBody>
+          <a:bodyPr/>
+          <a:lstStyle/>
+          <a:p>
+            <a:endParaRPr lang="ru-KZ"/>
+          </a:p>
+        </p:txBody>
       </p:sp>
       <p:sp>
         <p:nvSpPr>
@@ -12501,6 +12690,13 @@
           </a:solidFill>
           <a:ln/>
         </p:spPr>
+        <p:txBody>
+          <a:bodyPr/>
+          <a:lstStyle/>
+          <a:p>
+            <a:endParaRPr lang="ru-KZ"/>
+          </a:p>
+        </p:txBody>
       </p:sp>
       <p:sp>
         <p:nvSpPr>
@@ -12525,7 +12721,7 @@
           </a:bodyPr>
           <a:lstStyle/>
           <a:p>
-            <a:pPr algn="l" indent="0" marL="0">
+            <a:pPr marL="0" indent="0" algn="l">
               <a:lnSpc>
                 <a:spcPts val="1400"/>
               </a:lnSpc>
@@ -12566,7 +12762,7 @@
           </a:bodyPr>
           <a:lstStyle/>
           <a:p>
-            <a:pPr algn="l" indent="0" marL="0">
+            <a:pPr marL="0" indent="0" algn="l">
               <a:lnSpc>
                 <a:spcPts val="1500"/>
               </a:lnSpc>
@@ -12603,6 +12799,13 @@
           </a:solidFill>
           <a:ln/>
         </p:spPr>
+        <p:txBody>
+          <a:bodyPr/>
+          <a:lstStyle/>
+          <a:p>
+            <a:endParaRPr lang="ru-KZ"/>
+          </a:p>
+        </p:txBody>
       </p:sp>
       <p:sp>
         <p:nvSpPr>
@@ -12623,6 +12826,13 @@
           </a:solidFill>
           <a:ln/>
         </p:spPr>
+        <p:txBody>
+          <a:bodyPr/>
+          <a:lstStyle/>
+          <a:p>
+            <a:endParaRPr lang="ru-KZ"/>
+          </a:p>
+        </p:txBody>
       </p:sp>
       <p:sp>
         <p:nvSpPr>
@@ -12647,7 +12857,7 @@
           </a:bodyPr>
           <a:lstStyle/>
           <a:p>
-            <a:pPr algn="l" indent="0" marL="0">
+            <a:pPr marL="0" indent="0" algn="l">
               <a:lnSpc>
                 <a:spcPts val="1400"/>
               </a:lnSpc>
@@ -12688,7 +12898,7 @@
           </a:bodyPr>
           <a:lstStyle/>
           <a:p>
-            <a:pPr algn="l" indent="0" marL="0">
+            <a:pPr marL="0" indent="0" algn="l">
               <a:lnSpc>
                 <a:spcPts val="1500"/>
               </a:lnSpc>
@@ -12729,7 +12939,7 @@
           </a:bodyPr>
           <a:lstStyle/>
           <a:p>
-            <a:pPr algn="l" indent="0" marL="0">
+            <a:pPr marL="0" indent="0" algn="l">
               <a:lnSpc>
                 <a:spcPts val="10100"/>
               </a:lnSpc>
@@ -12774,344 +12984,7 @@
       </p:grpSpPr>
       <p:pic>
         <p:nvPicPr>
-          <p:cNvPr id="2" name="Image 0" descr="preencoded.png">    </p:cNvPr>
-          <p:cNvPicPr>
-            <a:picLocks noChangeAspect="1"/>
-          </p:cNvPicPr>
-          <p:nvPr/>
-        </p:nvPicPr>
-        <p:blipFill>
-          <a:blip r:embed="rId1"/>
-          <a:stretch>
-            <a:fillRect/>
-          </a:stretch>
-        </p:blipFill>
-        <p:spPr>
-          <a:xfrm>
-            <a:off x="0" y="0"/>
-            <a:ext cx="9144000" cy="5347404"/>
-          </a:xfrm>
-          <a:prstGeom prst="rect">
-            <a:avLst/>
-          </a:prstGeom>
-        </p:spPr>
-      </p:pic>
-      <p:sp>
-        <p:nvSpPr>
-          <p:cNvPr id="3" name="Shape 0"/>
-          <p:cNvSpPr/>
-          <p:nvPr/>
-        </p:nvSpPr>
-        <p:spPr>
-          <a:xfrm>
-            <a:off x="571500" y="428625"/>
-            <a:ext cx="8001000" cy="566142"/>
-          </a:xfrm>
-          <a:prstGeom prst="rect">
-            <a:avLst/>
-          </a:prstGeom>
-          <a:solidFill>
-            <a:srgbClr val="000000">
-              <a:alpha val="0"/>
-            </a:srgbClr>
-          </a:solidFill>
-          <a:ln/>
-        </p:spPr>
-      </p:sp>
-      <p:sp>
-        <p:nvSpPr>
-          <p:cNvPr id="4" name="Shape 1"/>
-          <p:cNvSpPr/>
-          <p:nvPr/>
-        </p:nvSpPr>
-        <p:spPr>
-          <a:xfrm>
-            <a:off x="571500" y="980480"/>
-            <a:ext cx="8001000" cy="14288"/>
-          </a:xfrm>
-          <a:prstGeom prst="rect">
-            <a:avLst/>
-          </a:prstGeom>
-          <a:solidFill>
-            <a:srgbClr val="1A1A1A"/>
-          </a:solidFill>
-          <a:ln/>
-        </p:spPr>
-      </p:sp>
-      <p:sp>
-        <p:nvSpPr>
-          <p:cNvPr id="5" name="Text 2"/>
-          <p:cNvSpPr/>
-          <p:nvPr/>
-        </p:nvSpPr>
-        <p:spPr>
-          <a:xfrm>
-            <a:off x="571500" y="428625"/>
-            <a:ext cx="2662554" cy="408980"/>
-          </a:xfrm>
-          <a:prstGeom prst="rect">
-            <a:avLst/>
-          </a:prstGeom>
-          <a:noFill/>
-          <a:ln/>
-        </p:spPr>
-        <p:txBody>
-          <a:bodyPr wrap="none" lIns="0" tIns="0" rIns="0" bIns="0" rtlCol="0" anchor="t">
-            <a:spAutoFit/>
-          </a:bodyPr>
-          <a:lstStyle/>
-          <a:p>
-            <a:pPr algn="l" indent="0" marL="0">
-              <a:lnSpc>
-                <a:spcPts val="2800"/>
-              </a:lnSpc>
-              <a:buNone/>
-            </a:pPr>
-            <a:r>
-              <a:rPr lang="en-US" sz="2121" b="1" spc="-1" kern="0" dirty="0">
-                <a:solidFill>
-                  <a:srgbClr val="1A1A1A"/>
-                </a:solidFill>
-              </a:rPr>
-              <a:t>Этап 2 - Чанкинг</a:t>
-            </a:r>
-            <a:endParaRPr lang="en-US" sz="2121" dirty="0"/>
-          </a:p>
-        </p:txBody>
-      </p:sp>
-      <p:sp>
-        <p:nvSpPr>
-          <p:cNvPr id="6" name="Text 3"/>
-          <p:cNvSpPr/>
-          <p:nvPr/>
-        </p:nvSpPr>
-        <p:spPr>
-          <a:xfrm>
-            <a:off x="8376354" y="603647"/>
-            <a:ext cx="196146" cy="233958"/>
-          </a:xfrm>
-          <a:prstGeom prst="rect">
-            <a:avLst/>
-          </a:prstGeom>
-          <a:noFill/>
-          <a:ln/>
-        </p:spPr>
-        <p:txBody>
-          <a:bodyPr wrap="none" lIns="0" tIns="0" rIns="0" bIns="0" rtlCol="0" anchor="t">
-            <a:spAutoFit/>
-          </a:bodyPr>
-          <a:lstStyle/>
-          <a:p>
-            <a:pPr algn="l" indent="0" marL="0">
-              <a:lnSpc>
-                <a:spcPts val="1600"/>
-              </a:lnSpc>
-              <a:buNone/>
-            </a:pPr>
-            <a:r>
-              <a:rPr lang="en-US" sz="1193" b="1" dirty="0">
-                <a:solidFill>
-                  <a:srgbClr val="FF4500"/>
-                </a:solidFill>
-              </a:rPr>
-              <a:t>07</a:t>
-            </a:r>
-            <a:endParaRPr lang="en-US" sz="1193" dirty="0"/>
-          </a:p>
-        </p:txBody>
-      </p:sp>
-      <p:sp>
-        <p:nvSpPr>
-          <p:cNvPr id="7" name="Text 4"/>
-          <p:cNvSpPr/>
-          <p:nvPr/>
-        </p:nvSpPr>
-        <p:spPr>
-          <a:xfrm>
-            <a:off x="571500" y="1266230"/>
-            <a:ext cx="7143750" cy="891490"/>
-          </a:xfrm>
-          <a:prstGeom prst="rect">
-            <a:avLst/>
-          </a:prstGeom>
-          <a:noFill/>
-          <a:ln/>
-        </p:spPr>
-        <p:txBody>
-          <a:bodyPr wrap="square" lIns="0" tIns="0" rIns="0" bIns="0" rtlCol="0" anchor="t">
-            <a:spAutoFit/>
-          </a:bodyPr>
-          <a:lstStyle/>
-          <a:p>
-            <a:pPr algn="l" indent="0" marL="0">
-              <a:lnSpc>
-                <a:spcPts val="2300"/>
-              </a:lnSpc>
-              <a:buNone/>
-            </a:pPr>
-            <a:r>
-              <a:rPr lang="en-US" sz="1602" b="1" dirty="0">
-                <a:solidFill>
-                  <a:srgbClr val="FF4500"/>
-                </a:solidFill>
-              </a:rPr>
-              <a:t>Чанкинг</a:t>
-            </a:r>
-            <a:pPr algn="l" indent="0" marL="0">
-              <a:lnSpc>
-                <a:spcPts val="2300"/>
-              </a:lnSpc>
-              <a:buNone/>
-            </a:pPr>
-            <a:r>
-              <a:rPr lang="en-US" sz="1704" dirty="0">
-                <a:solidFill>
-                  <a:srgbClr val="1A1A1A"/>
-                </a:solidFill>
-              </a:rPr>
-              <a:t> — это критический процесс разбиения больших </a:t>
-            </a:r>
-            <a:pPr algn="l" indent="0" marL="0">
-              <a:lnSpc>
-                <a:spcPts val="2300"/>
-              </a:lnSpc>
-              <a:buNone/>
-            </a:pPr>
-            <a:r>
-              <a:rPr lang="en-US" sz="1704" dirty="0">
-                <a:solidFill>
-                  <a:srgbClr val="1A1A1A"/>
-                </a:solidFill>
-              </a:rPr>
-              <a:t>документов на меньшие, семантически завершенные фрагменты </a:t>
-            </a:r>
-            <a:pPr algn="l" indent="0" marL="0">
-              <a:lnSpc>
-                <a:spcPts val="2300"/>
-              </a:lnSpc>
-              <a:buNone/>
-            </a:pPr>
-            <a:r>
-              <a:rPr lang="en-US" sz="1704" dirty="0">
-                <a:solidFill>
-                  <a:srgbClr val="1A1A1A"/>
-                </a:solidFill>
-              </a:rPr>
-              <a:t>перед их обработкой.</a:t>
-            </a:r>
-            <a:endParaRPr lang="en-US" sz="1602" dirty="0"/>
-          </a:p>
-        </p:txBody>
-      </p:sp>
-      <p:pic>
-        <p:nvPicPr>
-          <p:cNvPr id="8" name="Image 1" descr="preencoded.png">    </p:cNvPr>
-          <p:cNvPicPr>
-            <a:picLocks noChangeAspect="1"/>
-          </p:cNvPicPr>
-          <p:nvPr/>
-        </p:nvPicPr>
-        <p:blipFill>
-          <a:blip r:embed="rId2"/>
-          <a:stretch>
-            <a:fillRect/>
-          </a:stretch>
-        </p:blipFill>
-        <p:spPr>
-          <a:xfrm>
-            <a:off x="571500" y="2802443"/>
-            <a:ext cx="228600" cy="228600"/>
-          </a:xfrm>
-          <a:prstGeom prst="rect">
-            <a:avLst/>
-          </a:prstGeom>
-        </p:spPr>
-      </p:pic>
-      <p:sp>
-        <p:nvSpPr>
-          <p:cNvPr id="9" name="Text 5"/>
-          <p:cNvSpPr/>
-          <p:nvPr/>
-        </p:nvSpPr>
-        <p:spPr>
-          <a:xfrm>
-            <a:off x="571500" y="3213209"/>
-            <a:ext cx="2476481" cy="233958"/>
-          </a:xfrm>
-          <a:prstGeom prst="rect">
-            <a:avLst/>
-          </a:prstGeom>
-          <a:noFill/>
-          <a:ln/>
-        </p:spPr>
-        <p:txBody>
-          <a:bodyPr wrap="none" lIns="0" tIns="0" rIns="0" bIns="0" rtlCol="0" anchor="t">
-            <a:spAutoFit/>
-          </a:bodyPr>
-          <a:lstStyle/>
-          <a:p>
-            <a:pPr algn="l" indent="0" marL="0">
-              <a:lnSpc>
-                <a:spcPts val="1600"/>
-              </a:lnSpc>
-              <a:buNone/>
-            </a:pPr>
-            <a:r>
-              <a:rPr lang="en-US" sz="1193" b="1" dirty="0">
-                <a:solidFill>
-                  <a:srgbClr val="333333"/>
-                </a:solidFill>
-              </a:rPr>
-              <a:t>Ограничения контекста</a:t>
-            </a:r>
-            <a:endParaRPr lang="en-US" sz="1193" dirty="0"/>
-          </a:p>
-        </p:txBody>
-      </p:sp>
-      <p:sp>
-        <p:nvSpPr>
-          <p:cNvPr id="10" name="Text 6"/>
-          <p:cNvSpPr/>
-          <p:nvPr/>
-        </p:nvSpPr>
-        <p:spPr>
-          <a:xfrm>
-            <a:off x="571500" y="3554323"/>
-            <a:ext cx="2476481" cy="1157288"/>
-          </a:xfrm>
-          <a:prstGeom prst="rect">
-            <a:avLst/>
-          </a:prstGeom>
-          <a:noFill/>
-          <a:ln/>
-        </p:spPr>
-        <p:txBody>
-          <a:bodyPr wrap="square" lIns="0" tIns="0" rIns="0" bIns="0" rtlCol="0" anchor="t">
-            <a:spAutoFit/>
-          </a:bodyPr>
-          <a:lstStyle/>
-          <a:p>
-            <a:pPr algn="l" indent="0" marL="0">
-              <a:lnSpc>
-                <a:spcPts val="1500"/>
-              </a:lnSpc>
-              <a:buNone/>
-            </a:pPr>
-            <a:r>
-              <a:rPr lang="en-US" sz="942" dirty="0">
-                <a:solidFill>
-                  <a:srgbClr val="555555"/>
-                </a:solidFill>
-              </a:rPr>
-              <a:t>LLM имеют лимит токенов (контекстное окно). Передача целых книг или длинных отчетов невозможна или слишком дорога. Чанкинг позволяет подавать только релевантные части.</a:t>
-            </a:r>
-            <a:endParaRPr lang="en-US" sz="942" dirty="0"/>
-          </a:p>
-        </p:txBody>
-      </p:sp>
-      <p:pic>
-        <p:nvPicPr>
-          <p:cNvPr id="11" name="Image 2" descr="preencoded.png">    </p:cNvPr>
+          <p:cNvPr id="2" name="Image 0" descr="preencoded.png"/>
           <p:cNvPicPr>
             <a:picLocks noChangeAspect="1"/>
           </p:cNvPicPr>
@@ -13125,8 +12998,8 @@
         </p:blipFill>
         <p:spPr>
           <a:xfrm>
-            <a:off x="3333731" y="2802443"/>
-            <a:ext cx="228600" cy="228600"/>
+            <a:off x="0" y="0"/>
+            <a:ext cx="9144000" cy="5347404"/>
           </a:xfrm>
           <a:prstGeom prst="rect">
             <a:avLst/>
@@ -13135,14 +13008,70 @@
       </p:pic>
       <p:sp>
         <p:nvSpPr>
-          <p:cNvPr id="12" name="Text 7"/>
-          <p:cNvSpPr/>
-          <p:nvPr/>
-        </p:nvSpPr>
-        <p:spPr>
-          <a:xfrm>
-            <a:off x="3333731" y="3213209"/>
-            <a:ext cx="2476509" cy="233958"/>
+          <p:cNvPr id="3" name="Shape 0"/>
+          <p:cNvSpPr/>
+          <p:nvPr/>
+        </p:nvSpPr>
+        <p:spPr>
+          <a:xfrm>
+            <a:off x="571500" y="428625"/>
+            <a:ext cx="8001000" cy="566142"/>
+          </a:xfrm>
+          <a:prstGeom prst="rect">
+            <a:avLst/>
+          </a:prstGeom>
+          <a:solidFill>
+            <a:srgbClr val="000000">
+              <a:alpha val="0"/>
+            </a:srgbClr>
+          </a:solidFill>
+          <a:ln/>
+        </p:spPr>
+        <p:txBody>
+          <a:bodyPr/>
+          <a:lstStyle/>
+          <a:p>
+            <a:endParaRPr lang="ru-KZ"/>
+          </a:p>
+        </p:txBody>
+      </p:sp>
+      <p:sp>
+        <p:nvSpPr>
+          <p:cNvPr id="4" name="Shape 1"/>
+          <p:cNvSpPr/>
+          <p:nvPr/>
+        </p:nvSpPr>
+        <p:spPr>
+          <a:xfrm>
+            <a:off x="571500" y="980480"/>
+            <a:ext cx="8001000" cy="14288"/>
+          </a:xfrm>
+          <a:prstGeom prst="rect">
+            <a:avLst/>
+          </a:prstGeom>
+          <a:solidFill>
+            <a:srgbClr val="1A1A1A"/>
+          </a:solidFill>
+          <a:ln/>
+        </p:spPr>
+        <p:txBody>
+          <a:bodyPr/>
+          <a:lstStyle/>
+          <a:p>
+            <a:endParaRPr lang="ru-KZ"/>
+          </a:p>
+        </p:txBody>
+      </p:sp>
+      <p:sp>
+        <p:nvSpPr>
+          <p:cNvPr id="5" name="Text 2"/>
+          <p:cNvSpPr/>
+          <p:nvPr/>
+        </p:nvSpPr>
+        <p:spPr>
+          <a:xfrm>
+            <a:off x="571500" y="428625"/>
+            <a:ext cx="2662554" cy="408980"/>
           </a:xfrm>
           <a:prstGeom prst="rect">
             <a:avLst/>
@@ -13156,7 +13085,48 @@
           </a:bodyPr>
           <a:lstStyle/>
           <a:p>
-            <a:pPr algn="l" indent="0" marL="0">
+            <a:pPr marL="0" indent="0" algn="l">
+              <a:lnSpc>
+                <a:spcPts val="2800"/>
+              </a:lnSpc>
+              <a:buNone/>
+            </a:pPr>
+            <a:r>
+              <a:rPr lang="en-US" sz="2121" b="1" kern="0" spc="-1" dirty="0">
+                <a:solidFill>
+                  <a:srgbClr val="1A1A1A"/>
+                </a:solidFill>
+              </a:rPr>
+              <a:t>Этап 2 - Чанкинг</a:t>
+            </a:r>
+            <a:endParaRPr lang="en-US" sz="2121" dirty="0"/>
+          </a:p>
+        </p:txBody>
+      </p:sp>
+      <p:sp>
+        <p:nvSpPr>
+          <p:cNvPr id="6" name="Text 3"/>
+          <p:cNvSpPr/>
+          <p:nvPr/>
+        </p:nvSpPr>
+        <p:spPr>
+          <a:xfrm>
+            <a:off x="8376354" y="603647"/>
+            <a:ext cx="196146" cy="233958"/>
+          </a:xfrm>
+          <a:prstGeom prst="rect">
+            <a:avLst/>
+          </a:prstGeom>
+          <a:noFill/>
+          <a:ln/>
+        </p:spPr>
+        <p:txBody>
+          <a:bodyPr wrap="none" lIns="0" tIns="0" rIns="0" bIns="0" rtlCol="0" anchor="t">
+            <a:spAutoFit/>
+          </a:bodyPr>
+          <a:lstStyle/>
+          <a:p>
+            <a:pPr marL="0" indent="0" algn="l">
               <a:lnSpc>
                 <a:spcPts val="1600"/>
               </a:lnSpc>
@@ -13165,10 +13135,10 @@
             <a:r>
               <a:rPr lang="en-US" sz="1193" b="1" dirty="0">
                 <a:solidFill>
-                  <a:srgbClr val="333333"/>
-                </a:solidFill>
-              </a:rPr>
-              <a:t>Точность поиска</a:t>
+                  <a:srgbClr val="FF4500"/>
+                </a:solidFill>
+              </a:rPr>
+              <a:t>07</a:t>
             </a:r>
             <a:endParaRPr lang="en-US" sz="1193" dirty="0"/>
           </a:p>
@@ -13176,14 +13146,14 @@
       </p:sp>
       <p:sp>
         <p:nvSpPr>
-          <p:cNvPr id="13" name="Text 8"/>
-          <p:cNvSpPr/>
-          <p:nvPr/>
-        </p:nvSpPr>
-        <p:spPr>
-          <a:xfrm>
-            <a:off x="3333731" y="3554323"/>
-            <a:ext cx="2476509" cy="1350169"/>
+          <p:cNvPr id="7" name="Text 4"/>
+          <p:cNvSpPr/>
+          <p:nvPr/>
+        </p:nvSpPr>
+        <p:spPr>
+          <a:xfrm>
+            <a:off x="571500" y="1266230"/>
+            <a:ext cx="7143750" cy="891490"/>
           </a:xfrm>
           <a:prstGeom prst="rect">
             <a:avLst/>
@@ -13197,27 +13167,35 @@
           </a:bodyPr>
           <a:lstStyle/>
           <a:p>
-            <a:pPr algn="l" indent="0" marL="0">
-              <a:lnSpc>
-                <a:spcPts val="1500"/>
-              </a:lnSpc>
-              <a:buNone/>
-            </a:pPr>
-            <a:r>
-              <a:rPr lang="en-US" sz="942" dirty="0">
-                <a:solidFill>
-                  <a:srgbClr val="555555"/>
-                </a:solidFill>
-              </a:rPr>
-              <a:t>Большие фрагменты текста смешивают множество тем, создавая "размытые" векторные представления. Маленькие, сфокусированные чанки обеспечивают более точное извлечение по смыслу.</a:t>
-            </a:r>
-            <a:endParaRPr lang="en-US" sz="942" dirty="0"/>
+            <a:pPr marL="0" indent="0" algn="l">
+              <a:lnSpc>
+                <a:spcPts val="2300"/>
+              </a:lnSpc>
+              <a:buNone/>
+            </a:pPr>
+            <a:r>
+              <a:rPr lang="en-US" sz="1602" b="1" dirty="0">
+                <a:solidFill>
+                  <a:srgbClr val="FF4500"/>
+                </a:solidFill>
+              </a:rPr>
+              <a:t>Чанкинг</a:t>
+            </a:r>
+            <a:r>
+              <a:rPr lang="en-US" sz="1704" dirty="0">
+                <a:solidFill>
+                  <a:srgbClr val="1A1A1A"/>
+                </a:solidFill>
+              </a:rPr>
+              <a:t> — это критический процесс разбиения больших документов на меньшие, семантически завершенные фрагменты перед их обработкой.</a:t>
+            </a:r>
+            <a:endParaRPr lang="en-US" sz="1602" dirty="0"/>
           </a:p>
         </p:txBody>
       </p:sp>
       <p:pic>
         <p:nvPicPr>
-          <p:cNvPr id="14" name="Image 3" descr="preencoded.png">    </p:cNvPr>
+          <p:cNvPr id="8" name="Image 1" descr="preencoded.png"/>
           <p:cNvPicPr>
             <a:picLocks noChangeAspect="1"/>
           </p:cNvPicPr>
@@ -13231,6 +13209,218 @@
         </p:blipFill>
         <p:spPr>
           <a:xfrm>
+            <a:off x="571500" y="2802443"/>
+            <a:ext cx="228600" cy="228600"/>
+          </a:xfrm>
+          <a:prstGeom prst="rect">
+            <a:avLst/>
+          </a:prstGeom>
+        </p:spPr>
+      </p:pic>
+      <p:sp>
+        <p:nvSpPr>
+          <p:cNvPr id="9" name="Text 5"/>
+          <p:cNvSpPr/>
+          <p:nvPr/>
+        </p:nvSpPr>
+        <p:spPr>
+          <a:xfrm>
+            <a:off x="571500" y="3213209"/>
+            <a:ext cx="2476481" cy="233958"/>
+          </a:xfrm>
+          <a:prstGeom prst="rect">
+            <a:avLst/>
+          </a:prstGeom>
+          <a:noFill/>
+          <a:ln/>
+        </p:spPr>
+        <p:txBody>
+          <a:bodyPr wrap="none" lIns="0" tIns="0" rIns="0" bIns="0" rtlCol="0" anchor="t">
+            <a:spAutoFit/>
+          </a:bodyPr>
+          <a:lstStyle/>
+          <a:p>
+            <a:pPr marL="0" indent="0" algn="l">
+              <a:lnSpc>
+                <a:spcPts val="1600"/>
+              </a:lnSpc>
+              <a:buNone/>
+            </a:pPr>
+            <a:r>
+              <a:rPr lang="en-US" sz="1193" b="1" dirty="0">
+                <a:solidFill>
+                  <a:srgbClr val="333333"/>
+                </a:solidFill>
+              </a:rPr>
+              <a:t>Ограничения контекста</a:t>
+            </a:r>
+            <a:endParaRPr lang="en-US" sz="1193" dirty="0"/>
+          </a:p>
+        </p:txBody>
+      </p:sp>
+      <p:sp>
+        <p:nvSpPr>
+          <p:cNvPr id="10" name="Text 6"/>
+          <p:cNvSpPr/>
+          <p:nvPr/>
+        </p:nvSpPr>
+        <p:spPr>
+          <a:xfrm>
+            <a:off x="571500" y="3554323"/>
+            <a:ext cx="2476481" cy="1157288"/>
+          </a:xfrm>
+          <a:prstGeom prst="rect">
+            <a:avLst/>
+          </a:prstGeom>
+          <a:noFill/>
+          <a:ln/>
+        </p:spPr>
+        <p:txBody>
+          <a:bodyPr wrap="square" lIns="0" tIns="0" rIns="0" bIns="0" rtlCol="0" anchor="t">
+            <a:spAutoFit/>
+          </a:bodyPr>
+          <a:lstStyle/>
+          <a:p>
+            <a:pPr marL="0" indent="0" algn="l">
+              <a:lnSpc>
+                <a:spcPts val="1500"/>
+              </a:lnSpc>
+              <a:buNone/>
+            </a:pPr>
+            <a:r>
+              <a:rPr lang="en-US" sz="942" dirty="0">
+                <a:solidFill>
+                  <a:srgbClr val="555555"/>
+                </a:solidFill>
+              </a:rPr>
+              <a:t>LLM имеют лимит токенов (контекстное окно). Передача целых книг или длинных отчетов невозможна или слишком дорога. Чанкинг позволяет подавать только релевантные части.</a:t>
+            </a:r>
+            <a:endParaRPr lang="en-US" sz="942" dirty="0"/>
+          </a:p>
+        </p:txBody>
+      </p:sp>
+      <p:pic>
+        <p:nvPicPr>
+          <p:cNvPr id="11" name="Image 2" descr="preencoded.png"/>
+          <p:cNvPicPr>
+            <a:picLocks noChangeAspect="1"/>
+          </p:cNvPicPr>
+          <p:nvPr/>
+        </p:nvPicPr>
+        <p:blipFill>
+          <a:blip r:embed="rId5"/>
+          <a:stretch>
+            <a:fillRect/>
+          </a:stretch>
+        </p:blipFill>
+        <p:spPr>
+          <a:xfrm>
+            <a:off x="3333731" y="2802443"/>
+            <a:ext cx="228600" cy="228600"/>
+          </a:xfrm>
+          <a:prstGeom prst="rect">
+            <a:avLst/>
+          </a:prstGeom>
+        </p:spPr>
+      </p:pic>
+      <p:sp>
+        <p:nvSpPr>
+          <p:cNvPr id="12" name="Text 7"/>
+          <p:cNvSpPr/>
+          <p:nvPr/>
+        </p:nvSpPr>
+        <p:spPr>
+          <a:xfrm>
+            <a:off x="3333731" y="3213209"/>
+            <a:ext cx="2476509" cy="233958"/>
+          </a:xfrm>
+          <a:prstGeom prst="rect">
+            <a:avLst/>
+          </a:prstGeom>
+          <a:noFill/>
+          <a:ln/>
+        </p:spPr>
+        <p:txBody>
+          <a:bodyPr wrap="none" lIns="0" tIns="0" rIns="0" bIns="0" rtlCol="0" anchor="t">
+            <a:spAutoFit/>
+          </a:bodyPr>
+          <a:lstStyle/>
+          <a:p>
+            <a:pPr marL="0" indent="0" algn="l">
+              <a:lnSpc>
+                <a:spcPts val="1600"/>
+              </a:lnSpc>
+              <a:buNone/>
+            </a:pPr>
+            <a:r>
+              <a:rPr lang="en-US" sz="1193" b="1" dirty="0">
+                <a:solidFill>
+                  <a:srgbClr val="333333"/>
+                </a:solidFill>
+              </a:rPr>
+              <a:t>Точность поиска</a:t>
+            </a:r>
+            <a:endParaRPr lang="en-US" sz="1193" dirty="0"/>
+          </a:p>
+        </p:txBody>
+      </p:sp>
+      <p:sp>
+        <p:nvSpPr>
+          <p:cNvPr id="13" name="Text 8"/>
+          <p:cNvSpPr/>
+          <p:nvPr/>
+        </p:nvSpPr>
+        <p:spPr>
+          <a:xfrm>
+            <a:off x="3333731" y="3554323"/>
+            <a:ext cx="2476509" cy="1350169"/>
+          </a:xfrm>
+          <a:prstGeom prst="rect">
+            <a:avLst/>
+          </a:prstGeom>
+          <a:noFill/>
+          <a:ln/>
+        </p:spPr>
+        <p:txBody>
+          <a:bodyPr wrap="square" lIns="0" tIns="0" rIns="0" bIns="0" rtlCol="0" anchor="t">
+            <a:spAutoFit/>
+          </a:bodyPr>
+          <a:lstStyle/>
+          <a:p>
+            <a:pPr marL="0" indent="0" algn="l">
+              <a:lnSpc>
+                <a:spcPts val="1500"/>
+              </a:lnSpc>
+              <a:buNone/>
+            </a:pPr>
+            <a:r>
+              <a:rPr lang="en-US" sz="942" dirty="0">
+                <a:solidFill>
+                  <a:srgbClr val="555555"/>
+                </a:solidFill>
+              </a:rPr>
+              <a:t>Большие фрагменты текста смешивают множество тем, создавая "размытые" векторные представления. Маленькие, сфокусированные чанки обеспечивают более точное извлечение по смыслу.</a:t>
+            </a:r>
+            <a:endParaRPr lang="en-US" sz="942" dirty="0"/>
+          </a:p>
+        </p:txBody>
+      </p:sp>
+      <p:pic>
+        <p:nvPicPr>
+          <p:cNvPr id="14" name="Image 3" descr="preencoded.png"/>
+          <p:cNvPicPr>
+            <a:picLocks noChangeAspect="1"/>
+          </p:cNvPicPr>
+          <p:nvPr/>
+        </p:nvPicPr>
+        <p:blipFill>
+          <a:blip r:embed="rId6"/>
+          <a:stretch>
+            <a:fillRect/>
+          </a:stretch>
+        </p:blipFill>
+        <p:spPr>
+          <a:xfrm>
             <a:off x="6095991" y="2802443"/>
             <a:ext cx="285750" cy="228600"/>
           </a:xfrm>
@@ -13262,7 +13452,7 @@
           </a:bodyPr>
           <a:lstStyle/>
           <a:p>
-            <a:pPr algn="l" indent="0" marL="0">
+            <a:pPr marL="0" indent="0" algn="l">
               <a:lnSpc>
                 <a:spcPts val="1600"/>
               </a:lnSpc>
@@ -13303,7 +13493,7 @@
           </a:bodyPr>
           <a:lstStyle/>
           <a:p>
-            <a:pPr algn="l" indent="0" marL="0">
+            <a:pPr marL="0" indent="0" algn="l">
               <a:lnSpc>
                 <a:spcPts val="1500"/>
               </a:lnSpc>
@@ -13348,14 +13538,14 @@
       </p:grpSpPr>
       <p:pic>
         <p:nvPicPr>
-          <p:cNvPr id="2" name="Image 0" descr="preencoded.png">    </p:cNvPr>
+          <p:cNvPr id="2" name="Image 0" descr="preencoded.png"/>
           <p:cNvPicPr>
             <a:picLocks noChangeAspect="1"/>
           </p:cNvPicPr>
           <p:nvPr/>
         </p:nvPicPr>
         <p:blipFill>
-          <a:blip r:embed="rId1"/>
+          <a:blip r:embed="rId3"/>
           <a:stretch>
             <a:fillRect/>
           </a:stretch>
@@ -13391,6 +13581,13 @@
           </a:solidFill>
           <a:ln/>
         </p:spPr>
+        <p:txBody>
+          <a:bodyPr/>
+          <a:lstStyle/>
+          <a:p>
+            <a:endParaRPr lang="ru-KZ"/>
+          </a:p>
+        </p:txBody>
       </p:sp>
       <p:sp>
         <p:nvSpPr>
@@ -13411,6 +13608,13 @@
           </a:solidFill>
           <a:ln/>
         </p:spPr>
+        <p:txBody>
+          <a:bodyPr/>
+          <a:lstStyle/>
+          <a:p>
+            <a:endParaRPr lang="ru-KZ"/>
+          </a:p>
+        </p:txBody>
       </p:sp>
       <p:sp>
         <p:nvSpPr>
@@ -13435,14 +13639,14 @@
           </a:bodyPr>
           <a:lstStyle/>
           <a:p>
-            <a:pPr algn="l" indent="0" marL="0">
+            <a:pPr marL="0" indent="0" algn="l">
               <a:lnSpc>
                 <a:spcPts val="2800"/>
               </a:lnSpc>
               <a:buNone/>
             </a:pPr>
             <a:r>
-              <a:rPr lang="en-US" sz="2121" b="1" spc="-1" kern="0" dirty="0">
+              <a:rPr lang="en-US" sz="2121" b="1" kern="0" spc="-1" dirty="0">
                 <a:solidFill>
                   <a:srgbClr val="1A1A1A"/>
                 </a:solidFill>
@@ -13476,7 +13680,7 @@
           </a:bodyPr>
           <a:lstStyle/>
           <a:p>
-            <a:pPr algn="l" indent="0" marL="0">
+            <a:pPr marL="0" indent="0" algn="l">
               <a:lnSpc>
                 <a:spcPts val="1600"/>
               </a:lnSpc>
@@ -13515,6 +13719,13 @@
           </a:solidFill>
           <a:ln/>
         </p:spPr>
+        <p:txBody>
+          <a:bodyPr/>
+          <a:lstStyle/>
+          <a:p>
+            <a:endParaRPr lang="ru-KZ"/>
+          </a:p>
+        </p:txBody>
       </p:sp>
       <p:sp>
         <p:nvSpPr>
@@ -13535,6 +13746,13 @@
           </a:solidFill>
           <a:ln/>
         </p:spPr>
+        <p:txBody>
+          <a:bodyPr/>
+          <a:lstStyle/>
+          <a:p>
+            <a:endParaRPr lang="ru-KZ"/>
+          </a:p>
+        </p:txBody>
       </p:sp>
       <p:sp>
         <p:nvSpPr>
@@ -13555,6 +13773,13 @@
           </a:solidFill>
           <a:ln/>
         </p:spPr>
+        <p:txBody>
+          <a:bodyPr/>
+          <a:lstStyle/>
+          <a:p>
+            <a:endParaRPr lang="ru-KZ"/>
+          </a:p>
+        </p:txBody>
       </p:sp>
       <p:sp>
         <p:nvSpPr>
@@ -13579,7 +13804,7 @@
           </a:bodyPr>
           <a:lstStyle/>
           <a:p>
-            <a:pPr algn="l" indent="0" marL="0">
+            <a:pPr marL="0" indent="0" algn="l">
               <a:lnSpc>
                 <a:spcPts val="1600"/>
               </a:lnSpc>
@@ -13620,7 +13845,7 @@
           </a:bodyPr>
           <a:lstStyle/>
           <a:p>
-            <a:pPr algn="l" indent="0" marL="0">
+            <a:pPr marL="0" indent="0" algn="l">
               <a:lnSpc>
                 <a:spcPts val="1900"/>
               </a:lnSpc>
@@ -13661,7 +13886,7 @@
           </a:bodyPr>
           <a:lstStyle/>
           <a:p>
-            <a:pPr algn="l" indent="0" marL="0">
+            <a:pPr marL="0" indent="0" algn="l">
               <a:lnSpc>
                 <a:spcPts val="1500"/>
               </a:lnSpc>
@@ -13698,6 +13923,13 @@
           </a:solidFill>
           <a:ln/>
         </p:spPr>
+        <p:txBody>
+          <a:bodyPr/>
+          <a:lstStyle/>
+          <a:p>
+            <a:endParaRPr lang="ru-KZ"/>
+          </a:p>
+        </p:txBody>
       </p:sp>
       <p:sp>
         <p:nvSpPr>
@@ -13722,7 +13954,7 @@
           </a:bodyPr>
           <a:lstStyle/>
           <a:p>
-            <a:pPr algn="l" indent="0" marL="0">
+            <a:pPr marL="0" indent="0" algn="l">
               <a:lnSpc>
                 <a:spcPts val="800"/>
               </a:lnSpc>
@@ -13759,6 +13991,13 @@
           </a:solidFill>
           <a:ln/>
         </p:spPr>
+        <p:txBody>
+          <a:bodyPr/>
+          <a:lstStyle/>
+          <a:p>
+            <a:endParaRPr lang="ru-KZ"/>
+          </a:p>
+        </p:txBody>
       </p:sp>
       <p:sp>
         <p:nvSpPr>
@@ -13783,7 +14022,7 @@
           </a:bodyPr>
           <a:lstStyle/>
           <a:p>
-            <a:pPr algn="l" indent="0" marL="0">
+            <a:pPr marL="0" indent="0" algn="l">
               <a:lnSpc>
                 <a:spcPts val="800"/>
               </a:lnSpc>
@@ -13824,7 +14063,7 @@
           </a:bodyPr>
           <a:lstStyle/>
           <a:p>
-            <a:pPr algn="l" indent="0" marL="0">
+            <a:pPr marL="0" indent="0" algn="l">
               <a:lnSpc>
                 <a:spcPts val="900"/>
               </a:lnSpc>
@@ -13865,7 +14104,7 @@
           </a:bodyPr>
           <a:lstStyle/>
           <a:p>
-            <a:pPr algn="l" indent="0" marL="0">
+            <a:pPr marL="0" indent="0" algn="l">
               <a:lnSpc>
                 <a:spcPts val="1600"/>
               </a:lnSpc>
@@ -13906,7 +14145,7 @@
           </a:bodyPr>
           <a:lstStyle/>
           <a:p>
-            <a:pPr algn="l" indent="0" marL="0">
+            <a:pPr marL="0" indent="0" algn="l">
               <a:lnSpc>
                 <a:spcPts val="1900"/>
               </a:lnSpc>
@@ -13947,7 +14186,7 @@
           </a:bodyPr>
           <a:lstStyle/>
           <a:p>
-            <a:pPr algn="l" indent="0" marL="0">
+            <a:pPr marL="0" indent="0" algn="l">
               <a:lnSpc>
                 <a:spcPts val="1500"/>
               </a:lnSpc>
@@ -13984,6 +14223,13 @@
           </a:solidFill>
           <a:ln/>
         </p:spPr>
+        <p:txBody>
+          <a:bodyPr/>
+          <a:lstStyle/>
+          <a:p>
+            <a:endParaRPr lang="ru-KZ"/>
+          </a:p>
+        </p:txBody>
       </p:sp>
       <p:sp>
         <p:nvSpPr>
@@ -14008,7 +14254,7 @@
           </a:bodyPr>
           <a:lstStyle/>
           <a:p>
-            <a:pPr algn="l" indent="0" marL="0">
+            <a:pPr marL="0" indent="0" algn="l">
               <a:lnSpc>
                 <a:spcPts val="800"/>
               </a:lnSpc>
@@ -14045,6 +14291,13 @@
           </a:solidFill>
           <a:ln/>
         </p:spPr>
+        <p:txBody>
+          <a:bodyPr/>
+          <a:lstStyle/>
+          <a:p>
+            <a:endParaRPr lang="ru-KZ"/>
+          </a:p>
+        </p:txBody>
       </p:sp>
       <p:sp>
         <p:nvSpPr>
@@ -14069,7 +14322,7 @@
           </a:bodyPr>
           <a:lstStyle/>
           <a:p>
-            <a:pPr algn="l" indent="0" marL="0">
+            <a:pPr marL="0" indent="0" algn="l">
               <a:lnSpc>
                 <a:spcPts val="800"/>
               </a:lnSpc>
@@ -14110,7 +14363,7 @@
           </a:bodyPr>
           <a:lstStyle/>
           <a:p>
-            <a:pPr algn="l" indent="0" marL="0">
+            <a:pPr marL="0" indent="0" algn="l">
               <a:lnSpc>
                 <a:spcPts val="900"/>
               </a:lnSpc>
@@ -14151,7 +14404,7 @@
           </a:bodyPr>
           <a:lstStyle/>
           <a:p>
-            <a:pPr algn="l" indent="0" marL="0">
+            <a:pPr marL="0" indent="0" algn="l">
               <a:lnSpc>
                 <a:spcPts val="1600"/>
               </a:lnSpc>
@@ -14192,7 +14445,7 @@
           </a:bodyPr>
           <a:lstStyle/>
           <a:p>
-            <a:pPr algn="l" indent="0" marL="0">
+            <a:pPr marL="0" indent="0" algn="l">
               <a:lnSpc>
                 <a:spcPts val="1900"/>
               </a:lnSpc>
@@ -14233,7 +14486,7 @@
           </a:bodyPr>
           <a:lstStyle/>
           <a:p>
-            <a:pPr algn="l" indent="0" marL="0">
+            <a:pPr marL="0" indent="0" algn="l">
               <a:lnSpc>
                 <a:spcPts val="1500"/>
               </a:lnSpc>
@@ -14270,6 +14523,13 @@
           </a:solidFill>
           <a:ln/>
         </p:spPr>
+        <p:txBody>
+          <a:bodyPr/>
+          <a:lstStyle/>
+          <a:p>
+            <a:endParaRPr lang="ru-KZ"/>
+          </a:p>
+        </p:txBody>
       </p:sp>
       <p:sp>
         <p:nvSpPr>
@@ -14294,7 +14554,7 @@
           </a:bodyPr>
           <a:lstStyle/>
           <a:p>
-            <a:pPr algn="l" indent="0" marL="0">
+            <a:pPr marL="0" indent="0" algn="l">
               <a:lnSpc>
                 <a:spcPts val="800"/>
               </a:lnSpc>
@@ -14331,6 +14591,13 @@
           </a:solidFill>
           <a:ln/>
         </p:spPr>
+        <p:txBody>
+          <a:bodyPr/>
+          <a:lstStyle/>
+          <a:p>
+            <a:endParaRPr lang="ru-KZ"/>
+          </a:p>
+        </p:txBody>
       </p:sp>
       <p:sp>
         <p:nvSpPr>
@@ -14355,7 +14622,7 @@
           </a:bodyPr>
           <a:lstStyle/>
           <a:p>
-            <a:pPr algn="l" indent="0" marL="0">
+            <a:pPr marL="0" indent="0" algn="l">
               <a:lnSpc>
                 <a:spcPts val="800"/>
               </a:lnSpc>
@@ -14396,7 +14663,7 @@
           </a:bodyPr>
           <a:lstStyle/>
           <a:p>
-            <a:pPr algn="l" indent="0" marL="0">
+            <a:pPr marL="0" indent="0" algn="l">
               <a:lnSpc>
                 <a:spcPts val="900"/>
               </a:lnSpc>
@@ -14437,7 +14704,7 @@
           </a:bodyPr>
           <a:lstStyle/>
           <a:p>
-            <a:pPr algn="l" indent="0" marL="0">
+            <a:pPr marL="0" indent="0" algn="l">
               <a:lnSpc>
                 <a:spcPts val="1600"/>
               </a:lnSpc>
@@ -14478,7 +14745,7 @@
           </a:bodyPr>
           <a:lstStyle/>
           <a:p>
-            <a:pPr algn="l" indent="0" marL="0">
+            <a:pPr marL="0" indent="0" algn="l">
               <a:lnSpc>
                 <a:spcPts val="1900"/>
               </a:lnSpc>
@@ -14519,7 +14786,7 @@
           </a:bodyPr>
           <a:lstStyle/>
           <a:p>
-            <a:pPr algn="l" indent="0" marL="0">
+            <a:pPr marL="0" indent="0" algn="l">
               <a:lnSpc>
                 <a:spcPts val="1500"/>
               </a:lnSpc>
@@ -14556,6 +14823,13 @@
           </a:solidFill>
           <a:ln/>
         </p:spPr>
+        <p:txBody>
+          <a:bodyPr/>
+          <a:lstStyle/>
+          <a:p>
+            <a:endParaRPr lang="ru-KZ"/>
+          </a:p>
+        </p:txBody>
       </p:sp>
       <p:sp>
         <p:nvSpPr>
@@ -14580,7 +14854,7 @@
           </a:bodyPr>
           <a:lstStyle/>
           <a:p>
-            <a:pPr algn="l" indent="0" marL="0">
+            <a:pPr marL="0" indent="0" algn="l">
               <a:lnSpc>
                 <a:spcPts val="800"/>
               </a:lnSpc>
@@ -14617,6 +14891,13 @@
           </a:solidFill>
           <a:ln/>
         </p:spPr>
+        <p:txBody>
+          <a:bodyPr/>
+          <a:lstStyle/>
+          <a:p>
+            <a:endParaRPr lang="ru-KZ"/>
+          </a:p>
+        </p:txBody>
       </p:sp>
       <p:sp>
         <p:nvSpPr>
@@ -14641,7 +14922,7 @@
           </a:bodyPr>
           <a:lstStyle/>
           <a:p>
-            <a:pPr algn="l" indent="0" marL="0">
+            <a:pPr marL="0" indent="0" algn="l">
               <a:lnSpc>
                 <a:spcPts val="800"/>
               </a:lnSpc>
@@ -14682,7 +14963,7 @@
           </a:bodyPr>
           <a:lstStyle/>
           <a:p>
-            <a:pPr algn="l" indent="0" marL="0">
+            <a:pPr marL="0" indent="0" algn="l">
               <a:lnSpc>
                 <a:spcPts val="900"/>
               </a:lnSpc>
@@ -14727,14 +15008,14 @@
       </p:grpSpPr>
       <p:pic>
         <p:nvPicPr>
-          <p:cNvPr id="2" name="Image 0" descr="preencoded.png">    </p:cNvPr>
+          <p:cNvPr id="2" name="Image 0" descr="preencoded.png"/>
           <p:cNvPicPr>
             <a:picLocks noChangeAspect="1"/>
           </p:cNvPicPr>
           <p:nvPr/>
         </p:nvPicPr>
         <p:blipFill>
-          <a:blip r:embed="rId1"/>
+          <a:blip r:embed="rId3"/>
           <a:stretch>
             <a:fillRect/>
           </a:stretch>
@@ -14770,6 +15051,13 @@
           </a:solidFill>
           <a:ln/>
         </p:spPr>
+        <p:txBody>
+          <a:bodyPr/>
+          <a:lstStyle/>
+          <a:p>
+            <a:endParaRPr lang="ru-KZ"/>
+          </a:p>
+        </p:txBody>
       </p:sp>
       <p:sp>
         <p:nvSpPr>
@@ -14790,6 +15078,13 @@
           </a:solidFill>
           <a:ln/>
         </p:spPr>
+        <p:txBody>
+          <a:bodyPr/>
+          <a:lstStyle/>
+          <a:p>
+            <a:endParaRPr lang="ru-KZ"/>
+          </a:p>
+        </p:txBody>
       </p:sp>
       <p:sp>
         <p:nvSpPr>
@@ -14814,14 +15109,14 @@
           </a:bodyPr>
           <a:lstStyle/>
           <a:p>
-            <a:pPr algn="l" indent="0" marL="0">
+            <a:pPr marL="0" indent="0" algn="l">
               <a:lnSpc>
                 <a:spcPts val="2800"/>
               </a:lnSpc>
               <a:buNone/>
             </a:pPr>
             <a:r>
-              <a:rPr lang="en-US" sz="2121" b="1" spc="-1" kern="0" dirty="0">
+              <a:rPr lang="en-US" sz="2121" b="1" kern="0" spc="-1" dirty="0">
                 <a:solidFill>
                   <a:srgbClr val="1A1A1A"/>
                 </a:solidFill>
@@ -14855,7 +15150,7 @@
           </a:bodyPr>
           <a:lstStyle/>
           <a:p>
-            <a:pPr algn="l" indent="0" marL="0">
+            <a:pPr marL="0" indent="0" algn="l">
               <a:lnSpc>
                 <a:spcPts val="1600"/>
               </a:lnSpc>
@@ -14897,17 +15192,24 @@
             <a:prstDash val="solid"/>
           </a:ln>
         </p:spPr>
+        <p:txBody>
+          <a:bodyPr/>
+          <a:lstStyle/>
+          <a:p>
+            <a:endParaRPr lang="ru-KZ"/>
+          </a:p>
+        </p:txBody>
       </p:sp>
       <p:pic>
         <p:nvPicPr>
-          <p:cNvPr id="8" name="Image 1" descr="preencoded.png">    </p:cNvPr>
+          <p:cNvPr id="8" name="Image 1" descr="preencoded.png"/>
           <p:cNvPicPr>
             <a:picLocks noChangeAspect="1"/>
           </p:cNvPicPr>
           <p:nvPr/>
         </p:nvPicPr>
         <p:blipFill>
-          <a:blip r:embed="rId2"/>
+          <a:blip r:embed="rId4"/>
           <a:stretch>
             <a:fillRect/>
           </a:stretch>
@@ -14945,7 +15247,7 @@
           </a:bodyPr>
           <a:lstStyle/>
           <a:p>
-            <a:pPr algn="l" indent="0" marL="0">
+            <a:pPr marL="0" indent="0" algn="l">
               <a:lnSpc>
                 <a:spcPts val="1900"/>
               </a:lnSpc>
@@ -14986,7 +15288,7 @@
           </a:bodyPr>
           <a:lstStyle/>
           <a:p>
-            <a:pPr algn="l" indent="0" marL="0">
+            <a:pPr marL="0" indent="0" algn="l">
               <a:lnSpc>
                 <a:spcPts val="1700"/>
               </a:lnSpc>
@@ -15027,7 +15329,7 @@
           </a:bodyPr>
           <a:lstStyle/>
           <a:p>
-            <a:pPr algn="l" indent="0" marL="0">
+            <a:pPr marL="0" indent="0" algn="l">
               <a:lnSpc>
                 <a:spcPts val="1900"/>
               </a:lnSpc>
@@ -15068,7 +15370,7 @@
           </a:bodyPr>
           <a:lstStyle/>
           <a:p>
-            <a:pPr algn="l" indent="0" marL="0">
+            <a:pPr marL="0" indent="0" algn="l">
               <a:lnSpc>
                 <a:spcPts val="1700"/>
               </a:lnSpc>
@@ -15105,6 +15407,13 @@
           </a:solidFill>
           <a:ln/>
         </p:spPr>
+        <p:txBody>
+          <a:bodyPr/>
+          <a:lstStyle/>
+          <a:p>
+            <a:endParaRPr lang="ru-KZ"/>
+          </a:p>
+        </p:txBody>
       </p:sp>
       <p:sp>
         <p:nvSpPr>
@@ -15129,7 +15438,7 @@
           </a:bodyPr>
           <a:lstStyle/>
           <a:p>
-            <a:pPr algn="l" indent="0" marL="0">
+            <a:pPr marL="0" indent="0" algn="l">
               <a:lnSpc>
                 <a:spcPts val="1400"/>
               </a:lnSpc>
@@ -15143,12 +15452,6 @@
               </a:rPr>
               <a:t>Пример: Запрос </a:t>
             </a:r>
-            <a:pPr algn="l" indent="0" marL="0">
-              <a:lnSpc>
-                <a:spcPts val="1400"/>
-              </a:lnSpc>
-              <a:buNone/>
-            </a:pPr>
             <a:r>
               <a:rPr lang="en-US" sz="885" b="1" dirty="0">
                 <a:solidFill>
@@ -15157,89 +15460,29 @@
               </a:rPr>
               <a:t>"Как приготовить пасту"</a:t>
             </a:r>
-            <a:pPr algn="l" indent="0" marL="0">
-              <a:lnSpc>
-                <a:spcPts val="1400"/>
-              </a:lnSpc>
-              <a:buNone/>
-            </a:pPr>
             <a:r>
               <a:rPr lang="en-US" sz="942" dirty="0">
                 <a:solidFill>
                   <a:srgbClr val="FFFFFF"/>
                 </a:solidFill>
               </a:rPr>
-              <a:t> найдет </a:t>
-            </a:r>
-            <a:pPr algn="l" indent="0" marL="0">
-              <a:lnSpc>
-                <a:spcPts val="1400"/>
-              </a:lnSpc>
-              <a:buNone/>
-            </a:pPr>
+              <a:t> найдет документ о </a:t>
+            </a:r>
+            <a:r>
+              <a:rPr lang="en-US" sz="885" b="1" dirty="0">
+                <a:solidFill>
+                  <a:srgbClr val="FF4500"/>
+                </a:solidFill>
+              </a:rPr>
+              <a:t>"рецепте макарон с соусом"</a:t>
+            </a:r>
             <a:r>
               <a:rPr lang="en-US" sz="942" dirty="0">
                 <a:solidFill>
                   <a:srgbClr val="FFFFFF"/>
                 </a:solidFill>
               </a:rPr>
-              <a:t>документ о </a:t>
-            </a:r>
-            <a:pPr algn="l" indent="0" marL="0">
-              <a:lnSpc>
-                <a:spcPts val="1400"/>
-              </a:lnSpc>
-              <a:buNone/>
-            </a:pPr>
-            <a:r>
-              <a:rPr lang="en-US" sz="885" b="1" dirty="0">
-                <a:solidFill>
-                  <a:srgbClr val="FF4500"/>
-                </a:solidFill>
-              </a:rPr>
-              <a:t>"рецепте макарон с соусом"</a:t>
-            </a:r>
-            <a:pPr algn="l" indent="0" marL="0">
-              <a:lnSpc>
-                <a:spcPts val="1400"/>
-              </a:lnSpc>
-              <a:buNone/>
-            </a:pPr>
-            <a:r>
-              <a:rPr lang="en-US" sz="942" dirty="0">
-                <a:solidFill>
-                  <a:srgbClr val="FFFFFF"/>
-                </a:solidFill>
-              </a:rPr>
-              <a:t>, так как их </a:t>
-            </a:r>
-            <a:pPr algn="l" indent="0" marL="0">
-              <a:lnSpc>
-                <a:spcPts val="1400"/>
-              </a:lnSpc>
-              <a:buNone/>
-            </a:pPr>
-            <a:r>
-              <a:rPr lang="en-US" sz="942" dirty="0">
-                <a:solidFill>
-                  <a:srgbClr val="FFFFFF"/>
-                </a:solidFill>
-              </a:rPr>
-              <a:t>векторы находятся рядом в семантическом </a:t>
-            </a:r>
-            <a:pPr algn="l" indent="0" marL="0">
-              <a:lnSpc>
-                <a:spcPts val="1400"/>
-              </a:lnSpc>
-              <a:buNone/>
-            </a:pPr>
-            <a:r>
-              <a:rPr lang="en-US" sz="942" dirty="0">
-                <a:solidFill>
-                  <a:srgbClr val="FFFFFF"/>
-                </a:solidFill>
-              </a:rPr>
-              <a:t>пространстве.</a:t>
+              <a:t>, так как их векторы находятся рядом в семантическом пространстве.</a:t>
             </a:r>
             <a:endParaRPr lang="en-US" sz="942" dirty="0"/>
           </a:p>
@@ -15546,4 +15789,319 @@
     </a:ext>
   </a:extLst>
 </a:theme>
+</file>
+
+<file path=ppt/theme/theme2.xml><?xml version="1.0" encoding="utf-8"?>
+<a:theme xmlns:a="http://schemas.openxmlformats.org/drawingml/2006/main" name="Тема Office">
+  <a:themeElements>
+    <a:clrScheme name="Стандартная">
+      <a:dk1>
+        <a:sysClr val="windowText" lastClr="000000"/>
+      </a:dk1>
+      <a:lt1>
+        <a:sysClr val="window" lastClr="FFFFFF"/>
+      </a:lt1>
+      <a:dk2>
+        <a:srgbClr val="0E2841"/>
+      </a:dk2>
+      <a:lt2>
+        <a:srgbClr val="E8E8E8"/>
+      </a:lt2>
+      <a:accent1>
+        <a:srgbClr val="156082"/>
+      </a:accent1>
+      <a:accent2>
+        <a:srgbClr val="E97132"/>
+      </a:accent2>
+      <a:accent3>
+        <a:srgbClr val="196B24"/>
+      </a:accent3>
+      <a:accent4>
+        <a:srgbClr val="0F9ED5"/>
+      </a:accent4>
+      <a:accent5>
+        <a:srgbClr val="A02B93"/>
+      </a:accent5>
+      <a:accent6>
+        <a:srgbClr val="4EA72E"/>
+      </a:accent6>
+      <a:hlink>
+        <a:srgbClr val="467886"/>
+      </a:hlink>
+      <a:folHlink>
+        <a:srgbClr val="96607D"/>
+      </a:folHlink>
+    </a:clrScheme>
+    <a:fontScheme name="Стандартная">
+      <a:majorFont>
+        <a:latin typeface="Aptos Display" panose="02110004020202020204"/>
+        <a:ea typeface=""/>
+        <a:cs typeface=""/>
+        <a:font script="Jpan" typeface="游ゴシック Light"/>
+        <a:font script="Hang" typeface="맑은 고딕"/>
+        <a:font script="Hans" typeface="等线 Light"/>
+        <a:font script="Hant" typeface="新細明體"/>
+        <a:font script="Arab" typeface="Times New Roman"/>
+        <a:font script="Hebr" typeface="Times New Roman"/>
+        <a:font script="Thai" typeface="Angsana New"/>
+        <a:font script="Ethi" typeface="Nyala"/>
+        <a:font script="Beng" typeface="Vrinda"/>
+        <a:font script="Gujr" typeface="Shruti"/>
+        <a:font script="Khmr" typeface="MoolBoran"/>
+        <a:font script="Knda" typeface="Tunga"/>
+        <a:font script="Guru" typeface="Raavi"/>
+        <a:font script="Cans" typeface="Euphemia"/>
+        <a:font script="Cher" typeface="Plantagenet Cherokee"/>
+        <a:font script="Yiii" typeface="Microsoft Yi Baiti"/>
+        <a:font script="Tibt" typeface="Microsoft Himalaya"/>
+        <a:font script="Thaa" typeface="MV Boli"/>
+        <a:font script="Deva" typeface="Mangal"/>
+        <a:font script="Telu" typeface="Gautami"/>
+        <a:font script="Taml" typeface="Latha"/>
+        <a:font script="Syrc" typeface="Estrangelo Edessa"/>
+        <a:font script="Orya" typeface="Kalinga"/>
+        <a:font script="Mlym" typeface="Kartika"/>
+        <a:font script="Laoo" typeface="DokChampa"/>
+        <a:font script="Sinh" typeface="Iskoola Pota"/>
+        <a:font script="Mong" typeface="Mongolian Baiti"/>
+        <a:font script="Viet" typeface="Times New Roman"/>
+        <a:font script="Uigh" typeface="Microsoft Uighur"/>
+        <a:font script="Geor" typeface="Sylfaen"/>
+        <a:font script="Armn" typeface="Arial"/>
+        <a:font script="Bugi" typeface="Leelawadee UI"/>
+        <a:font script="Bopo" typeface="Microsoft JhengHei"/>
+        <a:font script="Java" typeface="Javanese Text"/>
+        <a:font script="Lisu" typeface="Segoe UI"/>
+        <a:font script="Mymr" typeface="Myanmar Text"/>
+        <a:font script="Nkoo" typeface="Ebrima"/>
+        <a:font script="Olck" typeface="Nirmala UI"/>
+        <a:font script="Osma" typeface="Ebrima"/>
+        <a:font script="Phag" typeface="Phagspa"/>
+        <a:font script="Syrn" typeface="Estrangelo Edessa"/>
+        <a:font script="Syrj" typeface="Estrangelo Edessa"/>
+        <a:font script="Syre" typeface="Estrangelo Edessa"/>
+        <a:font script="Sora" typeface="Nirmala UI"/>
+        <a:font script="Tale" typeface="Microsoft Tai Le"/>
+        <a:font script="Talu" typeface="Microsoft New Tai Lue"/>
+        <a:font script="Tfng" typeface="Ebrima"/>
+      </a:majorFont>
+      <a:minorFont>
+        <a:latin typeface="Aptos" panose="02110004020202020204"/>
+        <a:ea typeface=""/>
+        <a:cs typeface=""/>
+        <a:font script="Jpan" typeface="游ゴシック"/>
+        <a:font script="Hang" typeface="맑은 고딕"/>
+        <a:font script="Hans" typeface="等线"/>
+        <a:font script="Hant" typeface="新細明體"/>
+        <a:font script="Arab" typeface="Arial"/>
+        <a:font script="Hebr" typeface="Arial"/>
+        <a:font script="Thai" typeface="Cordia New"/>
+        <a:font script="Ethi" typeface="Nyala"/>
+        <a:font script="Beng" typeface="Vrinda"/>
+        <a:font script="Gujr" typeface="Shruti"/>
+        <a:font script="Khmr" typeface="DaunPenh"/>
+        <a:font script="Knda" typeface="Tunga"/>
+        <a:font script="Guru" typeface="Raavi"/>
+        <a:font script="Cans" typeface="Euphemia"/>
+        <a:font script="Cher" typeface="Plantagenet Cherokee"/>
+        <a:font script="Yiii" typeface="Microsoft Yi Baiti"/>
+        <a:font script="Tibt" typeface="Microsoft Himalaya"/>
+        <a:font script="Thaa" typeface="MV Boli"/>
+        <a:font script="Deva" typeface="Mangal"/>
+        <a:font script="Telu" typeface="Gautami"/>
+        <a:font script="Taml" typeface="Latha"/>
+        <a:font script="Syrc" typeface="Estrangelo Edessa"/>
+        <a:font script="Orya" typeface="Kalinga"/>
+        <a:font script="Mlym" typeface="Kartika"/>
+        <a:font script="Laoo" typeface="DokChampa"/>
+        <a:font script="Sinh" typeface="Iskoola Pota"/>
+        <a:font script="Mong" typeface="Mongolian Baiti"/>
+        <a:font script="Viet" typeface="Arial"/>
+        <a:font script="Uigh" typeface="Microsoft Uighur"/>
+        <a:font script="Geor" typeface="Sylfaen"/>
+        <a:font script="Armn" typeface="Arial"/>
+        <a:font script="Bugi" typeface="Leelawadee UI"/>
+        <a:font script="Bopo" typeface="Microsoft JhengHei"/>
+        <a:font script="Java" typeface="Javanese Text"/>
+        <a:font script="Lisu" typeface="Segoe UI"/>
+        <a:font script="Mymr" typeface="Myanmar Text"/>
+        <a:font script="Nkoo" typeface="Ebrima"/>
+        <a:font script="Olck" typeface="Nirmala UI"/>
+        <a:font script="Osma" typeface="Ebrima"/>
+        <a:font script="Phag" typeface="Phagspa"/>
+        <a:font script="Syrn" typeface="Estrangelo Edessa"/>
+        <a:font script="Syrj" typeface="Estrangelo Edessa"/>
+        <a:font script="Syre" typeface="Estrangelo Edessa"/>
+        <a:font script="Sora" typeface="Nirmala UI"/>
+        <a:font script="Tale" typeface="Microsoft Tai Le"/>
+        <a:font script="Talu" typeface="Microsoft New Tai Lue"/>
+        <a:font script="Tfng" typeface="Ebrima"/>
+      </a:minorFont>
+    </a:fontScheme>
+    <a:fmtScheme name="Стандартная">
+      <a:fillStyleLst>
+        <a:solidFill>
+          <a:schemeClr val="phClr"/>
+        </a:solidFill>
+        <a:gradFill rotWithShape="1">
+          <a:gsLst>
+            <a:gs pos="0">
+              <a:schemeClr val="phClr">
+                <a:lumMod val="110000"/>
+                <a:satMod val="105000"/>
+                <a:tint val="67000"/>
+              </a:schemeClr>
+            </a:gs>
+            <a:gs pos="50000">
+              <a:schemeClr val="phClr">
+                <a:lumMod val="105000"/>
+                <a:satMod val="103000"/>
+                <a:tint val="73000"/>
+              </a:schemeClr>
+            </a:gs>
+            <a:gs pos="100000">
+              <a:schemeClr val="phClr">
+                <a:lumMod val="105000"/>
+                <a:satMod val="109000"/>
+                <a:tint val="81000"/>
+              </a:schemeClr>
+            </a:gs>
+          </a:gsLst>
+          <a:lin ang="5400000" scaled="0"/>
+        </a:gradFill>
+        <a:gradFill rotWithShape="1">
+          <a:gsLst>
+            <a:gs pos="0">
+              <a:schemeClr val="phClr">
+                <a:satMod val="103000"/>
+                <a:lumMod val="102000"/>
+                <a:tint val="94000"/>
+              </a:schemeClr>
+            </a:gs>
+            <a:gs pos="50000">
+              <a:schemeClr val="phClr">
+                <a:satMod val="110000"/>
+                <a:lumMod val="100000"/>
+                <a:shade val="100000"/>
+              </a:schemeClr>
+            </a:gs>
+            <a:gs pos="100000">
+              <a:schemeClr val="phClr">
+                <a:lumMod val="99000"/>
+                <a:satMod val="120000"/>
+                <a:shade val="78000"/>
+              </a:schemeClr>
+            </a:gs>
+          </a:gsLst>
+          <a:lin ang="5400000" scaled="0"/>
+        </a:gradFill>
+      </a:fillStyleLst>
+      <a:lnStyleLst>
+        <a:ln w="12700" cap="flat" cmpd="sng" algn="ctr">
+          <a:solidFill>
+            <a:schemeClr val="phClr"/>
+          </a:solidFill>
+          <a:prstDash val="solid"/>
+          <a:miter lim="800000"/>
+        </a:ln>
+        <a:ln w="19050" cap="flat" cmpd="sng" algn="ctr">
+          <a:solidFill>
+            <a:schemeClr val="phClr"/>
+          </a:solidFill>
+          <a:prstDash val="solid"/>
+          <a:miter lim="800000"/>
+        </a:ln>
+        <a:ln w="25400" cap="flat" cmpd="sng" algn="ctr">
+          <a:solidFill>
+            <a:schemeClr val="phClr"/>
+          </a:solidFill>
+          <a:prstDash val="solid"/>
+          <a:miter lim="800000"/>
+        </a:ln>
+      </a:lnStyleLst>
+      <a:effectStyleLst>
+        <a:effectStyle>
+          <a:effectLst/>
+        </a:effectStyle>
+        <a:effectStyle>
+          <a:effectLst/>
+        </a:effectStyle>
+        <a:effectStyle>
+          <a:effectLst>
+            <a:outerShdw blurRad="57150" dist="19050" dir="5400000" algn="ctr" rotWithShape="0">
+              <a:srgbClr val="000000">
+                <a:alpha val="63000"/>
+              </a:srgbClr>
+            </a:outerShdw>
+          </a:effectLst>
+        </a:effectStyle>
+      </a:effectStyleLst>
+      <a:bgFillStyleLst>
+        <a:solidFill>
+          <a:schemeClr val="phClr"/>
+        </a:solidFill>
+        <a:solidFill>
+          <a:schemeClr val="phClr">
+            <a:tint val="95000"/>
+            <a:satMod val="170000"/>
+          </a:schemeClr>
+        </a:solidFill>
+        <a:gradFill rotWithShape="1">
+          <a:gsLst>
+            <a:gs pos="0">
+              <a:schemeClr val="phClr">
+                <a:tint val="93000"/>
+                <a:satMod val="150000"/>
+                <a:shade val="98000"/>
+                <a:lumMod val="102000"/>
+              </a:schemeClr>
+            </a:gs>
+            <a:gs pos="50000">
+              <a:schemeClr val="phClr">
+                <a:tint val="98000"/>
+                <a:satMod val="130000"/>
+                <a:shade val="90000"/>
+                <a:lumMod val="103000"/>
+              </a:schemeClr>
+            </a:gs>
+            <a:gs pos="100000">
+              <a:schemeClr val="phClr">
+                <a:shade val="63000"/>
+                <a:satMod val="120000"/>
+              </a:schemeClr>
+            </a:gs>
+          </a:gsLst>
+          <a:lin ang="5400000" scaled="0"/>
+        </a:gradFill>
+      </a:bgFillStyleLst>
+    </a:fmtScheme>
+  </a:themeElements>
+  <a:objectDefaults>
+    <a:lnDef>
+      <a:spPr/>
+      <a:bodyPr/>
+      <a:lstStyle/>
+      <a:style>
+        <a:lnRef idx="2">
+          <a:schemeClr val="accent1"/>
+        </a:lnRef>
+        <a:fillRef idx="0">
+          <a:schemeClr val="accent1"/>
+        </a:fillRef>
+        <a:effectRef idx="1">
+          <a:schemeClr val="accent1"/>
+        </a:effectRef>
+        <a:fontRef idx="minor">
+          <a:schemeClr val="tx1"/>
+        </a:fontRef>
+      </a:style>
+    </a:lnDef>
+  </a:objectDefaults>
+  <a:extraClrSchemeLst/>
+  <a:extLst>
+    <a:ext uri="{05A4C25C-085E-4340-85A3-A5531E510DB2}">
+      <thm15:themeFamily xmlns:thm15="http://schemas.microsoft.com/office/thememl/2012/main" name="Office Theme" id="{2E142A2C-CD16-42D6-873A-C26D2A0506FA}" vid="{1BDDFF52-6CD6-40A5-AB3C-68EB2F1E4D0A}"/>
+    </a:ext>
+  </a:extLst>
+</a:theme>
 </file>